--- a/deliverables/ShipVoice_Final_Defense_Deck_Draft.pptx
+++ b/deliverables/ShipVoice_Final_Defense_Deck_Draft.pptx
@@ -2,22 +2,22 @@
 <file path=ppt/presentation.xml><?xml version="1.0" encoding="utf-8"?>
 <p:presentation xmlns:p="http://schemas.openxmlformats.org/presentationml/2006/main">
   <p:sldMasterIdLst>
-    <p:sldMasterId xmlns:r="http://schemas.openxmlformats.org/officeDocument/2006/relationships" id="2147483648" r:id="R84bb73cb48c64e25"/>
+    <p:sldMasterId xmlns:r="http://schemas.openxmlformats.org/officeDocument/2006/relationships" id="2147483648" r:id="R926a7c4fb0ac41a4"/>
   </p:sldMasterIdLst>
   <p:notesMasterIdLst>
-    <p:notesMasterId xmlns:r="http://schemas.openxmlformats.org/officeDocument/2006/relationships" r:id="Rbb9e889d9091492d"/>
+    <p:notesMasterId xmlns:r="http://schemas.openxmlformats.org/officeDocument/2006/relationships" r:id="Rbc5b16dcc661424f"/>
   </p:notesMasterIdLst>
   <p:sldIdLst>
-    <p:sldId xmlns:r="http://schemas.openxmlformats.org/officeDocument/2006/relationships" id="256" r:id="R6e132c3087984412"/>
-    <p:sldId xmlns:r="http://schemas.openxmlformats.org/officeDocument/2006/relationships" id="257" r:id="R13e815bb330d4450"/>
-    <p:sldId xmlns:r="http://schemas.openxmlformats.org/officeDocument/2006/relationships" id="258" r:id="R41b568431ed9479d"/>
-    <p:sldId xmlns:r="http://schemas.openxmlformats.org/officeDocument/2006/relationships" id="259" r:id="R5729f186d14140f3"/>
-    <p:sldId xmlns:r="http://schemas.openxmlformats.org/officeDocument/2006/relationships" id="260" r:id="R83211e0c8d5e4779"/>
-    <p:sldId xmlns:r="http://schemas.openxmlformats.org/officeDocument/2006/relationships" id="261" r:id="Rc1c464c968c84bb3"/>
-    <p:sldId xmlns:r="http://schemas.openxmlformats.org/officeDocument/2006/relationships" id="262" r:id="R683273eb0f8a47e0"/>
-    <p:sldId xmlns:r="http://schemas.openxmlformats.org/officeDocument/2006/relationships" id="263" r:id="R12e80f747e344de0"/>
-    <p:sldId xmlns:r="http://schemas.openxmlformats.org/officeDocument/2006/relationships" id="264" r:id="Rc753b5adc00141e9"/>
-    <p:sldId xmlns:r="http://schemas.openxmlformats.org/officeDocument/2006/relationships" id="265" r:id="R8d733c0830fd4836"/>
+    <p:sldId xmlns:r="http://schemas.openxmlformats.org/officeDocument/2006/relationships" id="256" r:id="R981a5223c96c41d3"/>
+    <p:sldId xmlns:r="http://schemas.openxmlformats.org/officeDocument/2006/relationships" id="257" r:id="R5001b0dee1d045ff"/>
+    <p:sldId xmlns:r="http://schemas.openxmlformats.org/officeDocument/2006/relationships" id="258" r:id="Rdadc6dd0e0ce41af"/>
+    <p:sldId xmlns:r="http://schemas.openxmlformats.org/officeDocument/2006/relationships" id="259" r:id="R8ca7eee4058549d2"/>
+    <p:sldId xmlns:r="http://schemas.openxmlformats.org/officeDocument/2006/relationships" id="260" r:id="Rb0e084847fc84840"/>
+    <p:sldId xmlns:r="http://schemas.openxmlformats.org/officeDocument/2006/relationships" id="261" r:id="Rfa35439be1af4a55"/>
+    <p:sldId xmlns:r="http://schemas.openxmlformats.org/officeDocument/2006/relationships" id="262" r:id="R781309b193bf4b1a"/>
+    <p:sldId xmlns:r="http://schemas.openxmlformats.org/officeDocument/2006/relationships" id="263" r:id="Rba2954de431d4d37"/>
+    <p:sldId xmlns:r="http://schemas.openxmlformats.org/officeDocument/2006/relationships" id="264" r:id="Rf42838a970594a47"/>
+    <p:sldId xmlns:r="http://schemas.openxmlformats.org/officeDocument/2006/relationships" id="265" r:id="R50d9afe07a7646cf"/>
   </p:sldIdLst>
   <p:sldSz cx="12192000" cy="6858000"/>
   <p:notesSz cx="6858000" cy="9144000"/>
@@ -319,12 +319,58 @@
         <a:solidFill>
           <a:schemeClr val="phClr"/>
         </a:solidFill>
-        <a:solidFill>
-          <a:schemeClr val="dk1"/>
-        </a:solidFill>
-        <a:solidFill>
-          <a:schemeClr val="accent1"/>
-        </a:solidFill>
+        <a:gradFill>
+          <a:gsLst>
+            <a:gs pos="0">
+              <a:schemeClr val="phClr">
+                <a:tint val="67000"/>
+                <a:lumMod val="110000"/>
+                <a:satMod val="105000"/>
+              </a:schemeClr>
+            </a:gs>
+            <a:gs pos="50000">
+              <a:schemeClr val="phClr">
+                <a:tint val="73000"/>
+                <a:lumMod val="105000"/>
+                <a:satMod val="103000"/>
+              </a:schemeClr>
+            </a:gs>
+            <a:gs pos="100000">
+              <a:schemeClr val="phClr">
+                <a:tint val="81000"/>
+                <a:lumMod val="105000"/>
+                <a:satMod val="109000"/>
+              </a:schemeClr>
+            </a:gs>
+          </a:gsLst>
+          <a:lin ang="5400000" scaled="0"/>
+        </a:gradFill>
+        <a:gradFill>
+          <a:gsLst>
+            <a:gs pos="0">
+              <a:schemeClr val="phClr">
+                <a:tint val="94000"/>
+                <a:lumMod val="102000"/>
+                <a:satMod val="103000"/>
+              </a:schemeClr>
+            </a:gs>
+            <a:gs pos="50000">
+              <a:schemeClr val="phClr">
+                <a:shade val="100000"/>
+                <a:lumMod val="100000"/>
+                <a:satMod val="110000"/>
+              </a:schemeClr>
+            </a:gs>
+            <a:gs pos="100000">
+              <a:schemeClr val="phClr">
+                <a:shade val="78000"/>
+                <a:lumMod val="99000"/>
+                <a:satMod val="120000"/>
+              </a:schemeClr>
+            </a:gs>
+          </a:gsLst>
+          <a:lin ang="5400000" scaled="0"/>
+        </a:gradFill>
       </a:fillStyleLst>
       <a:lnStyleLst>
         <a:ln w="12700">
@@ -1158,7 +1204,7 @@
   </p:cSld>
   <p:clrMap bg1="lt1" tx1="dk1" bg2="lt2" tx2="dk2" accent1="accent1" accent2="accent2" accent3="accent3" accent4="accent4" accent5="accent5" accent6="accent6" hlink="hlink" folHlink="folHlink"/>
   <p:sldLayoutIdLst>
-    <p:sldLayoutId xmlns:r="http://schemas.openxmlformats.org/officeDocument/2006/relationships" id="2147483649" r:id="Rfd5c53b3408c4ea8"/>
+    <p:sldLayoutId xmlns:r="http://schemas.openxmlformats.org/officeDocument/2006/relationships" id="2147483649" r:id="R00eb673aa1074b3d"/>
   </p:sldLayoutIdLst>
   <p:txStyles>
     <p:titleStyle>
@@ -1498,12 +1544,58 @@
         <a:solidFill>
           <a:schemeClr val="phClr"/>
         </a:solidFill>
-        <a:solidFill>
-          <a:schemeClr val="dk1"/>
-        </a:solidFill>
-        <a:solidFill>
-          <a:schemeClr val="accent1"/>
-        </a:solidFill>
+        <a:gradFill>
+          <a:gsLst>
+            <a:gs pos="0">
+              <a:schemeClr val="phClr">
+                <a:tint val="67000"/>
+                <a:lumMod val="110000"/>
+                <a:satMod val="105000"/>
+              </a:schemeClr>
+            </a:gs>
+            <a:gs pos="50000">
+              <a:schemeClr val="phClr">
+                <a:tint val="73000"/>
+                <a:lumMod val="105000"/>
+                <a:satMod val="103000"/>
+              </a:schemeClr>
+            </a:gs>
+            <a:gs pos="100000">
+              <a:schemeClr val="phClr">
+                <a:tint val="81000"/>
+                <a:lumMod val="105000"/>
+                <a:satMod val="109000"/>
+              </a:schemeClr>
+            </a:gs>
+          </a:gsLst>
+          <a:lin ang="5400000" scaled="0"/>
+        </a:gradFill>
+        <a:gradFill>
+          <a:gsLst>
+            <a:gs pos="0">
+              <a:schemeClr val="phClr">
+                <a:tint val="94000"/>
+                <a:lumMod val="102000"/>
+                <a:satMod val="103000"/>
+              </a:schemeClr>
+            </a:gs>
+            <a:gs pos="50000">
+              <a:schemeClr val="phClr">
+                <a:shade val="100000"/>
+                <a:lumMod val="100000"/>
+                <a:satMod val="110000"/>
+              </a:schemeClr>
+            </a:gs>
+            <a:gs pos="100000">
+              <a:schemeClr val="phClr">
+                <a:shade val="78000"/>
+                <a:lumMod val="99000"/>
+                <a:satMod val="120000"/>
+              </a:schemeClr>
+            </a:gs>
+          </a:gsLst>
+          <a:lin ang="5400000" scaled="0"/>
+        </a:gradFill>
       </a:fillStyleLst>
       <a:lnStyleLst>
         <a:ln w="12700">
@@ -1656,7 +1748,7 @@
           <p:cNvPr id="1" name="">
             <a:extLst xmlns:a="http://schemas.openxmlformats.org/drawingml/2006/main">
               <a:ext uri="{FF2B5EF4-FFF2-40B4-BE49-F238E27FC236}">
-                <a16:creationId xmlns:a16="http://schemas.microsoft.com/office/drawing/2014/main" id="{3568A791-20DA-4313-BDF7-6744C0821FE3}"/>
+                <a16:creationId xmlns:a16="http://schemas.microsoft.com/office/drawing/2014/main" id="{A7C9194A-2221-418C-8690-B10FE1764DD6}"/>
               </a:ext>
             </a:extLst>
           </p:cNvPr>
@@ -1689,7 +1781,7 @@
           <p:cNvPr id="2" name="">
             <a:extLst xmlns:a="http://schemas.openxmlformats.org/drawingml/2006/main">
               <a:ext uri="{FF2B5EF4-FFF2-40B4-BE49-F238E27FC236}">
-                <a16:creationId xmlns:a16="http://schemas.microsoft.com/office/drawing/2014/main" id="{9B5D51D3-64AF-4CCE-9F65-09C82076EB43}"/>
+                <a16:creationId xmlns:a16="http://schemas.microsoft.com/office/drawing/2014/main" id="{63805BE0-2519-40E9-9639-42F9AFC6355B}"/>
               </a:ext>
             </a:extLst>
           </p:cNvPr>
@@ -1722,7 +1814,7 @@
           <p:cNvPr id="3" name="">
             <a:extLst xmlns:a="http://schemas.openxmlformats.org/drawingml/2006/main">
               <a:ext uri="{FF2B5EF4-FFF2-40B4-BE49-F238E27FC236}">
-                <a16:creationId xmlns:a16="http://schemas.microsoft.com/office/drawing/2014/main" id="{8EE6B993-ECDA-4119-B0B0-88070439FDCB}"/>
+                <a16:creationId xmlns:a16="http://schemas.microsoft.com/office/drawing/2014/main" id="{D2A7B2FC-9333-4B14-A343-6BC6B8CBFEDB}"/>
               </a:ext>
             </a:extLst>
           </p:cNvPr>
@@ -1786,7 +1878,7 @@
           <p:cNvPr id="4" name="">
             <a:extLst xmlns:a="http://schemas.openxmlformats.org/drawingml/2006/main">
               <a:ext uri="{FF2B5EF4-FFF2-40B4-BE49-F238E27FC236}">
-                <a16:creationId xmlns:a16="http://schemas.microsoft.com/office/drawing/2014/main" id="{5F2F7244-429F-44CA-9765-17A7C38F3897}"/>
+                <a16:creationId xmlns:a16="http://schemas.microsoft.com/office/drawing/2014/main" id="{1695146F-1C6D-4D14-9D83-D32B3DF4FD13}"/>
               </a:ext>
             </a:extLst>
           </p:cNvPr>
@@ -1826,9 +1918,9 @@
                 <a:solidFill>
                   <a:srgbClr val="DDEBFF"/>
                 </a:solidFill>
-                <a:latin typeface="Aptos"/>
-                <a:ea typeface="Aptos"/>
-                <a:cs typeface="Aptos"/>
+                <a:latin typeface="Microsoft YaHei"/>
+                <a:ea typeface="Microsoft YaHei"/>
+                <a:cs typeface="Microsoft YaHei"/>
               </a:defRPr>
             </a:pPr>
             <a:r>
@@ -1836,9 +1928,9 @@
                 <a:solidFill>
                   <a:srgbClr val="DDEBFF"/>
                 </a:solidFill>
-                <a:latin typeface="Aptos"/>
-                <a:ea typeface="Aptos"/>
-                <a:cs typeface="Aptos"/>
+                <a:latin typeface="Microsoft YaHei"/>
+                <a:ea typeface="Microsoft YaHei"/>
+                <a:cs typeface="Microsoft YaHei"/>
               </a:rPr>
               <a:t>船厂安全实时语音问答助手</a:t>
             </a:r>
@@ -1850,7 +1942,7 @@
           <p:cNvPr id="5" name="">
             <a:extLst xmlns:a="http://schemas.openxmlformats.org/drawingml/2006/main">
               <a:ext uri="{FF2B5EF4-FFF2-40B4-BE49-F238E27FC236}">
-                <a16:creationId xmlns:a16="http://schemas.microsoft.com/office/drawing/2014/main" id="{8B4E3A69-730F-4FC8-A6EE-0099EB60A074}"/>
+                <a16:creationId xmlns:a16="http://schemas.microsoft.com/office/drawing/2014/main" id="{8AFE55A8-70AD-499C-8AD9-B561A885E94F}"/>
               </a:ext>
             </a:extLst>
           </p:cNvPr>
@@ -1890,9 +1982,9 @@
                 <a:solidFill>
                   <a:srgbClr val="A9C7F5"/>
                 </a:solidFill>
-                <a:latin typeface="Aptos"/>
-                <a:ea typeface="Aptos"/>
-                <a:cs typeface="Aptos"/>
+                <a:latin typeface="Microsoft YaHei"/>
+                <a:ea typeface="Microsoft YaHei"/>
+                <a:cs typeface="Microsoft YaHei"/>
               </a:defRPr>
             </a:pPr>
             <a:r>
@@ -1900,9 +1992,9 @@
                 <a:solidFill>
                   <a:srgbClr val="A9C7F5"/>
                 </a:solidFill>
-                <a:latin typeface="Aptos"/>
-                <a:ea typeface="Aptos"/>
-                <a:cs typeface="Aptos"/>
+                <a:latin typeface="Microsoft YaHei"/>
+                <a:ea typeface="Microsoft YaHei"/>
+                <a:cs typeface="Microsoft YaHei"/>
               </a:rPr>
               <a:t>A2 级联式语音问答系统复现与改进 | 安全门控 + RAG + Qwen LoRA 实验</a:t>
             </a:r>
@@ -1914,7 +2006,7 @@
           <p:cNvPr id="6" name="">
             <a:extLst xmlns:a="http://schemas.openxmlformats.org/drawingml/2006/main">
               <a:ext uri="{FF2B5EF4-FFF2-40B4-BE49-F238E27FC236}">
-                <a16:creationId xmlns:a16="http://schemas.microsoft.com/office/drawing/2014/main" id="{92A3A411-1A9B-48C9-A234-0B9DF63251B6}"/>
+                <a16:creationId xmlns:a16="http://schemas.microsoft.com/office/drawing/2014/main" id="{203F0D6C-DF19-4F4B-9A64-1177C80A6399}"/>
               </a:ext>
             </a:extLst>
           </p:cNvPr>
@@ -1947,7 +2039,7 @@
           <p:cNvPr id="7" name="">
             <a:extLst xmlns:a="http://schemas.openxmlformats.org/drawingml/2006/main">
               <a:ext uri="{FF2B5EF4-FFF2-40B4-BE49-F238E27FC236}">
-                <a16:creationId xmlns:a16="http://schemas.microsoft.com/office/drawing/2014/main" id="{EE49C4F0-943E-4817-AE12-1AA7A9FBE177}"/>
+                <a16:creationId xmlns:a16="http://schemas.microsoft.com/office/drawing/2014/main" id="{BD4EFE18-E8B5-4930-B1FF-9D4B5FE456EE}"/>
               </a:ext>
             </a:extLst>
           </p:cNvPr>
@@ -2011,7 +2103,7 @@
           <p:cNvPr id="8" name="">
             <a:extLst xmlns:a="http://schemas.openxmlformats.org/drawingml/2006/main">
               <a:ext uri="{FF2B5EF4-FFF2-40B4-BE49-F238E27FC236}">
-                <a16:creationId xmlns:a16="http://schemas.microsoft.com/office/drawing/2014/main" id="{D1D060D3-0275-4F4A-AA4A-A622208D7094}"/>
+                <a16:creationId xmlns:a16="http://schemas.microsoft.com/office/drawing/2014/main" id="{FC1463CD-A034-4CAE-85DE-8BA2674FA2FB}"/>
               </a:ext>
             </a:extLst>
           </p:cNvPr>
@@ -2051,9 +2143,9 @@
                 <a:solidFill>
                   <a:srgbClr val="B7C9E8"/>
                 </a:solidFill>
-                <a:latin typeface="Aptos"/>
-                <a:ea typeface="Aptos"/>
-                <a:cs typeface="Aptos"/>
+                <a:latin typeface="Microsoft YaHei"/>
+                <a:ea typeface="Microsoft YaHei"/>
+                <a:cs typeface="Microsoft YaHei"/>
               </a:defRPr>
             </a:pPr>
             <a:r>
@@ -2061,9 +2153,9 @@
                 <a:solidFill>
                   <a:srgbClr val="B7C9E8"/>
                 </a:solidFill>
-                <a:latin typeface="Aptos"/>
-                <a:ea typeface="Aptos"/>
-                <a:cs typeface="Aptos"/>
+                <a:latin typeface="Microsoft YaHei"/>
+                <a:ea typeface="Microsoft YaHei"/>
+                <a:cs typeface="Microsoft YaHei"/>
               </a:rPr>
               <a:t>知识条目</a:t>
             </a:r>
@@ -2075,7 +2167,7 @@
           <p:cNvPr id="9" name="">
             <a:extLst xmlns:a="http://schemas.openxmlformats.org/drawingml/2006/main">
               <a:ext uri="{FF2B5EF4-FFF2-40B4-BE49-F238E27FC236}">
-                <a16:creationId xmlns:a16="http://schemas.microsoft.com/office/drawing/2014/main" id="{4D92C796-845A-457C-B0F4-F70932221E93}"/>
+                <a16:creationId xmlns:a16="http://schemas.microsoft.com/office/drawing/2014/main" id="{94CFB121-FBE6-4306-98E5-1136F9E96696}"/>
               </a:ext>
             </a:extLst>
           </p:cNvPr>
@@ -2139,7 +2231,7 @@
           <p:cNvPr id="10" name="">
             <a:extLst xmlns:a="http://schemas.openxmlformats.org/drawingml/2006/main">
               <a:ext uri="{FF2B5EF4-FFF2-40B4-BE49-F238E27FC236}">
-                <a16:creationId xmlns:a16="http://schemas.microsoft.com/office/drawing/2014/main" id="{2C67B85D-D473-4E5E-ADF1-C15610030E2B}"/>
+                <a16:creationId xmlns:a16="http://schemas.microsoft.com/office/drawing/2014/main" id="{8388740D-E290-489E-A19E-BC132A7787D5}"/>
               </a:ext>
             </a:extLst>
           </p:cNvPr>
@@ -2179,9 +2271,9 @@
                 <a:solidFill>
                   <a:srgbClr val="B7C9E8"/>
                 </a:solidFill>
-                <a:latin typeface="Aptos"/>
-                <a:ea typeface="Aptos"/>
-                <a:cs typeface="Aptos"/>
+                <a:latin typeface="Microsoft YaHei"/>
+                <a:ea typeface="Microsoft YaHei"/>
+                <a:cs typeface="Microsoft YaHei"/>
               </a:defRPr>
             </a:pPr>
             <a:r>
@@ -2189,9 +2281,9 @@
                 <a:solidFill>
                   <a:srgbClr val="B7C9E8"/>
                 </a:solidFill>
-                <a:latin typeface="Aptos"/>
-                <a:ea typeface="Aptos"/>
-                <a:cs typeface="Aptos"/>
+                <a:latin typeface="Microsoft YaHei"/>
+                <a:ea typeface="Microsoft YaHei"/>
+                <a:cs typeface="Microsoft YaHei"/>
               </a:rPr>
               <a:t>安全评测</a:t>
             </a:r>
@@ -2203,7 +2295,7 @@
           <p:cNvPr id="11" name="">
             <a:extLst xmlns:a="http://schemas.openxmlformats.org/drawingml/2006/main">
               <a:ext uri="{FF2B5EF4-FFF2-40B4-BE49-F238E27FC236}">
-                <a16:creationId xmlns:a16="http://schemas.microsoft.com/office/drawing/2014/main" id="{99E0FD8E-72B0-4596-83E4-250740EAEF64}"/>
+                <a16:creationId xmlns:a16="http://schemas.microsoft.com/office/drawing/2014/main" id="{AF5FD892-3A89-449A-B5E5-E238F6054F64}"/>
               </a:ext>
             </a:extLst>
           </p:cNvPr>
@@ -2267,7 +2359,7 @@
           <p:cNvPr id="12" name="">
             <a:extLst xmlns:a="http://schemas.openxmlformats.org/drawingml/2006/main">
               <a:ext uri="{FF2B5EF4-FFF2-40B4-BE49-F238E27FC236}">
-                <a16:creationId xmlns:a16="http://schemas.microsoft.com/office/drawing/2014/main" id="{332DBF33-3CA9-4D2B-A801-581911149776}"/>
+                <a16:creationId xmlns:a16="http://schemas.microsoft.com/office/drawing/2014/main" id="{1E44C037-0BC9-4EFA-87A4-ADF392BAC3A5}"/>
               </a:ext>
             </a:extLst>
           </p:cNvPr>
@@ -2307,9 +2399,9 @@
                 <a:solidFill>
                   <a:srgbClr val="B7C9E8"/>
                 </a:solidFill>
-                <a:latin typeface="Aptos"/>
-                <a:ea typeface="Aptos"/>
-                <a:cs typeface="Aptos"/>
+                <a:latin typeface="Microsoft YaHei"/>
+                <a:ea typeface="Microsoft YaHei"/>
+                <a:cs typeface="Microsoft YaHei"/>
               </a:defRPr>
             </a:pPr>
             <a:r>
@@ -2317,9 +2409,9 @@
                 <a:solidFill>
                   <a:srgbClr val="B7C9E8"/>
                 </a:solidFill>
-                <a:latin typeface="Aptos"/>
-                <a:ea typeface="Aptos"/>
-                <a:cs typeface="Aptos"/>
+                <a:latin typeface="Microsoft YaHei"/>
+                <a:ea typeface="Microsoft YaHei"/>
+                <a:cs typeface="Microsoft YaHei"/>
               </a:rPr>
               <a:t>危险误放行</a:t>
             </a:r>
@@ -2331,7 +2423,7 @@
           <p:cNvPr id="13" name="">
             <a:extLst xmlns:a="http://schemas.openxmlformats.org/drawingml/2006/main">
               <a:ext uri="{FF2B5EF4-FFF2-40B4-BE49-F238E27FC236}">
-                <a16:creationId xmlns:a16="http://schemas.microsoft.com/office/drawing/2014/main" id="{8A73BEDB-6B54-463A-8B50-5E6F83CDF926}"/>
+                <a16:creationId xmlns:a16="http://schemas.microsoft.com/office/drawing/2014/main" id="{AB6D4852-C508-4B27-9F91-5D6405992F31}"/>
               </a:ext>
             </a:extLst>
           </p:cNvPr>
@@ -2385,7 +2477,7 @@
                 <a:ea typeface="Aptos Display"/>
                 <a:cs typeface="Aptos Display"/>
               </a:rPr>
-              <a:t>1.78</a:t>
+              <a:t>0.168</a:t>
             </a:r>
           </a:p>
         </p:txBody>
@@ -2395,7 +2487,7 @@
           <p:cNvPr id="14" name="">
             <a:extLst xmlns:a="http://schemas.openxmlformats.org/drawingml/2006/main">
               <a:ext uri="{FF2B5EF4-FFF2-40B4-BE49-F238E27FC236}">
-                <a16:creationId xmlns:a16="http://schemas.microsoft.com/office/drawing/2014/main" id="{B7D0A084-8D4E-454A-9AA4-CA45B46DBC73}"/>
+                <a16:creationId xmlns:a16="http://schemas.microsoft.com/office/drawing/2014/main" id="{844D6AC9-9891-4030-8CC7-3BE3B2C15FAE}"/>
               </a:ext>
             </a:extLst>
           </p:cNvPr>
@@ -2435,9 +2527,9 @@
                 <a:solidFill>
                   <a:srgbClr val="B7C9E8"/>
                 </a:solidFill>
-                <a:latin typeface="Aptos"/>
-                <a:ea typeface="Aptos"/>
-                <a:cs typeface="Aptos"/>
+                <a:latin typeface="Microsoft YaHei"/>
+                <a:ea typeface="Microsoft YaHei"/>
+                <a:cs typeface="Microsoft YaHei"/>
               </a:defRPr>
             </a:pPr>
             <a:r>
@@ -2445,9 +2537,9 @@
                 <a:solidFill>
                   <a:srgbClr val="B7C9E8"/>
                 </a:solidFill>
-                <a:latin typeface="Aptos"/>
-                <a:ea typeface="Aptos"/>
-                <a:cs typeface="Aptos"/>
+                <a:latin typeface="Microsoft YaHei"/>
+                <a:ea typeface="Microsoft YaHei"/>
+                <a:cs typeface="Microsoft YaHei"/>
               </a:rPr>
               <a:t>LoRA train loss</a:t>
             </a:r>
@@ -2459,7 +2551,7 @@
           <p:cNvPr id="15" name="">
             <a:extLst xmlns:a="http://schemas.openxmlformats.org/drawingml/2006/main">
               <a:ext uri="{FF2B5EF4-FFF2-40B4-BE49-F238E27FC236}">
-                <a16:creationId xmlns:a16="http://schemas.microsoft.com/office/drawing/2014/main" id="{F71FFCB9-8DEF-44A4-B293-849BC75C9989}"/>
+                <a16:creationId xmlns:a16="http://schemas.microsoft.com/office/drawing/2014/main" id="{3449874D-3B02-406C-803F-00127E4A56C1}"/>
               </a:ext>
             </a:extLst>
           </p:cNvPr>
@@ -2492,7 +2584,7 @@
           <p:cNvPr id="16" name="">
             <a:extLst xmlns:a="http://schemas.openxmlformats.org/drawingml/2006/main">
               <a:ext uri="{FF2B5EF4-FFF2-40B4-BE49-F238E27FC236}">
-                <a16:creationId xmlns:a16="http://schemas.microsoft.com/office/drawing/2014/main" id="{3BEA99FF-90B2-4C50-BC95-97ACDCE40E5D}"/>
+                <a16:creationId xmlns:a16="http://schemas.microsoft.com/office/drawing/2014/main" id="{5512262E-A5F2-4E57-BF92-7FCC5D1D9AF7}"/>
               </a:ext>
             </a:extLst>
           </p:cNvPr>
@@ -2532,9 +2624,9 @@
                 <a:solidFill>
                   <a:srgbClr val="DDEBFF"/>
                 </a:solidFill>
-                <a:latin typeface="Aptos"/>
-                <a:ea typeface="Aptos"/>
-                <a:cs typeface="Aptos"/>
+                <a:latin typeface="Microsoft YaHei"/>
+                <a:ea typeface="Microsoft YaHei"/>
+                <a:cs typeface="Microsoft YaHei"/>
               </a:defRPr>
             </a:pPr>
             <a:r>
@@ -2542,9 +2634,9 @@
                 <a:solidFill>
                   <a:srgbClr val="DDEBFF"/>
                 </a:solidFill>
-                <a:latin typeface="Aptos"/>
-                <a:ea typeface="Aptos"/>
-                <a:cs typeface="Aptos"/>
+                <a:latin typeface="Microsoft YaHei"/>
+                <a:ea typeface="Microsoft YaHei"/>
+                <a:cs typeface="Microsoft YaHei"/>
               </a:rPr>
               <a:t>姓名 / 学号待补充</a:t>
             </a:r>
@@ -2556,7 +2648,7 @@
           <p:cNvPr id="17" name="">
             <a:extLst xmlns:a="http://schemas.openxmlformats.org/drawingml/2006/main">
               <a:ext uri="{FF2B5EF4-FFF2-40B4-BE49-F238E27FC236}">
-                <a16:creationId xmlns:a16="http://schemas.microsoft.com/office/drawing/2014/main" id="{A22FE00E-A543-4F61-9384-999C140C087A}"/>
+                <a16:creationId xmlns:a16="http://schemas.microsoft.com/office/drawing/2014/main" id="{F740709D-8FD3-497B-A2DA-415C17AB86ED}"/>
               </a:ext>
             </a:extLst>
           </p:cNvPr>
@@ -2596,9 +2688,9 @@
                 <a:solidFill>
                   <a:srgbClr val="B7C9E8"/>
                 </a:solidFill>
-                <a:latin typeface="Aptos"/>
-                <a:ea typeface="Aptos"/>
-                <a:cs typeface="Aptos"/>
+                <a:latin typeface="Microsoft YaHei"/>
+                <a:ea typeface="Microsoft YaHei"/>
+                <a:cs typeface="Microsoft YaHei"/>
               </a:defRPr>
             </a:pPr>
             <a:r>
@@ -2606,9 +2698,9 @@
                 <a:solidFill>
                   <a:srgbClr val="B7C9E8"/>
                 </a:solidFill>
-                <a:latin typeface="Aptos"/>
-                <a:ea typeface="Aptos"/>
-                <a:cs typeface="Aptos"/>
+                <a:latin typeface="Microsoft YaHei"/>
+                <a:ea typeface="Microsoft YaHei"/>
+                <a:cs typeface="Microsoft YaHei"/>
               </a:rPr>
               <a:t>2026-06-08</a:t>
             </a:r>
@@ -2618,7 +2710,7 @@
     </p:spTree>
     <p:extLst>
       <p:ext uri="{BB962C8B-B14F-4D97-AF65-F5344CB8AC3E}">
-        <p14:creationId xmlns:p14="http://schemas.microsoft.com/office/powerpoint/2010/main" val="1485318225"/>
+        <p14:creationId xmlns:p14="http://schemas.microsoft.com/office/powerpoint/2010/main" val="1261518638"/>
       </p:ext>
     </p:extLst>
   </p:cSld>
@@ -2642,7 +2734,7 @@
           <p:cNvPr id="1" name="">
             <a:extLst xmlns:a="http://schemas.openxmlformats.org/drawingml/2006/main">
               <a:ext uri="{FF2B5EF4-FFF2-40B4-BE49-F238E27FC236}">
-                <a16:creationId xmlns:a16="http://schemas.microsoft.com/office/drawing/2014/main" id="{6E218BB3-994C-4AFD-B629-E532485A58F8}"/>
+                <a16:creationId xmlns:a16="http://schemas.microsoft.com/office/drawing/2014/main" id="{D95E0247-A173-4F36-B9D8-533A02E7BB5D}"/>
               </a:ext>
             </a:extLst>
           </p:cNvPr>
@@ -2675,7 +2767,7 @@
           <p:cNvPr id="2" name="">
             <a:extLst xmlns:a="http://schemas.openxmlformats.org/drawingml/2006/main">
               <a:ext uri="{FF2B5EF4-FFF2-40B4-BE49-F238E27FC236}">
-                <a16:creationId xmlns:a16="http://schemas.microsoft.com/office/drawing/2014/main" id="{D1172051-83D6-4798-BFC8-DCF71B611A69}"/>
+                <a16:creationId xmlns:a16="http://schemas.microsoft.com/office/drawing/2014/main" id="{D8F20AFC-0435-45DD-89AC-A7313CF08B63}"/>
               </a:ext>
             </a:extLst>
           </p:cNvPr>
@@ -2708,7 +2800,7 @@
           <p:cNvPr id="3" name="">
             <a:extLst xmlns:a="http://schemas.openxmlformats.org/drawingml/2006/main">
               <a:ext uri="{FF2B5EF4-FFF2-40B4-BE49-F238E27FC236}">
-                <a16:creationId xmlns:a16="http://schemas.microsoft.com/office/drawing/2014/main" id="{75DA08CA-0FCF-4B96-AE59-C7F7D0E34A6C}"/>
+                <a16:creationId xmlns:a16="http://schemas.microsoft.com/office/drawing/2014/main" id="{24BCE38D-0B31-4EA7-9AEB-69AC90671113}"/>
               </a:ext>
             </a:extLst>
           </p:cNvPr>
@@ -2748,9 +2840,9 @@
                 <a:solidFill>
                   <a:srgbClr val="06B6D4"/>
                 </a:solidFill>
-                <a:latin typeface="Aptos"/>
-                <a:ea typeface="Aptos"/>
-                <a:cs typeface="Aptos"/>
+                <a:latin typeface="Microsoft YaHei"/>
+                <a:ea typeface="Microsoft YaHei"/>
+                <a:cs typeface="Microsoft YaHei"/>
               </a:defRPr>
             </a:pPr>
             <a:r>
@@ -2758,9 +2850,9 @@
                 <a:solidFill>
                   <a:srgbClr val="06B6D4"/>
                 </a:solidFill>
-                <a:latin typeface="Aptos"/>
-                <a:ea typeface="Aptos"/>
-                <a:cs typeface="Aptos"/>
+                <a:latin typeface="Microsoft YaHei"/>
+                <a:ea typeface="Microsoft YaHei"/>
+                <a:cs typeface="Microsoft YaHei"/>
               </a:rPr>
               <a:t>CONCLUSION</a:t>
             </a:r>
@@ -2772,7 +2864,7 @@
           <p:cNvPr id="4" name="">
             <a:extLst xmlns:a="http://schemas.openxmlformats.org/drawingml/2006/main">
               <a:ext uri="{FF2B5EF4-FFF2-40B4-BE49-F238E27FC236}">
-                <a16:creationId xmlns:a16="http://schemas.microsoft.com/office/drawing/2014/main" id="{49098A2D-258D-4CC2-8BF6-7AB81FED7ECE}"/>
+                <a16:creationId xmlns:a16="http://schemas.microsoft.com/office/drawing/2014/main" id="{60718A46-D30E-4F56-8E21-18A9DB17E037}"/>
               </a:ext>
             </a:extLst>
           </p:cNvPr>
@@ -2836,7 +2928,7 @@
           <p:cNvPr id="5" name="">
             <a:extLst xmlns:a="http://schemas.openxmlformats.org/drawingml/2006/main">
               <a:ext uri="{FF2B5EF4-FFF2-40B4-BE49-F238E27FC236}">
-                <a16:creationId xmlns:a16="http://schemas.microsoft.com/office/drawing/2014/main" id="{B6A4389D-641C-472E-B883-2E4148778142}"/>
+                <a16:creationId xmlns:a16="http://schemas.microsoft.com/office/drawing/2014/main" id="{9E2E5E36-3D38-48F5-B4E1-2AB23F0A6D07}"/>
               </a:ext>
             </a:extLst>
           </p:cNvPr>
@@ -2876,9 +2968,9 @@
                 <a:solidFill>
                   <a:srgbClr val="B9D6FF"/>
                 </a:solidFill>
-                <a:latin typeface="Aptos"/>
-                <a:ea typeface="Aptos"/>
-                <a:cs typeface="Aptos"/>
+                <a:latin typeface="Microsoft YaHei"/>
+                <a:ea typeface="Microsoft YaHei"/>
+                <a:cs typeface="Microsoft YaHei"/>
               </a:defRPr>
             </a:pPr>
             <a:r>
@@ -2886,9 +2978,9 @@
                 <a:solidFill>
                   <a:srgbClr val="B9D6FF"/>
                 </a:solidFill>
-                <a:latin typeface="Aptos"/>
-                <a:ea typeface="Aptos"/>
-                <a:cs typeface="Aptos"/>
+                <a:latin typeface="Microsoft YaHei"/>
+                <a:ea typeface="Microsoft YaHei"/>
+                <a:cs typeface="Microsoft YaHei"/>
               </a:rPr>
               <a:t>微调是加分项，安全架构才是核心竞争力。</a:t>
             </a:r>
@@ -2900,7 +2992,7 @@
           <p:cNvPr id="6" name="">
             <a:extLst xmlns:a="http://schemas.openxmlformats.org/drawingml/2006/main">
               <a:ext uri="{FF2B5EF4-FFF2-40B4-BE49-F238E27FC236}">
-                <a16:creationId xmlns:a16="http://schemas.microsoft.com/office/drawing/2014/main" id="{0891DA42-A629-48CB-9816-C7D86674D3F6}"/>
+                <a16:creationId xmlns:a16="http://schemas.microsoft.com/office/drawing/2014/main" id="{F174DA50-5164-48A9-A673-11BEDDA49ED7}"/>
               </a:ext>
             </a:extLst>
           </p:cNvPr>
@@ -2933,7 +3025,7 @@
           <p:cNvPr id="7" name="">
             <a:extLst xmlns:a="http://schemas.openxmlformats.org/drawingml/2006/main">
               <a:ext uri="{FF2B5EF4-FFF2-40B4-BE49-F238E27FC236}">
-                <a16:creationId xmlns:a16="http://schemas.microsoft.com/office/drawing/2014/main" id="{B8722535-0221-41B2-AA1D-031CC4D19DF6}"/>
+                <a16:creationId xmlns:a16="http://schemas.microsoft.com/office/drawing/2014/main" id="{F278E39A-D78B-40AA-8B16-9DC09878181D}"/>
               </a:ext>
             </a:extLst>
           </p:cNvPr>
@@ -2966,7 +3058,7 @@
           <p:cNvPr id="8" name="">
             <a:extLst xmlns:a="http://schemas.openxmlformats.org/drawingml/2006/main">
               <a:ext uri="{FF2B5EF4-FFF2-40B4-BE49-F238E27FC236}">
-                <a16:creationId xmlns:a16="http://schemas.microsoft.com/office/drawing/2014/main" id="{ADA869C1-85A7-4AB6-AD9D-EFBC7A6116AF}"/>
+                <a16:creationId xmlns:a16="http://schemas.microsoft.com/office/drawing/2014/main" id="{40A4F7D8-B5F2-40AC-BB45-86B93E1FF9E7}"/>
               </a:ext>
             </a:extLst>
           </p:cNvPr>
@@ -3006,9 +3098,9 @@
                 <a:solidFill>
                   <a:srgbClr val="DDEBFF"/>
                 </a:solidFill>
-                <a:latin typeface="Aptos"/>
-                <a:ea typeface="Aptos"/>
-                <a:cs typeface="Aptos"/>
+                <a:latin typeface="Microsoft YaHei"/>
+                <a:ea typeface="Microsoft YaHei"/>
+                <a:cs typeface="Microsoft YaHei"/>
               </a:defRPr>
             </a:pPr>
             <a:r>
@@ -3016,9 +3108,9 @@
                 <a:solidFill>
                   <a:srgbClr val="DDEBFF"/>
                 </a:solidFill>
-                <a:latin typeface="Aptos"/>
-                <a:ea typeface="Aptos"/>
-                <a:cs typeface="Aptos"/>
+                <a:latin typeface="Microsoft YaHei"/>
+                <a:ea typeface="Microsoft YaHei"/>
+                <a:cs typeface="Microsoft YaHei"/>
               </a:rPr>
               <a:t>已经完成：可运行 demo、RAG、安全门控、benchmark、AutoDL 远端微调、base-vs-LoRA 对比、报告初稿。</a:t>
             </a:r>
@@ -3030,7 +3122,7 @@
           <p:cNvPr id="9" name="">
             <a:extLst xmlns:a="http://schemas.openxmlformats.org/drawingml/2006/main">
               <a:ext uri="{FF2B5EF4-FFF2-40B4-BE49-F238E27FC236}">
-                <a16:creationId xmlns:a16="http://schemas.microsoft.com/office/drawing/2014/main" id="{4C54DE03-7F04-47E7-91AF-18DB571D80B4}"/>
+                <a16:creationId xmlns:a16="http://schemas.microsoft.com/office/drawing/2014/main" id="{E8C92353-C80B-44E3-94C6-131241B84499}"/>
               </a:ext>
             </a:extLst>
           </p:cNvPr>
@@ -3063,7 +3155,7 @@
           <p:cNvPr id="10" name="">
             <a:extLst xmlns:a="http://schemas.openxmlformats.org/drawingml/2006/main">
               <a:ext uri="{FF2B5EF4-FFF2-40B4-BE49-F238E27FC236}">
-                <a16:creationId xmlns:a16="http://schemas.microsoft.com/office/drawing/2014/main" id="{979E8F19-9ECC-4EF5-821D-47C49C654436}"/>
+                <a16:creationId xmlns:a16="http://schemas.microsoft.com/office/drawing/2014/main" id="{DB6BE0E3-EAC3-4AE0-B653-3E91E4D109B5}"/>
               </a:ext>
             </a:extLst>
           </p:cNvPr>
@@ -3096,7 +3188,7 @@
           <p:cNvPr id="11" name="">
             <a:extLst xmlns:a="http://schemas.openxmlformats.org/drawingml/2006/main">
               <a:ext uri="{FF2B5EF4-FFF2-40B4-BE49-F238E27FC236}">
-                <a16:creationId xmlns:a16="http://schemas.microsoft.com/office/drawing/2014/main" id="{4BFC2551-D26F-41D2-AFD6-B721002FB0AC}"/>
+                <a16:creationId xmlns:a16="http://schemas.microsoft.com/office/drawing/2014/main" id="{5BC96EBA-4394-4317-82DD-03BBF7BAE58E}"/>
               </a:ext>
             </a:extLst>
           </p:cNvPr>
@@ -3136,9 +3228,9 @@
                 <a:solidFill>
                   <a:srgbClr val="DDEBFF"/>
                 </a:solidFill>
-                <a:latin typeface="Aptos"/>
-                <a:ea typeface="Aptos"/>
-                <a:cs typeface="Aptos"/>
+                <a:latin typeface="Microsoft YaHei"/>
+                <a:ea typeface="Microsoft YaHei"/>
+                <a:cs typeface="Microsoft YaHei"/>
               </a:defRPr>
             </a:pPr>
             <a:r>
@@ -3146,9 +3238,9 @@
                 <a:solidFill>
                   <a:srgbClr val="DDEBFF"/>
                 </a:solidFill>
-                <a:latin typeface="Aptos"/>
-                <a:ea typeface="Aptos"/>
-                <a:cs typeface="Aptos"/>
+                <a:latin typeface="Microsoft YaHei"/>
+                <a:ea typeface="Microsoft YaHei"/>
+                <a:cs typeface="Microsoft YaHei"/>
               </a:rPr>
               <a:t>后续补强：组员姓名学号、真实语音样例、答辩视频和最终提交包清理。</a:t>
             </a:r>
@@ -3160,7 +3252,7 @@
           <p:cNvPr id="12" name="">
             <a:extLst xmlns:a="http://schemas.openxmlformats.org/drawingml/2006/main">
               <a:ext uri="{FF2B5EF4-FFF2-40B4-BE49-F238E27FC236}">
-                <a16:creationId xmlns:a16="http://schemas.microsoft.com/office/drawing/2014/main" id="{CB79DFD5-54AD-4ECD-82AE-556433952FB8}"/>
+                <a16:creationId xmlns:a16="http://schemas.microsoft.com/office/drawing/2014/main" id="{59A02D0D-A77C-4F07-A75E-86D136F06DFA}"/>
               </a:ext>
             </a:extLst>
           </p:cNvPr>
@@ -3224,7 +3316,7 @@
           <p:cNvPr id="13" name="">
             <a:extLst xmlns:a="http://schemas.openxmlformats.org/drawingml/2006/main">
               <a:ext uri="{FF2B5EF4-FFF2-40B4-BE49-F238E27FC236}">
-                <a16:creationId xmlns:a16="http://schemas.microsoft.com/office/drawing/2014/main" id="{64A5684E-B029-4ADA-8231-9E4E960B3B2D}"/>
+                <a16:creationId xmlns:a16="http://schemas.microsoft.com/office/drawing/2014/main" id="{6F0873AD-0D3F-4B9E-8F9F-5D1018821BB7}"/>
               </a:ext>
             </a:extLst>
           </p:cNvPr>
@@ -3264,9 +3356,9 @@
                 <a:solidFill>
                   <a:srgbClr val="B7C9E8"/>
                 </a:solidFill>
-                <a:latin typeface="Aptos"/>
-                <a:ea typeface="Aptos"/>
-                <a:cs typeface="Aptos"/>
+                <a:latin typeface="Microsoft YaHei"/>
+                <a:ea typeface="Microsoft YaHei"/>
+                <a:cs typeface="Microsoft YaHei"/>
               </a:defRPr>
             </a:pPr>
             <a:r>
@@ -3274,9 +3366,9 @@
                 <a:solidFill>
                   <a:srgbClr val="B7C9E8"/>
                 </a:solidFill>
-                <a:latin typeface="Aptos"/>
-                <a:ea typeface="Aptos"/>
-                <a:cs typeface="Aptos"/>
+                <a:latin typeface="Microsoft YaHei"/>
+                <a:ea typeface="Microsoft YaHei"/>
+                <a:cs typeface="Microsoft YaHei"/>
               </a:rPr>
               <a:t>姓名 / 学号待补充</a:t>
             </a:r>
@@ -3286,7 +3378,7 @@
     </p:spTree>
     <p:extLst>
       <p:ext uri="{BB962C8B-B14F-4D97-AF65-F5344CB8AC3E}">
-        <p14:creationId xmlns:p14="http://schemas.microsoft.com/office/powerpoint/2010/main" val="483696079"/>
+        <p14:creationId xmlns:p14="http://schemas.microsoft.com/office/powerpoint/2010/main" val="1438206822"/>
       </p:ext>
     </p:extLst>
   </p:cSld>
@@ -3310,7 +3402,7 @@
           <p:cNvPr id="1" name="">
             <a:extLst xmlns:a="http://schemas.openxmlformats.org/drawingml/2006/main">
               <a:ext uri="{FF2B5EF4-FFF2-40B4-BE49-F238E27FC236}">
-                <a16:creationId xmlns:a16="http://schemas.microsoft.com/office/drawing/2014/main" id="{E79D9A53-C822-4FFD-9EDD-74874B11294F}"/>
+                <a16:creationId xmlns:a16="http://schemas.microsoft.com/office/drawing/2014/main" id="{61BD564F-E891-408A-ACC6-BFB73FF9F313}"/>
               </a:ext>
             </a:extLst>
           </p:cNvPr>
@@ -3343,7 +3435,7 @@
           <p:cNvPr id="2" name="">
             <a:extLst xmlns:a="http://schemas.openxmlformats.org/drawingml/2006/main">
               <a:ext uri="{FF2B5EF4-FFF2-40B4-BE49-F238E27FC236}">
-                <a16:creationId xmlns:a16="http://schemas.microsoft.com/office/drawing/2014/main" id="{330F2885-C56D-46B1-92BE-91E39B0A5EC4}"/>
+                <a16:creationId xmlns:a16="http://schemas.microsoft.com/office/drawing/2014/main" id="{FD430C3E-FCE3-4C95-9083-AB80B8F483F7}"/>
               </a:ext>
             </a:extLst>
           </p:cNvPr>
@@ -3376,7 +3468,7 @@
           <p:cNvPr id="3" name="">
             <a:extLst xmlns:a="http://schemas.openxmlformats.org/drawingml/2006/main">
               <a:ext uri="{FF2B5EF4-FFF2-40B4-BE49-F238E27FC236}">
-                <a16:creationId xmlns:a16="http://schemas.microsoft.com/office/drawing/2014/main" id="{D6213CBD-D4BE-49CE-80CC-9661DCFB75BB}"/>
+                <a16:creationId xmlns:a16="http://schemas.microsoft.com/office/drawing/2014/main" id="{031DA0A1-87AB-4FA3-A7D9-BE9FB504BB29}"/>
               </a:ext>
             </a:extLst>
           </p:cNvPr>
@@ -3416,9 +3508,9 @@
                 <a:solidFill>
                   <a:srgbClr val="2563EB"/>
                 </a:solidFill>
-                <a:latin typeface="Aptos"/>
-                <a:ea typeface="Aptos"/>
-                <a:cs typeface="Aptos"/>
+                <a:latin typeface="Microsoft YaHei"/>
+                <a:ea typeface="Microsoft YaHei"/>
+                <a:cs typeface="Microsoft YaHei"/>
               </a:defRPr>
             </a:pPr>
             <a:r>
@@ -3426,9 +3518,9 @@
                 <a:solidFill>
                   <a:srgbClr val="2563EB"/>
                 </a:solidFill>
-                <a:latin typeface="Aptos"/>
-                <a:ea typeface="Aptos"/>
-                <a:cs typeface="Aptos"/>
+                <a:latin typeface="Microsoft YaHei"/>
+                <a:ea typeface="Microsoft YaHei"/>
+                <a:cs typeface="Microsoft YaHei"/>
               </a:rPr>
               <a:t>PROBLEM</a:t>
             </a:r>
@@ -3440,7 +3532,7 @@
           <p:cNvPr id="4" name="">
             <a:extLst xmlns:a="http://schemas.openxmlformats.org/drawingml/2006/main">
               <a:ext uri="{FF2B5EF4-FFF2-40B4-BE49-F238E27FC236}">
-                <a16:creationId xmlns:a16="http://schemas.microsoft.com/office/drawing/2014/main" id="{4610EDAE-9610-4229-AD88-7231455A9E12}"/>
+                <a16:creationId xmlns:a16="http://schemas.microsoft.com/office/drawing/2014/main" id="{BA181611-3BD5-4F07-A8C1-3F38EE63741E}"/>
               </a:ext>
             </a:extLst>
           </p:cNvPr>
@@ -3504,7 +3596,7 @@
           <p:cNvPr id="5" name="">
             <a:extLst xmlns:a="http://schemas.openxmlformats.org/drawingml/2006/main">
               <a:ext uri="{FF2B5EF4-FFF2-40B4-BE49-F238E27FC236}">
-                <a16:creationId xmlns:a16="http://schemas.microsoft.com/office/drawing/2014/main" id="{143A53FB-AE4B-4CE8-A116-4792F3E7CF1E}"/>
+                <a16:creationId xmlns:a16="http://schemas.microsoft.com/office/drawing/2014/main" id="{FFEF1376-C58F-467C-9BFB-223C940B29F3}"/>
               </a:ext>
             </a:extLst>
           </p:cNvPr>
@@ -3544,9 +3636,9 @@
                 <a:solidFill>
                   <a:srgbClr val="64748B"/>
                 </a:solidFill>
-                <a:latin typeface="Aptos"/>
-                <a:ea typeface="Aptos"/>
-                <a:cs typeface="Aptos"/>
+                <a:latin typeface="Microsoft YaHei"/>
+                <a:ea typeface="Microsoft YaHei"/>
+                <a:cs typeface="Microsoft YaHei"/>
               </a:defRPr>
             </a:pPr>
             <a:r>
@@ -3554,9 +3646,9 @@
                 <a:solidFill>
                   <a:srgbClr val="64748B"/>
                 </a:solidFill>
-                <a:latin typeface="Aptos"/>
-                <a:ea typeface="Aptos"/>
-                <a:cs typeface="Aptos"/>
+                <a:latin typeface="Microsoft YaHei"/>
+                <a:ea typeface="Microsoft YaHei"/>
+                <a:cs typeface="Microsoft YaHei"/>
               </a:rPr>
               <a:t>高风险作业场景需要领域术语、审批约束和拒答边界。</a:t>
             </a:r>
@@ -3568,7 +3660,7 @@
           <p:cNvPr id="6" name="">
             <a:extLst xmlns:a="http://schemas.openxmlformats.org/drawingml/2006/main">
               <a:ext uri="{FF2B5EF4-FFF2-40B4-BE49-F238E27FC236}">
-                <a16:creationId xmlns:a16="http://schemas.microsoft.com/office/drawing/2014/main" id="{B56C4075-25D0-4800-9FB3-2A1E2B742A99}"/>
+                <a16:creationId xmlns:a16="http://schemas.microsoft.com/office/drawing/2014/main" id="{AD639E3C-1D09-466A-B96C-A3717D5A18AC}"/>
               </a:ext>
             </a:extLst>
           </p:cNvPr>
@@ -3601,7 +3693,7 @@
           <p:cNvPr id="7" name="">
             <a:extLst xmlns:a="http://schemas.openxmlformats.org/drawingml/2006/main">
               <a:ext uri="{FF2B5EF4-FFF2-40B4-BE49-F238E27FC236}">
-                <a16:creationId xmlns:a16="http://schemas.microsoft.com/office/drawing/2014/main" id="{2B1383C8-407C-473B-A027-14B70C2C70AD}"/>
+                <a16:creationId xmlns:a16="http://schemas.microsoft.com/office/drawing/2014/main" id="{6513DC6E-A874-412F-9F86-FAD78CF692E8}"/>
               </a:ext>
             </a:extLst>
           </p:cNvPr>
@@ -3634,7 +3726,7 @@
           <p:cNvPr id="8" name="">
             <a:extLst xmlns:a="http://schemas.openxmlformats.org/drawingml/2006/main">
               <a:ext uri="{FF2B5EF4-FFF2-40B4-BE49-F238E27FC236}">
-                <a16:creationId xmlns:a16="http://schemas.microsoft.com/office/drawing/2014/main" id="{215F9B86-DECC-4B66-8197-6514FAC6CEC0}"/>
+                <a16:creationId xmlns:a16="http://schemas.microsoft.com/office/drawing/2014/main" id="{5EFADD49-B160-4CF3-818B-255FB1789C00}"/>
               </a:ext>
             </a:extLst>
           </p:cNvPr>
@@ -3674,9 +3766,9 @@
                 <a:solidFill>
                   <a:srgbClr val="121826"/>
                 </a:solidFill>
-                <a:latin typeface="Aptos"/>
-                <a:ea typeface="Aptos"/>
-                <a:cs typeface="Aptos"/>
+                <a:latin typeface="Microsoft YaHei"/>
+                <a:ea typeface="Microsoft YaHei"/>
+                <a:cs typeface="Microsoft YaHei"/>
               </a:defRPr>
             </a:pPr>
             <a:r>
@@ -3684,9 +3776,9 @@
                 <a:solidFill>
                   <a:srgbClr val="121826"/>
                 </a:solidFill>
-                <a:latin typeface="Aptos"/>
-                <a:ea typeface="Aptos"/>
-                <a:cs typeface="Aptos"/>
+                <a:latin typeface="Microsoft YaHei"/>
+                <a:ea typeface="Microsoft YaHei"/>
+                <a:cs typeface="Microsoft YaHei"/>
               </a:rPr>
               <a:t>术语密集：密闭舱室、舾装、管路试压、分段吊装等问题需要专业语境。</a:t>
             </a:r>
@@ -3698,7 +3790,7 @@
           <p:cNvPr id="9" name="">
             <a:extLst xmlns:a="http://schemas.openxmlformats.org/drawingml/2006/main">
               <a:ext uri="{FF2B5EF4-FFF2-40B4-BE49-F238E27FC236}">
-                <a16:creationId xmlns:a16="http://schemas.microsoft.com/office/drawing/2014/main" id="{38DA9D65-03DC-4595-8D1D-AFD95C6C7172}"/>
+                <a16:creationId xmlns:a16="http://schemas.microsoft.com/office/drawing/2014/main" id="{18114D3B-B177-4F99-BCB1-C40CB421502F}"/>
               </a:ext>
             </a:extLst>
           </p:cNvPr>
@@ -3731,7 +3823,7 @@
           <p:cNvPr id="10" name="">
             <a:extLst xmlns:a="http://schemas.openxmlformats.org/drawingml/2006/main">
               <a:ext uri="{FF2B5EF4-FFF2-40B4-BE49-F238E27FC236}">
-                <a16:creationId xmlns:a16="http://schemas.microsoft.com/office/drawing/2014/main" id="{F825399D-672B-49B9-A0DC-32662C5D0000}"/>
+                <a16:creationId xmlns:a16="http://schemas.microsoft.com/office/drawing/2014/main" id="{8171DDE2-2177-4A31-8938-64143AFD6B98}"/>
               </a:ext>
             </a:extLst>
           </p:cNvPr>
@@ -3764,7 +3856,7 @@
           <p:cNvPr id="11" name="">
             <a:extLst xmlns:a="http://schemas.openxmlformats.org/drawingml/2006/main">
               <a:ext uri="{FF2B5EF4-FFF2-40B4-BE49-F238E27FC236}">
-                <a16:creationId xmlns:a16="http://schemas.microsoft.com/office/drawing/2014/main" id="{614FF850-6067-4162-8BB5-C630AAA1D1C8}"/>
+                <a16:creationId xmlns:a16="http://schemas.microsoft.com/office/drawing/2014/main" id="{9ECBFE8C-016A-4468-BA56-A053F0113558}"/>
               </a:ext>
             </a:extLst>
           </p:cNvPr>
@@ -3804,9 +3896,9 @@
                 <a:solidFill>
                   <a:srgbClr val="121826"/>
                 </a:solidFill>
-                <a:latin typeface="Aptos"/>
-                <a:ea typeface="Aptos"/>
-                <a:cs typeface="Aptos"/>
+                <a:latin typeface="Microsoft YaHei"/>
+                <a:ea typeface="Microsoft YaHei"/>
+                <a:cs typeface="Microsoft YaHei"/>
               </a:defRPr>
             </a:pPr>
             <a:r>
@@ -3814,9 +3906,9 @@
                 <a:solidFill>
                   <a:srgbClr val="121826"/>
                 </a:solidFill>
-                <a:latin typeface="Aptos"/>
-                <a:ea typeface="Aptos"/>
-                <a:cs typeface="Aptos"/>
+                <a:latin typeface="Microsoft YaHei"/>
+                <a:ea typeface="Microsoft YaHei"/>
+                <a:cs typeface="Microsoft YaHei"/>
               </a:rPr>
               <a:t>安全关键：错误建议可能诱导跳过审批、检测、监护或消防准备。</a:t>
             </a:r>
@@ -3828,7 +3920,7 @@
           <p:cNvPr id="12" name="">
             <a:extLst xmlns:a="http://schemas.openxmlformats.org/drawingml/2006/main">
               <a:ext uri="{FF2B5EF4-FFF2-40B4-BE49-F238E27FC236}">
-                <a16:creationId xmlns:a16="http://schemas.microsoft.com/office/drawing/2014/main" id="{BBC2078A-61E9-4802-8B7D-573854A5C756}"/>
+                <a16:creationId xmlns:a16="http://schemas.microsoft.com/office/drawing/2014/main" id="{94F85965-0462-479F-BCCB-3D4D75B5569D}"/>
               </a:ext>
             </a:extLst>
           </p:cNvPr>
@@ -3861,7 +3953,7 @@
           <p:cNvPr id="13" name="">
             <a:extLst xmlns:a="http://schemas.openxmlformats.org/drawingml/2006/main">
               <a:ext uri="{FF2B5EF4-FFF2-40B4-BE49-F238E27FC236}">
-                <a16:creationId xmlns:a16="http://schemas.microsoft.com/office/drawing/2014/main" id="{D3A12E58-20C9-4D04-ACD3-83F639C16259}"/>
+                <a16:creationId xmlns:a16="http://schemas.microsoft.com/office/drawing/2014/main" id="{4C2FAF67-68EA-47F8-A8AC-780E80F0A11C}"/>
               </a:ext>
             </a:extLst>
           </p:cNvPr>
@@ -3894,7 +3986,7 @@
           <p:cNvPr id="14" name="">
             <a:extLst xmlns:a="http://schemas.openxmlformats.org/drawingml/2006/main">
               <a:ext uri="{FF2B5EF4-FFF2-40B4-BE49-F238E27FC236}">
-                <a16:creationId xmlns:a16="http://schemas.microsoft.com/office/drawing/2014/main" id="{2A2787A8-6B90-4CCD-9C23-11F3C14D61CD}"/>
+                <a16:creationId xmlns:a16="http://schemas.microsoft.com/office/drawing/2014/main" id="{94B58F81-B402-4AB7-9A30-F7BCF0467DBE}"/>
               </a:ext>
             </a:extLst>
           </p:cNvPr>
@@ -3934,9 +4026,9 @@
                 <a:solidFill>
                   <a:srgbClr val="121826"/>
                 </a:solidFill>
-                <a:latin typeface="Aptos"/>
-                <a:ea typeface="Aptos"/>
-                <a:cs typeface="Aptos"/>
+                <a:latin typeface="Microsoft YaHei"/>
+                <a:ea typeface="Microsoft YaHei"/>
+                <a:cs typeface="Microsoft YaHei"/>
               </a:defRPr>
             </a:pPr>
             <a:r>
@@ -3944,9 +4036,9 @@
                 <a:solidFill>
                   <a:srgbClr val="121826"/>
                 </a:solidFill>
-                <a:latin typeface="Aptos"/>
-                <a:ea typeface="Aptos"/>
-                <a:cs typeface="Aptos"/>
+                <a:latin typeface="Microsoft YaHei"/>
+                <a:ea typeface="Microsoft YaHei"/>
+                <a:cs typeface="Microsoft YaHei"/>
               </a:rPr>
               <a:t>现场演示风险：GPU、网络或模型服务不可用时，系统仍要能稳定答辩。</a:t>
             </a:r>
@@ -3958,7 +4050,7 @@
           <p:cNvPr id="15" name="">
             <a:extLst xmlns:a="http://schemas.openxmlformats.org/drawingml/2006/main">
               <a:ext uri="{FF2B5EF4-FFF2-40B4-BE49-F238E27FC236}">
-                <a16:creationId xmlns:a16="http://schemas.microsoft.com/office/drawing/2014/main" id="{FD1DE6DD-C3AB-4470-A55D-29F7EF321470}"/>
+                <a16:creationId xmlns:a16="http://schemas.microsoft.com/office/drawing/2014/main" id="{F7B2C02A-65CC-490F-9B97-2B595C57C896}"/>
               </a:ext>
             </a:extLst>
           </p:cNvPr>
@@ -3991,7 +4083,7 @@
           <p:cNvPr id="16" name="">
             <a:extLst xmlns:a="http://schemas.openxmlformats.org/drawingml/2006/main">
               <a:ext uri="{FF2B5EF4-FFF2-40B4-BE49-F238E27FC236}">
-                <a16:creationId xmlns:a16="http://schemas.microsoft.com/office/drawing/2014/main" id="{A8969875-AB15-41D0-8BCA-D3CB13E7139C}"/>
+                <a16:creationId xmlns:a16="http://schemas.microsoft.com/office/drawing/2014/main" id="{783AAE90-A766-474D-913D-3D5A2B7E3D2B}"/>
               </a:ext>
             </a:extLst>
           </p:cNvPr>
@@ -4024,7 +4116,7 @@
           <p:cNvPr id="17" name="">
             <a:extLst xmlns:a="http://schemas.openxmlformats.org/drawingml/2006/main">
               <a:ext uri="{FF2B5EF4-FFF2-40B4-BE49-F238E27FC236}">
-                <a16:creationId xmlns:a16="http://schemas.microsoft.com/office/drawing/2014/main" id="{71EFB182-9A31-49BC-872C-F1D6352AA6D4}"/>
+                <a16:creationId xmlns:a16="http://schemas.microsoft.com/office/drawing/2014/main" id="{F2CF1F34-1769-4D71-88D9-999DD002DB5B}"/>
               </a:ext>
             </a:extLst>
           </p:cNvPr>
@@ -4088,7 +4180,7 @@
           <p:cNvPr id="18" name="">
             <a:extLst xmlns:a="http://schemas.openxmlformats.org/drawingml/2006/main">
               <a:ext uri="{FF2B5EF4-FFF2-40B4-BE49-F238E27FC236}">
-                <a16:creationId xmlns:a16="http://schemas.microsoft.com/office/drawing/2014/main" id="{9D07BAEB-401F-459F-8756-098568896811}"/>
+                <a16:creationId xmlns:a16="http://schemas.microsoft.com/office/drawing/2014/main" id="{BB5983E8-D982-4E4E-9245-DE73BACCA3EE}"/>
               </a:ext>
             </a:extLst>
           </p:cNvPr>
@@ -4128,9 +4220,9 @@
                 <a:solidFill>
                   <a:srgbClr val="64748B"/>
                 </a:solidFill>
-                <a:latin typeface="Aptos"/>
-                <a:ea typeface="Aptos"/>
-                <a:cs typeface="Aptos"/>
+                <a:latin typeface="Microsoft YaHei"/>
+                <a:ea typeface="Microsoft YaHei"/>
+                <a:cs typeface="Microsoft YaHei"/>
               </a:defRPr>
             </a:pPr>
             <a:r>
@@ -4138,9 +4230,9 @@
                 <a:solidFill>
                   <a:srgbClr val="64748B"/>
                 </a:solidFill>
-                <a:latin typeface="Aptos"/>
-                <a:ea typeface="Aptos"/>
-                <a:cs typeface="Aptos"/>
+                <a:latin typeface="Microsoft YaHei"/>
+                <a:ea typeface="Microsoft YaHei"/>
+                <a:cs typeface="Microsoft YaHei"/>
               </a:rPr>
               <a:t>先门控，再生成</a:t>
             </a:r>
@@ -4152,7 +4244,7 @@
           <p:cNvPr id="19" name="">
             <a:extLst xmlns:a="http://schemas.openxmlformats.org/drawingml/2006/main">
               <a:ext uri="{FF2B5EF4-FFF2-40B4-BE49-F238E27FC236}">
-                <a16:creationId xmlns:a16="http://schemas.microsoft.com/office/drawing/2014/main" id="{A892E0D3-187A-4401-AB8B-8FB7CC1E8195}"/>
+                <a16:creationId xmlns:a16="http://schemas.microsoft.com/office/drawing/2014/main" id="{28EBD049-71A2-42DD-B290-4EC5BF3A8ABA}"/>
               </a:ext>
             </a:extLst>
           </p:cNvPr>
@@ -4185,7 +4277,7 @@
           <p:cNvPr id="20" name="">
             <a:extLst xmlns:a="http://schemas.openxmlformats.org/drawingml/2006/main">
               <a:ext uri="{FF2B5EF4-FFF2-40B4-BE49-F238E27FC236}">
-                <a16:creationId xmlns:a16="http://schemas.microsoft.com/office/drawing/2014/main" id="{BBFB5DA4-327D-475F-B64E-F133A5EA0DF9}"/>
+                <a16:creationId xmlns:a16="http://schemas.microsoft.com/office/drawing/2014/main" id="{AB3AA90C-38E5-4931-9AC3-89C46CAF7CE6}"/>
               </a:ext>
             </a:extLst>
           </p:cNvPr>
@@ -4218,7 +4310,7 @@
           <p:cNvPr id="21" name="">
             <a:extLst xmlns:a="http://schemas.openxmlformats.org/drawingml/2006/main">
               <a:ext uri="{FF2B5EF4-FFF2-40B4-BE49-F238E27FC236}">
-                <a16:creationId xmlns:a16="http://schemas.microsoft.com/office/drawing/2014/main" id="{A4869EB9-8B4B-4BD5-BB36-93CD5C6C4283}"/>
+                <a16:creationId xmlns:a16="http://schemas.microsoft.com/office/drawing/2014/main" id="{0B3AD999-189E-4D9F-9BB0-EDA906BE1D02}"/>
               </a:ext>
             </a:extLst>
           </p:cNvPr>
@@ -4282,7 +4374,7 @@
           <p:cNvPr id="22" name="">
             <a:extLst xmlns:a="http://schemas.openxmlformats.org/drawingml/2006/main">
               <a:ext uri="{FF2B5EF4-FFF2-40B4-BE49-F238E27FC236}">
-                <a16:creationId xmlns:a16="http://schemas.microsoft.com/office/drawing/2014/main" id="{488122B5-F854-46A3-ABC2-533C52DD39B1}"/>
+                <a16:creationId xmlns:a16="http://schemas.microsoft.com/office/drawing/2014/main" id="{495FB765-3327-4C26-949A-D39F737E15A5}"/>
               </a:ext>
             </a:extLst>
           </p:cNvPr>
@@ -4322,9 +4414,9 @@
                 <a:solidFill>
                   <a:srgbClr val="64748B"/>
                 </a:solidFill>
-                <a:latin typeface="Aptos"/>
-                <a:ea typeface="Aptos"/>
-                <a:cs typeface="Aptos"/>
+                <a:latin typeface="Microsoft YaHei"/>
+                <a:ea typeface="Microsoft YaHei"/>
+                <a:cs typeface="Microsoft YaHei"/>
               </a:defRPr>
             </a:pPr>
             <a:r>
@@ -4332,9 +4424,9 @@
                 <a:solidFill>
                   <a:srgbClr val="64748B"/>
                 </a:solidFill>
-                <a:latin typeface="Aptos"/>
-                <a:ea typeface="Aptos"/>
-                <a:cs typeface="Aptos"/>
+                <a:latin typeface="Microsoft YaHei"/>
+                <a:ea typeface="Microsoft YaHei"/>
+                <a:cs typeface="Microsoft YaHei"/>
               </a:rPr>
               <a:t>RAG 不是装饰</a:t>
             </a:r>
@@ -4346,7 +4438,7 @@
           <p:cNvPr id="23" name="">
             <a:extLst xmlns:a="http://schemas.openxmlformats.org/drawingml/2006/main">
               <a:ext uri="{FF2B5EF4-FFF2-40B4-BE49-F238E27FC236}">
-                <a16:creationId xmlns:a16="http://schemas.microsoft.com/office/drawing/2014/main" id="{2FD8B2F7-D28C-4B75-858C-770A048ACE56}"/>
+                <a16:creationId xmlns:a16="http://schemas.microsoft.com/office/drawing/2014/main" id="{84C139ED-B484-47F4-A51E-4683A2670650}"/>
               </a:ext>
             </a:extLst>
           </p:cNvPr>
@@ -4379,7 +4471,7 @@
           <p:cNvPr id="24" name="">
             <a:extLst xmlns:a="http://schemas.openxmlformats.org/drawingml/2006/main">
               <a:ext uri="{FF2B5EF4-FFF2-40B4-BE49-F238E27FC236}">
-                <a16:creationId xmlns:a16="http://schemas.microsoft.com/office/drawing/2014/main" id="{2A32E90E-4C25-45E1-A82A-3AF3BACE0330}"/>
+                <a16:creationId xmlns:a16="http://schemas.microsoft.com/office/drawing/2014/main" id="{303C75AF-23AA-4F1C-BAA2-EC4BADECEC24}"/>
               </a:ext>
             </a:extLst>
           </p:cNvPr>
@@ -4412,7 +4504,7 @@
           <p:cNvPr id="25" name="">
             <a:extLst xmlns:a="http://schemas.openxmlformats.org/drawingml/2006/main">
               <a:ext uri="{FF2B5EF4-FFF2-40B4-BE49-F238E27FC236}">
-                <a16:creationId xmlns:a16="http://schemas.microsoft.com/office/drawing/2014/main" id="{AA3DF8FB-0F2D-4834-9A2A-E19C39F539DD}"/>
+                <a16:creationId xmlns:a16="http://schemas.microsoft.com/office/drawing/2014/main" id="{F546F80B-8519-47B4-AC46-981E85BBD0CC}"/>
               </a:ext>
             </a:extLst>
           </p:cNvPr>
@@ -4476,7 +4568,7 @@
           <p:cNvPr id="26" name="">
             <a:extLst xmlns:a="http://schemas.openxmlformats.org/drawingml/2006/main">
               <a:ext uri="{FF2B5EF4-FFF2-40B4-BE49-F238E27FC236}">
-                <a16:creationId xmlns:a16="http://schemas.microsoft.com/office/drawing/2014/main" id="{6EA6DB02-C2ED-43D7-BDD9-808D80505F2D}"/>
+                <a16:creationId xmlns:a16="http://schemas.microsoft.com/office/drawing/2014/main" id="{6086FF15-BDCD-4280-9D3C-E0DEF6484888}"/>
               </a:ext>
             </a:extLst>
           </p:cNvPr>
@@ -4516,9 +4608,9 @@
                 <a:solidFill>
                   <a:srgbClr val="64748B"/>
                 </a:solidFill>
-                <a:latin typeface="Aptos"/>
-                <a:ea typeface="Aptos"/>
-                <a:cs typeface="Aptos"/>
+                <a:latin typeface="Microsoft YaHei"/>
+                <a:ea typeface="Microsoft YaHei"/>
+                <a:cs typeface="Microsoft YaHei"/>
               </a:defRPr>
             </a:pPr>
             <a:r>
@@ -4526,9 +4618,9 @@
                 <a:solidFill>
                   <a:srgbClr val="64748B"/>
                 </a:solidFill>
-                <a:latin typeface="Aptos"/>
-                <a:ea typeface="Aptos"/>
-                <a:cs typeface="Aptos"/>
+                <a:latin typeface="Microsoft YaHei"/>
+                <a:ea typeface="Microsoft YaHei"/>
+                <a:cs typeface="Microsoft YaHei"/>
               </a:rPr>
               <a:t>mock fallback 保底</a:t>
             </a:r>
@@ -4540,7 +4632,7 @@
           <p:cNvPr id="27" name="">
             <a:extLst xmlns:a="http://schemas.openxmlformats.org/drawingml/2006/main">
               <a:ext uri="{FF2B5EF4-FFF2-40B4-BE49-F238E27FC236}">
-                <a16:creationId xmlns:a16="http://schemas.microsoft.com/office/drawing/2014/main" id="{64178921-4F1A-484B-BC85-05F59FDE231C}"/>
+                <a16:creationId xmlns:a16="http://schemas.microsoft.com/office/drawing/2014/main" id="{E3450CE0-ED76-4103-BB83-31596606AF2B}"/>
               </a:ext>
             </a:extLst>
           </p:cNvPr>
@@ -4580,9 +4672,9 @@
                 <a:solidFill>
                   <a:srgbClr val="64748B"/>
                 </a:solidFill>
-                <a:latin typeface="Aptos"/>
-                <a:ea typeface="Aptos"/>
-                <a:cs typeface="Aptos"/>
+                <a:latin typeface="Microsoft YaHei"/>
+                <a:ea typeface="Microsoft YaHei"/>
+                <a:cs typeface="Microsoft YaHei"/>
               </a:defRPr>
             </a:pPr>
             <a:r>
@@ -4590,9 +4682,9 @@
                 <a:solidFill>
                   <a:srgbClr val="64748B"/>
                 </a:solidFill>
-                <a:latin typeface="Aptos"/>
-                <a:ea typeface="Aptos"/>
-                <a:cs typeface="Aptos"/>
+                <a:latin typeface="Microsoft YaHei"/>
+                <a:ea typeface="Microsoft YaHei"/>
+                <a:cs typeface="Microsoft YaHei"/>
               </a:rPr>
               <a:t>ShipVoice | 信息安全基础 A2</a:t>
             </a:r>
@@ -4604,7 +4696,7 @@
           <p:cNvPr id="28" name="">
             <a:extLst xmlns:a="http://schemas.openxmlformats.org/drawingml/2006/main">
               <a:ext uri="{FF2B5EF4-FFF2-40B4-BE49-F238E27FC236}">
-                <a16:creationId xmlns:a16="http://schemas.microsoft.com/office/drawing/2014/main" id="{74B8003A-FCFF-4146-BFFA-4292980C6A86}"/>
+                <a16:creationId xmlns:a16="http://schemas.microsoft.com/office/drawing/2014/main" id="{62C15EAA-E68B-4583-91BE-AAD79C963B48}"/>
               </a:ext>
             </a:extLst>
           </p:cNvPr>
@@ -4644,9 +4736,9 @@
                 <a:solidFill>
                   <a:srgbClr val="64748B"/>
                 </a:solidFill>
-                <a:latin typeface="Aptos"/>
-                <a:ea typeface="Aptos"/>
-                <a:cs typeface="Aptos"/>
+                <a:latin typeface="Microsoft YaHei"/>
+                <a:ea typeface="Microsoft YaHei"/>
+                <a:cs typeface="Microsoft YaHei"/>
               </a:defRPr>
             </a:pPr>
             <a:r>
@@ -4654,9 +4746,9 @@
                 <a:solidFill>
                   <a:srgbClr val="64748B"/>
                 </a:solidFill>
-                <a:latin typeface="Aptos"/>
-                <a:ea typeface="Aptos"/>
-                <a:cs typeface="Aptos"/>
+                <a:latin typeface="Microsoft YaHei"/>
+                <a:ea typeface="Microsoft YaHei"/>
+                <a:cs typeface="Microsoft YaHei"/>
               </a:rPr>
               <a:t>02</a:t>
             </a:r>
@@ -4666,7 +4758,7 @@
     </p:spTree>
     <p:extLst>
       <p:ext uri="{BB962C8B-B14F-4D97-AF65-F5344CB8AC3E}">
-        <p14:creationId xmlns:p14="http://schemas.microsoft.com/office/powerpoint/2010/main" val="579457962"/>
+        <p14:creationId xmlns:p14="http://schemas.microsoft.com/office/powerpoint/2010/main" val="1096134895"/>
       </p:ext>
     </p:extLst>
   </p:cSld>
@@ -4690,7 +4782,7 @@
           <p:cNvPr id="1" name="">
             <a:extLst xmlns:a="http://schemas.openxmlformats.org/drawingml/2006/main">
               <a:ext uri="{FF2B5EF4-FFF2-40B4-BE49-F238E27FC236}">
-                <a16:creationId xmlns:a16="http://schemas.microsoft.com/office/drawing/2014/main" id="{077225E1-7E00-4A06-A04E-56E0D9FD8E36}"/>
+                <a16:creationId xmlns:a16="http://schemas.microsoft.com/office/drawing/2014/main" id="{B307199F-0340-42D2-9A73-25D89AA5B67C}"/>
               </a:ext>
             </a:extLst>
           </p:cNvPr>
@@ -4723,7 +4815,7 @@
           <p:cNvPr id="2" name="">
             <a:extLst xmlns:a="http://schemas.openxmlformats.org/drawingml/2006/main">
               <a:ext uri="{FF2B5EF4-FFF2-40B4-BE49-F238E27FC236}">
-                <a16:creationId xmlns:a16="http://schemas.microsoft.com/office/drawing/2014/main" id="{C9037706-56E8-48B2-A91E-E69945636EA8}"/>
+                <a16:creationId xmlns:a16="http://schemas.microsoft.com/office/drawing/2014/main" id="{A275E2E7-268F-4D96-A20F-19CC53D585CF}"/>
               </a:ext>
             </a:extLst>
           </p:cNvPr>
@@ -4756,7 +4848,7 @@
           <p:cNvPr id="3" name="">
             <a:extLst xmlns:a="http://schemas.openxmlformats.org/drawingml/2006/main">
               <a:ext uri="{FF2B5EF4-FFF2-40B4-BE49-F238E27FC236}">
-                <a16:creationId xmlns:a16="http://schemas.microsoft.com/office/drawing/2014/main" id="{7381F91A-CAD9-4C01-8BE9-7CF5D2EBC236}"/>
+                <a16:creationId xmlns:a16="http://schemas.microsoft.com/office/drawing/2014/main" id="{AB492A88-3EB6-47AE-AD0C-371D2A15936A}"/>
               </a:ext>
             </a:extLst>
           </p:cNvPr>
@@ -4796,9 +4888,9 @@
                 <a:solidFill>
                   <a:srgbClr val="2563EB"/>
                 </a:solidFill>
-                <a:latin typeface="Aptos"/>
-                <a:ea typeface="Aptos"/>
-                <a:cs typeface="Aptos"/>
+                <a:latin typeface="Microsoft YaHei"/>
+                <a:ea typeface="Microsoft YaHei"/>
+                <a:cs typeface="Microsoft YaHei"/>
               </a:defRPr>
             </a:pPr>
             <a:r>
@@ -4806,9 +4898,9 @@
                 <a:solidFill>
                   <a:srgbClr val="2563EB"/>
                 </a:solidFill>
-                <a:latin typeface="Aptos"/>
-                <a:ea typeface="Aptos"/>
-                <a:cs typeface="Aptos"/>
+                <a:latin typeface="Microsoft YaHei"/>
+                <a:ea typeface="Microsoft YaHei"/>
+                <a:cs typeface="Microsoft YaHei"/>
               </a:rPr>
               <a:t>ARCHITECTURE</a:t>
             </a:r>
@@ -4820,7 +4912,7 @@
           <p:cNvPr id="4" name="">
             <a:extLst xmlns:a="http://schemas.openxmlformats.org/drawingml/2006/main">
               <a:ext uri="{FF2B5EF4-FFF2-40B4-BE49-F238E27FC236}">
-                <a16:creationId xmlns:a16="http://schemas.microsoft.com/office/drawing/2014/main" id="{1667A1D4-694A-4B72-A9B2-8BB6940188C2}"/>
+                <a16:creationId xmlns:a16="http://schemas.microsoft.com/office/drawing/2014/main" id="{004697BA-BC11-4FB4-86E8-E75763F2F42D}"/>
               </a:ext>
             </a:extLst>
           </p:cNvPr>
@@ -4884,7 +4976,7 @@
           <p:cNvPr id="5" name="">
             <a:extLst xmlns:a="http://schemas.openxmlformats.org/drawingml/2006/main">
               <a:ext uri="{FF2B5EF4-FFF2-40B4-BE49-F238E27FC236}">
-                <a16:creationId xmlns:a16="http://schemas.microsoft.com/office/drawing/2014/main" id="{AD624A7C-4CC3-4D60-A3AD-49EB11321DDC}"/>
+                <a16:creationId xmlns:a16="http://schemas.microsoft.com/office/drawing/2014/main" id="{703D95CA-2F06-4E7C-8420-BC18913E36D4}"/>
               </a:ext>
             </a:extLst>
           </p:cNvPr>
@@ -4924,9 +5016,9 @@
                 <a:solidFill>
                   <a:srgbClr val="64748B"/>
                 </a:solidFill>
-                <a:latin typeface="Aptos"/>
-                <a:ea typeface="Aptos"/>
-                <a:cs typeface="Aptos"/>
+                <a:latin typeface="Microsoft YaHei"/>
+                <a:ea typeface="Microsoft YaHei"/>
+                <a:cs typeface="Microsoft YaHei"/>
               </a:defRPr>
             </a:pPr>
             <a:r>
@@ -4934,9 +5026,9 @@
                 <a:solidFill>
                   <a:srgbClr val="64748B"/>
                 </a:solidFill>
-                <a:latin typeface="Aptos"/>
-                <a:ea typeface="Aptos"/>
-                <a:cs typeface="Aptos"/>
+                <a:latin typeface="Microsoft YaHei"/>
+                <a:ea typeface="Microsoft YaHei"/>
+                <a:cs typeface="Microsoft YaHei"/>
               </a:rPr>
               <a:t>每个模块都有可演示输出和实验记录。</a:t>
             </a:r>
@@ -4948,7 +5040,7 @@
           <p:cNvPr id="6" name="">
             <a:extLst xmlns:a="http://schemas.openxmlformats.org/drawingml/2006/main">
               <a:ext uri="{FF2B5EF4-FFF2-40B4-BE49-F238E27FC236}">
-                <a16:creationId xmlns:a16="http://schemas.microsoft.com/office/drawing/2014/main" id="{8E149A13-B9CA-42AD-AE15-91608346A472}"/>
+                <a16:creationId xmlns:a16="http://schemas.microsoft.com/office/drawing/2014/main" id="{0C96F0AA-758F-436A-81C1-52520F83165D}"/>
               </a:ext>
             </a:extLst>
           </p:cNvPr>
@@ -4981,7 +5073,7 @@
           <p:cNvPr id="7" name="">
             <a:extLst xmlns:a="http://schemas.openxmlformats.org/drawingml/2006/main">
               <a:ext uri="{FF2B5EF4-FFF2-40B4-BE49-F238E27FC236}">
-                <a16:creationId xmlns:a16="http://schemas.microsoft.com/office/drawing/2014/main" id="{63BA62E3-8372-4CC0-A4B9-4EA00AA4AE81}"/>
+                <a16:creationId xmlns:a16="http://schemas.microsoft.com/office/drawing/2014/main" id="{7DF724A8-FF9C-49F1-84C6-63EA6C5B8C0F}"/>
               </a:ext>
             </a:extLst>
           </p:cNvPr>
@@ -5014,7 +5106,7 @@
           <p:cNvPr id="8" name="">
             <a:extLst xmlns:a="http://schemas.openxmlformats.org/drawingml/2006/main">
               <a:ext uri="{FF2B5EF4-FFF2-40B4-BE49-F238E27FC236}">
-                <a16:creationId xmlns:a16="http://schemas.microsoft.com/office/drawing/2014/main" id="{1D612BDF-C9CE-41E5-B986-B4861DE891AF}"/>
+                <a16:creationId xmlns:a16="http://schemas.microsoft.com/office/drawing/2014/main" id="{1CE2053F-27EA-44BA-A856-7FDD78BDD6C9}"/>
               </a:ext>
             </a:extLst>
           </p:cNvPr>
@@ -5054,9 +5146,9 @@
                 <a:solidFill>
                   <a:srgbClr val="121826"/>
                 </a:solidFill>
-                <a:latin typeface="Aptos"/>
-                <a:ea typeface="Aptos"/>
-                <a:cs typeface="Aptos"/>
+                <a:latin typeface="Microsoft YaHei"/>
+                <a:ea typeface="Microsoft YaHei"/>
+                <a:cs typeface="Microsoft YaHei"/>
               </a:defRPr>
             </a:pPr>
             <a:r>
@@ -5064,9 +5156,9 @@
                 <a:solidFill>
                   <a:srgbClr val="121826"/>
                 </a:solidFill>
-                <a:latin typeface="Aptos"/>
-                <a:ea typeface="Aptos"/>
-                <a:cs typeface="Aptos"/>
+                <a:latin typeface="Microsoft YaHei"/>
+                <a:ea typeface="Microsoft YaHei"/>
+                <a:cs typeface="Microsoft YaHei"/>
               </a:rPr>
               <a:t>Voice / Text</a:t>
             </a:r>
@@ -5078,7 +5170,7 @@
           <p:cNvPr id="9" name="">
             <a:extLst xmlns:a="http://schemas.openxmlformats.org/drawingml/2006/main">
               <a:ext uri="{FF2B5EF4-FFF2-40B4-BE49-F238E27FC236}">
-                <a16:creationId xmlns:a16="http://schemas.microsoft.com/office/drawing/2014/main" id="{13E12C42-41C7-41F3-B1D7-F6B34212FA8D}"/>
+                <a16:creationId xmlns:a16="http://schemas.microsoft.com/office/drawing/2014/main" id="{28C16C7F-081D-4F1D-BC2E-4C986CB593C7}"/>
               </a:ext>
             </a:extLst>
           </p:cNvPr>
@@ -5118,9 +5210,9 @@
                 <a:solidFill>
                   <a:srgbClr val="64748B"/>
                 </a:solidFill>
-                <a:latin typeface="Aptos"/>
-                <a:ea typeface="Aptos"/>
-                <a:cs typeface="Aptos"/>
+                <a:latin typeface="Microsoft YaHei"/>
+                <a:ea typeface="Microsoft YaHei"/>
+                <a:cs typeface="Microsoft YaHei"/>
               </a:defRPr>
             </a:pPr>
             <a:r>
@@ -5128,9 +5220,9 @@
                 <a:solidFill>
                   <a:srgbClr val="64748B"/>
                 </a:solidFill>
-                <a:latin typeface="Aptos"/>
-                <a:ea typeface="Aptos"/>
-                <a:cs typeface="Aptos"/>
+                <a:latin typeface="Microsoft YaHei"/>
+                <a:ea typeface="Microsoft YaHei"/>
+                <a:cs typeface="Microsoft YaHei"/>
               </a:rPr>
               <a:t>输入与转写</a:t>
             </a:r>
@@ -5142,7 +5234,7 @@
           <p:cNvPr id="10" name="">
             <a:extLst xmlns:a="http://schemas.openxmlformats.org/drawingml/2006/main">
               <a:ext uri="{FF2B5EF4-FFF2-40B4-BE49-F238E27FC236}">
-                <a16:creationId xmlns:a16="http://schemas.microsoft.com/office/drawing/2014/main" id="{58B4163A-1E56-4B53-8A3B-F8C754ABCBEA}"/>
+                <a16:creationId xmlns:a16="http://schemas.microsoft.com/office/drawing/2014/main" id="{75B927D5-6ADC-4BCA-B4B6-001909A049E4}"/>
               </a:ext>
             </a:extLst>
           </p:cNvPr>
@@ -5175,7 +5267,7 @@
           <p:cNvPr id="11" name="">
             <a:extLst xmlns:a="http://schemas.openxmlformats.org/drawingml/2006/main">
               <a:ext uri="{FF2B5EF4-FFF2-40B4-BE49-F238E27FC236}">
-                <a16:creationId xmlns:a16="http://schemas.microsoft.com/office/drawing/2014/main" id="{3F6DF814-A6F6-4FCF-963B-4C35EC5E4479}"/>
+                <a16:creationId xmlns:a16="http://schemas.microsoft.com/office/drawing/2014/main" id="{5D5A47B1-AD3C-491C-96DA-53192A456479}"/>
               </a:ext>
             </a:extLst>
           </p:cNvPr>
@@ -5215,9 +5307,9 @@
                 <a:solidFill>
                   <a:srgbClr val="64748B"/>
                 </a:solidFill>
-                <a:latin typeface="Aptos"/>
-                <a:ea typeface="Aptos"/>
-                <a:cs typeface="Aptos"/>
+                <a:latin typeface="Microsoft YaHei"/>
+                <a:ea typeface="Microsoft YaHei"/>
+                <a:cs typeface="Microsoft YaHei"/>
               </a:defRPr>
             </a:pPr>
             <a:r>
@@ -5225,9 +5317,9 @@
                 <a:solidFill>
                   <a:srgbClr val="64748B"/>
                 </a:solidFill>
-                <a:latin typeface="Aptos"/>
-                <a:ea typeface="Aptos"/>
-                <a:cs typeface="Aptos"/>
+                <a:latin typeface="Microsoft YaHei"/>
+                <a:ea typeface="Microsoft YaHei"/>
+                <a:cs typeface="Microsoft YaHei"/>
               </a:rPr>
               <a:t>→</a:t>
             </a:r>
@@ -5239,7 +5331,7 @@
           <p:cNvPr id="12" name="">
             <a:extLst xmlns:a="http://schemas.openxmlformats.org/drawingml/2006/main">
               <a:ext uri="{FF2B5EF4-FFF2-40B4-BE49-F238E27FC236}">
-                <a16:creationId xmlns:a16="http://schemas.microsoft.com/office/drawing/2014/main" id="{9DC87444-07E0-4ADE-B2B5-19F826DA86B8}"/>
+                <a16:creationId xmlns:a16="http://schemas.microsoft.com/office/drawing/2014/main" id="{768B060A-5449-41B7-88AC-00761979054C}"/>
               </a:ext>
             </a:extLst>
           </p:cNvPr>
@@ -5272,7 +5364,7 @@
           <p:cNvPr id="13" name="">
             <a:extLst xmlns:a="http://schemas.openxmlformats.org/drawingml/2006/main">
               <a:ext uri="{FF2B5EF4-FFF2-40B4-BE49-F238E27FC236}">
-                <a16:creationId xmlns:a16="http://schemas.microsoft.com/office/drawing/2014/main" id="{C322C938-CD02-47A7-8C2E-A78AE6C0948B}"/>
+                <a16:creationId xmlns:a16="http://schemas.microsoft.com/office/drawing/2014/main" id="{4520C670-4F3D-4A55-99F7-3A86C42A440F}"/>
               </a:ext>
             </a:extLst>
           </p:cNvPr>
@@ -5305,7 +5397,7 @@
           <p:cNvPr id="14" name="">
             <a:extLst xmlns:a="http://schemas.openxmlformats.org/drawingml/2006/main">
               <a:ext uri="{FF2B5EF4-FFF2-40B4-BE49-F238E27FC236}">
-                <a16:creationId xmlns:a16="http://schemas.microsoft.com/office/drawing/2014/main" id="{907D9E77-05B9-48DA-9B8A-6BC18C1C59CA}"/>
+                <a16:creationId xmlns:a16="http://schemas.microsoft.com/office/drawing/2014/main" id="{FE2D49E4-EADA-4909-A23F-9D71F233940C}"/>
               </a:ext>
             </a:extLst>
           </p:cNvPr>
@@ -5345,9 +5437,9 @@
                 <a:solidFill>
                   <a:srgbClr val="121826"/>
                 </a:solidFill>
-                <a:latin typeface="Aptos"/>
-                <a:ea typeface="Aptos"/>
-                <a:cs typeface="Aptos"/>
+                <a:latin typeface="Microsoft YaHei"/>
+                <a:ea typeface="Microsoft YaHei"/>
+                <a:cs typeface="Microsoft YaHei"/>
               </a:defRPr>
             </a:pPr>
             <a:r>
@@ -5355,9 +5447,9 @@
                 <a:solidFill>
                   <a:srgbClr val="121826"/>
                 </a:solidFill>
-                <a:latin typeface="Aptos"/>
-                <a:ea typeface="Aptos"/>
-                <a:cs typeface="Aptos"/>
+                <a:latin typeface="Microsoft YaHei"/>
+                <a:ea typeface="Microsoft YaHei"/>
+                <a:cs typeface="Microsoft YaHei"/>
               </a:rPr>
               <a:t>Normalize</a:t>
             </a:r>
@@ -5369,7 +5461,7 @@
           <p:cNvPr id="15" name="">
             <a:extLst xmlns:a="http://schemas.openxmlformats.org/drawingml/2006/main">
               <a:ext uri="{FF2B5EF4-FFF2-40B4-BE49-F238E27FC236}">
-                <a16:creationId xmlns:a16="http://schemas.microsoft.com/office/drawing/2014/main" id="{1CA696A3-B859-4FD7-AD7E-5BD5F2D1671E}"/>
+                <a16:creationId xmlns:a16="http://schemas.microsoft.com/office/drawing/2014/main" id="{E79E0B64-01B4-44E7-8688-CB54A7C67E6D}"/>
               </a:ext>
             </a:extLst>
           </p:cNvPr>
@@ -5409,9 +5501,9 @@
                 <a:solidFill>
                   <a:srgbClr val="64748B"/>
                 </a:solidFill>
-                <a:latin typeface="Aptos"/>
-                <a:ea typeface="Aptos"/>
-                <a:cs typeface="Aptos"/>
+                <a:latin typeface="Microsoft YaHei"/>
+                <a:ea typeface="Microsoft YaHei"/>
+                <a:cs typeface="Microsoft YaHei"/>
               </a:defRPr>
             </a:pPr>
             <a:r>
@@ -5419,9 +5511,9 @@
                 <a:solidFill>
                   <a:srgbClr val="64748B"/>
                 </a:solidFill>
-                <a:latin typeface="Aptos"/>
-                <a:ea typeface="Aptos"/>
-                <a:cs typeface="Aptos"/>
+                <a:latin typeface="Microsoft YaHei"/>
+                <a:ea typeface="Microsoft YaHei"/>
+                <a:cs typeface="Microsoft YaHei"/>
               </a:rPr>
               <a:t>术语保留</a:t>
             </a:r>
@@ -5433,7 +5525,7 @@
           <p:cNvPr id="16" name="">
             <a:extLst xmlns:a="http://schemas.openxmlformats.org/drawingml/2006/main">
               <a:ext uri="{FF2B5EF4-FFF2-40B4-BE49-F238E27FC236}">
-                <a16:creationId xmlns:a16="http://schemas.microsoft.com/office/drawing/2014/main" id="{E0A2C843-430B-4F99-B660-9A597B1C67E6}"/>
+                <a16:creationId xmlns:a16="http://schemas.microsoft.com/office/drawing/2014/main" id="{0FF5AD8A-7F47-4DE8-B6F5-37E89D42B430}"/>
               </a:ext>
             </a:extLst>
           </p:cNvPr>
@@ -5466,7 +5558,7 @@
           <p:cNvPr id="17" name="">
             <a:extLst xmlns:a="http://schemas.openxmlformats.org/drawingml/2006/main">
               <a:ext uri="{FF2B5EF4-FFF2-40B4-BE49-F238E27FC236}">
-                <a16:creationId xmlns:a16="http://schemas.microsoft.com/office/drawing/2014/main" id="{0DAAB73E-C373-41DB-A7D3-8CC6F187FFCD}"/>
+                <a16:creationId xmlns:a16="http://schemas.microsoft.com/office/drawing/2014/main" id="{FBE5DEFA-5F49-42B7-926A-885CFBC502CD}"/>
               </a:ext>
             </a:extLst>
           </p:cNvPr>
@@ -5506,9 +5598,9 @@
                 <a:solidFill>
                   <a:srgbClr val="64748B"/>
                 </a:solidFill>
-                <a:latin typeface="Aptos"/>
-                <a:ea typeface="Aptos"/>
-                <a:cs typeface="Aptos"/>
+                <a:latin typeface="Microsoft YaHei"/>
+                <a:ea typeface="Microsoft YaHei"/>
+                <a:cs typeface="Microsoft YaHei"/>
               </a:defRPr>
             </a:pPr>
             <a:r>
@@ -5516,9 +5608,9 @@
                 <a:solidFill>
                   <a:srgbClr val="64748B"/>
                 </a:solidFill>
-                <a:latin typeface="Aptos"/>
-                <a:ea typeface="Aptos"/>
-                <a:cs typeface="Aptos"/>
+                <a:latin typeface="Microsoft YaHei"/>
+                <a:ea typeface="Microsoft YaHei"/>
+                <a:cs typeface="Microsoft YaHei"/>
               </a:rPr>
               <a:t>→</a:t>
             </a:r>
@@ -5530,7 +5622,7 @@
           <p:cNvPr id="18" name="">
             <a:extLst xmlns:a="http://schemas.openxmlformats.org/drawingml/2006/main">
               <a:ext uri="{FF2B5EF4-FFF2-40B4-BE49-F238E27FC236}">
-                <a16:creationId xmlns:a16="http://schemas.microsoft.com/office/drawing/2014/main" id="{EB8DBFEF-AE5A-4A27-9D19-B9C4DB941D49}"/>
+                <a16:creationId xmlns:a16="http://schemas.microsoft.com/office/drawing/2014/main" id="{0DBA9773-BD43-4B13-B788-9F9DD3DF4E16}"/>
               </a:ext>
             </a:extLst>
           </p:cNvPr>
@@ -5563,7 +5655,7 @@
           <p:cNvPr id="19" name="">
             <a:extLst xmlns:a="http://schemas.openxmlformats.org/drawingml/2006/main">
               <a:ext uri="{FF2B5EF4-FFF2-40B4-BE49-F238E27FC236}">
-                <a16:creationId xmlns:a16="http://schemas.microsoft.com/office/drawing/2014/main" id="{717C6210-CF4D-4AA1-B305-5CBD3823B560}"/>
+                <a16:creationId xmlns:a16="http://schemas.microsoft.com/office/drawing/2014/main" id="{D4231565-3A1C-47C3-B4E8-AF7A30B83F5F}"/>
               </a:ext>
             </a:extLst>
           </p:cNvPr>
@@ -5596,7 +5688,7 @@
           <p:cNvPr id="20" name="">
             <a:extLst xmlns:a="http://schemas.openxmlformats.org/drawingml/2006/main">
               <a:ext uri="{FF2B5EF4-FFF2-40B4-BE49-F238E27FC236}">
-                <a16:creationId xmlns:a16="http://schemas.microsoft.com/office/drawing/2014/main" id="{AA529231-267B-403B-9106-4B11F6DB2137}"/>
+                <a16:creationId xmlns:a16="http://schemas.microsoft.com/office/drawing/2014/main" id="{CAF85A0F-5833-4CDA-A390-D5B3157486E3}"/>
               </a:ext>
             </a:extLst>
           </p:cNvPr>
@@ -5636,9 +5728,9 @@
                 <a:solidFill>
                   <a:srgbClr val="121826"/>
                 </a:solidFill>
-                <a:latin typeface="Aptos"/>
-                <a:ea typeface="Aptos"/>
-                <a:cs typeface="Aptos"/>
+                <a:latin typeface="Microsoft YaHei"/>
+                <a:ea typeface="Microsoft YaHei"/>
+                <a:cs typeface="Microsoft YaHei"/>
               </a:defRPr>
             </a:pPr>
             <a:r>
@@ -5646,9 +5738,9 @@
                 <a:solidFill>
                   <a:srgbClr val="121826"/>
                 </a:solidFill>
-                <a:latin typeface="Aptos"/>
-                <a:ea typeface="Aptos"/>
-                <a:cs typeface="Aptos"/>
+                <a:latin typeface="Microsoft YaHei"/>
+                <a:ea typeface="Microsoft YaHei"/>
+                <a:cs typeface="Microsoft YaHei"/>
               </a:rPr>
               <a:t>Safety Gate</a:t>
             </a:r>
@@ -5660,7 +5752,7 @@
           <p:cNvPr id="21" name="">
             <a:extLst xmlns:a="http://schemas.openxmlformats.org/drawingml/2006/main">
               <a:ext uri="{FF2B5EF4-FFF2-40B4-BE49-F238E27FC236}">
-                <a16:creationId xmlns:a16="http://schemas.microsoft.com/office/drawing/2014/main" id="{13D9A0A0-F814-460C-AFCB-DFBF2588D8A8}"/>
+                <a16:creationId xmlns:a16="http://schemas.microsoft.com/office/drawing/2014/main" id="{8198BB6D-2960-4054-B7D3-12E419FE87BF}"/>
               </a:ext>
             </a:extLst>
           </p:cNvPr>
@@ -5700,9 +5792,9 @@
                 <a:solidFill>
                   <a:srgbClr val="64748B"/>
                 </a:solidFill>
-                <a:latin typeface="Aptos"/>
-                <a:ea typeface="Aptos"/>
-                <a:cs typeface="Aptos"/>
+                <a:latin typeface="Microsoft YaHei"/>
+                <a:ea typeface="Microsoft YaHei"/>
+                <a:cs typeface="Microsoft YaHei"/>
               </a:defRPr>
             </a:pPr>
             <a:r>
@@ -5710,9 +5802,9 @@
                 <a:solidFill>
                   <a:srgbClr val="64748B"/>
                 </a:solidFill>
-                <a:latin typeface="Aptos"/>
-                <a:ea typeface="Aptos"/>
-                <a:cs typeface="Aptos"/>
+                <a:latin typeface="Microsoft YaHei"/>
+                <a:ea typeface="Microsoft YaHei"/>
+                <a:cs typeface="Microsoft YaHei"/>
               </a:rPr>
               <a:t>越界拒答</a:t>
             </a:r>
@@ -5724,7 +5816,7 @@
           <p:cNvPr id="22" name="">
             <a:extLst xmlns:a="http://schemas.openxmlformats.org/drawingml/2006/main">
               <a:ext uri="{FF2B5EF4-FFF2-40B4-BE49-F238E27FC236}">
-                <a16:creationId xmlns:a16="http://schemas.microsoft.com/office/drawing/2014/main" id="{FFE2DC07-5D3E-4FF4-AE79-D32913C6CC74}"/>
+                <a16:creationId xmlns:a16="http://schemas.microsoft.com/office/drawing/2014/main" id="{D48C4C80-A400-4CA3-908F-62D835D6B8EE}"/>
               </a:ext>
             </a:extLst>
           </p:cNvPr>
@@ -5757,7 +5849,7 @@
           <p:cNvPr id="23" name="">
             <a:extLst xmlns:a="http://schemas.openxmlformats.org/drawingml/2006/main">
               <a:ext uri="{FF2B5EF4-FFF2-40B4-BE49-F238E27FC236}">
-                <a16:creationId xmlns:a16="http://schemas.microsoft.com/office/drawing/2014/main" id="{274E988B-6B02-4D43-8B9E-82039DFCDBEB}"/>
+                <a16:creationId xmlns:a16="http://schemas.microsoft.com/office/drawing/2014/main" id="{73B39349-5B65-4639-A54D-E07E56B27838}"/>
               </a:ext>
             </a:extLst>
           </p:cNvPr>
@@ -5797,9 +5889,9 @@
                 <a:solidFill>
                   <a:srgbClr val="64748B"/>
                 </a:solidFill>
-                <a:latin typeface="Aptos"/>
-                <a:ea typeface="Aptos"/>
-                <a:cs typeface="Aptos"/>
+                <a:latin typeface="Microsoft YaHei"/>
+                <a:ea typeface="Microsoft YaHei"/>
+                <a:cs typeface="Microsoft YaHei"/>
               </a:defRPr>
             </a:pPr>
             <a:r>
@@ -5807,9 +5899,9 @@
                 <a:solidFill>
                   <a:srgbClr val="64748B"/>
                 </a:solidFill>
-                <a:latin typeface="Aptos"/>
-                <a:ea typeface="Aptos"/>
-                <a:cs typeface="Aptos"/>
+                <a:latin typeface="Microsoft YaHei"/>
+                <a:ea typeface="Microsoft YaHei"/>
+                <a:cs typeface="Microsoft YaHei"/>
               </a:rPr>
               <a:t>→</a:t>
             </a:r>
@@ -5821,7 +5913,7 @@
           <p:cNvPr id="24" name="">
             <a:extLst xmlns:a="http://schemas.openxmlformats.org/drawingml/2006/main">
               <a:ext uri="{FF2B5EF4-FFF2-40B4-BE49-F238E27FC236}">
-                <a16:creationId xmlns:a16="http://schemas.microsoft.com/office/drawing/2014/main" id="{0DBF23F9-2D2F-475C-B4BC-37F03FB8F289}"/>
+                <a16:creationId xmlns:a16="http://schemas.microsoft.com/office/drawing/2014/main" id="{3BB75CCF-0C9E-47C6-A69D-C857EBD678DE}"/>
               </a:ext>
             </a:extLst>
           </p:cNvPr>
@@ -5854,7 +5946,7 @@
           <p:cNvPr id="25" name="">
             <a:extLst xmlns:a="http://schemas.openxmlformats.org/drawingml/2006/main">
               <a:ext uri="{FF2B5EF4-FFF2-40B4-BE49-F238E27FC236}">
-                <a16:creationId xmlns:a16="http://schemas.microsoft.com/office/drawing/2014/main" id="{8C8A836F-A81B-446B-86F1-20C57014C437}"/>
+                <a16:creationId xmlns:a16="http://schemas.microsoft.com/office/drawing/2014/main" id="{3B7B53D1-D0BE-4545-9B5E-52B6726158C4}"/>
               </a:ext>
             </a:extLst>
           </p:cNvPr>
@@ -5887,7 +5979,7 @@
           <p:cNvPr id="26" name="">
             <a:extLst xmlns:a="http://schemas.openxmlformats.org/drawingml/2006/main">
               <a:ext uri="{FF2B5EF4-FFF2-40B4-BE49-F238E27FC236}">
-                <a16:creationId xmlns:a16="http://schemas.microsoft.com/office/drawing/2014/main" id="{1B4E1BC9-5FFE-4F2A-BEA8-29604C60D8B6}"/>
+                <a16:creationId xmlns:a16="http://schemas.microsoft.com/office/drawing/2014/main" id="{B493E945-CB0C-4319-80D3-1C99F4674A61}"/>
               </a:ext>
             </a:extLst>
           </p:cNvPr>
@@ -5927,9 +6019,9 @@
                 <a:solidFill>
                   <a:srgbClr val="121826"/>
                 </a:solidFill>
-                <a:latin typeface="Aptos"/>
-                <a:ea typeface="Aptos"/>
-                <a:cs typeface="Aptos"/>
+                <a:latin typeface="Microsoft YaHei"/>
+                <a:ea typeface="Microsoft YaHei"/>
+                <a:cs typeface="Microsoft YaHei"/>
               </a:defRPr>
             </a:pPr>
             <a:r>
@@ -5937,9 +6029,9 @@
                 <a:solidFill>
                   <a:srgbClr val="121826"/>
                 </a:solidFill>
-                <a:latin typeface="Aptos"/>
-                <a:ea typeface="Aptos"/>
-                <a:cs typeface="Aptos"/>
+                <a:latin typeface="Microsoft YaHei"/>
+                <a:ea typeface="Microsoft YaHei"/>
+                <a:cs typeface="Microsoft YaHei"/>
               </a:rPr>
               <a:t>RAG</a:t>
             </a:r>
@@ -5951,7 +6043,7 @@
           <p:cNvPr id="27" name="">
             <a:extLst xmlns:a="http://schemas.openxmlformats.org/drawingml/2006/main">
               <a:ext uri="{FF2B5EF4-FFF2-40B4-BE49-F238E27FC236}">
-                <a16:creationId xmlns:a16="http://schemas.microsoft.com/office/drawing/2014/main" id="{553A9083-8A32-414F-98B6-FA586E9F778A}"/>
+                <a16:creationId xmlns:a16="http://schemas.microsoft.com/office/drawing/2014/main" id="{EA2BC5E7-7571-4E5A-9519-D2067C4A533D}"/>
               </a:ext>
             </a:extLst>
           </p:cNvPr>
@@ -5991,9 +6083,9 @@
                 <a:solidFill>
                   <a:srgbClr val="64748B"/>
                 </a:solidFill>
-                <a:latin typeface="Aptos"/>
-                <a:ea typeface="Aptos"/>
-                <a:cs typeface="Aptos"/>
+                <a:latin typeface="Microsoft YaHei"/>
+                <a:ea typeface="Microsoft YaHei"/>
+                <a:cs typeface="Microsoft YaHei"/>
               </a:defRPr>
             </a:pPr>
             <a:r>
@@ -6001,9 +6093,9 @@
                 <a:solidFill>
                   <a:srgbClr val="64748B"/>
                 </a:solidFill>
-                <a:latin typeface="Aptos"/>
-                <a:ea typeface="Aptos"/>
-                <a:cs typeface="Aptos"/>
+                <a:latin typeface="Microsoft YaHei"/>
+                <a:ea typeface="Microsoft YaHei"/>
+                <a:cs typeface="Microsoft YaHei"/>
               </a:rPr>
               <a:t>证据检索</a:t>
             </a:r>
@@ -6015,7 +6107,7 @@
           <p:cNvPr id="28" name="">
             <a:extLst xmlns:a="http://schemas.openxmlformats.org/drawingml/2006/main">
               <a:ext uri="{FF2B5EF4-FFF2-40B4-BE49-F238E27FC236}">
-                <a16:creationId xmlns:a16="http://schemas.microsoft.com/office/drawing/2014/main" id="{938E9A46-4449-4450-AAD9-C3CBAB31DD2C}"/>
+                <a16:creationId xmlns:a16="http://schemas.microsoft.com/office/drawing/2014/main" id="{C09B4BEA-A99D-4207-AA5D-3FEAB9900896}"/>
               </a:ext>
             </a:extLst>
           </p:cNvPr>
@@ -6048,7 +6140,7 @@
           <p:cNvPr id="29" name="">
             <a:extLst xmlns:a="http://schemas.openxmlformats.org/drawingml/2006/main">
               <a:ext uri="{FF2B5EF4-FFF2-40B4-BE49-F238E27FC236}">
-                <a16:creationId xmlns:a16="http://schemas.microsoft.com/office/drawing/2014/main" id="{0ABD76C3-437A-42FE-94F9-4187B95555AF}"/>
+                <a16:creationId xmlns:a16="http://schemas.microsoft.com/office/drawing/2014/main" id="{9F871C5A-A462-4D2A-B02A-B81ABF6EE5C0}"/>
               </a:ext>
             </a:extLst>
           </p:cNvPr>
@@ -6088,9 +6180,9 @@
                 <a:solidFill>
                   <a:srgbClr val="64748B"/>
                 </a:solidFill>
-                <a:latin typeface="Aptos"/>
-                <a:ea typeface="Aptos"/>
-                <a:cs typeface="Aptos"/>
+                <a:latin typeface="Microsoft YaHei"/>
+                <a:ea typeface="Microsoft YaHei"/>
+                <a:cs typeface="Microsoft YaHei"/>
               </a:defRPr>
             </a:pPr>
             <a:r>
@@ -6098,9 +6190,9 @@
                 <a:solidFill>
                   <a:srgbClr val="64748B"/>
                 </a:solidFill>
-                <a:latin typeface="Aptos"/>
-                <a:ea typeface="Aptos"/>
-                <a:cs typeface="Aptos"/>
+                <a:latin typeface="Microsoft YaHei"/>
+                <a:ea typeface="Microsoft YaHei"/>
+                <a:cs typeface="Microsoft YaHei"/>
               </a:rPr>
               <a:t>→</a:t>
             </a:r>
@@ -6112,7 +6204,7 @@
           <p:cNvPr id="30" name="">
             <a:extLst xmlns:a="http://schemas.openxmlformats.org/drawingml/2006/main">
               <a:ext uri="{FF2B5EF4-FFF2-40B4-BE49-F238E27FC236}">
-                <a16:creationId xmlns:a16="http://schemas.microsoft.com/office/drawing/2014/main" id="{FEB9D2C1-8E7F-4174-B10B-3D9663BEAB56}"/>
+                <a16:creationId xmlns:a16="http://schemas.microsoft.com/office/drawing/2014/main" id="{260E5DA5-C9B1-4FAD-B2C8-85FECBBAEB11}"/>
               </a:ext>
             </a:extLst>
           </p:cNvPr>
@@ -6145,7 +6237,7 @@
           <p:cNvPr id="31" name="">
             <a:extLst xmlns:a="http://schemas.openxmlformats.org/drawingml/2006/main">
               <a:ext uri="{FF2B5EF4-FFF2-40B4-BE49-F238E27FC236}">
-                <a16:creationId xmlns:a16="http://schemas.microsoft.com/office/drawing/2014/main" id="{B51E90E4-9267-45AB-8C51-43A3D5E4D018}"/>
+                <a16:creationId xmlns:a16="http://schemas.microsoft.com/office/drawing/2014/main" id="{0A5F33FC-6912-45FE-A3E1-A4B72C60C197}"/>
               </a:ext>
             </a:extLst>
           </p:cNvPr>
@@ -6178,7 +6270,7 @@
           <p:cNvPr id="32" name="">
             <a:extLst xmlns:a="http://schemas.openxmlformats.org/drawingml/2006/main">
               <a:ext uri="{FF2B5EF4-FFF2-40B4-BE49-F238E27FC236}">
-                <a16:creationId xmlns:a16="http://schemas.microsoft.com/office/drawing/2014/main" id="{CBA987D3-AD68-461F-AD81-06AAB3F3E3F0}"/>
+                <a16:creationId xmlns:a16="http://schemas.microsoft.com/office/drawing/2014/main" id="{DE665DDA-B6FB-4117-90FD-845F86BE2096}"/>
               </a:ext>
             </a:extLst>
           </p:cNvPr>
@@ -6218,9 +6310,9 @@
                 <a:solidFill>
                   <a:srgbClr val="121826"/>
                 </a:solidFill>
-                <a:latin typeface="Aptos"/>
-                <a:ea typeface="Aptos"/>
-                <a:cs typeface="Aptos"/>
+                <a:latin typeface="Microsoft YaHei"/>
+                <a:ea typeface="Microsoft YaHei"/>
+                <a:cs typeface="Microsoft YaHei"/>
               </a:defRPr>
             </a:pPr>
             <a:r>
@@ -6228,9 +6320,9 @@
                 <a:solidFill>
                   <a:srgbClr val="121826"/>
                 </a:solidFill>
-                <a:latin typeface="Aptos"/>
-                <a:ea typeface="Aptos"/>
-                <a:cs typeface="Aptos"/>
+                <a:latin typeface="Microsoft YaHei"/>
+                <a:ea typeface="Microsoft YaHei"/>
+                <a:cs typeface="Microsoft YaHei"/>
               </a:rPr>
               <a:t>LLM</a:t>
             </a:r>
@@ -6242,7 +6334,7 @@
           <p:cNvPr id="33" name="">
             <a:extLst xmlns:a="http://schemas.openxmlformats.org/drawingml/2006/main">
               <a:ext uri="{FF2B5EF4-FFF2-40B4-BE49-F238E27FC236}">
-                <a16:creationId xmlns:a16="http://schemas.microsoft.com/office/drawing/2014/main" id="{AF8D0BA2-5B1A-4A1F-94C7-7502F9DAD930}"/>
+                <a16:creationId xmlns:a16="http://schemas.microsoft.com/office/drawing/2014/main" id="{4695C3E0-2CBC-482B-B893-0D0FBBCB3D50}"/>
               </a:ext>
             </a:extLst>
           </p:cNvPr>
@@ -6282,9 +6374,9 @@
                 <a:solidFill>
                   <a:srgbClr val="64748B"/>
                 </a:solidFill>
-                <a:latin typeface="Aptos"/>
-                <a:ea typeface="Aptos"/>
-                <a:cs typeface="Aptos"/>
+                <a:latin typeface="Microsoft YaHei"/>
+                <a:ea typeface="Microsoft YaHei"/>
+                <a:cs typeface="Microsoft YaHei"/>
               </a:defRPr>
             </a:pPr>
             <a:r>
@@ -6292,9 +6384,9 @@
                 <a:solidFill>
                   <a:srgbClr val="64748B"/>
                 </a:solidFill>
-                <a:latin typeface="Aptos"/>
-                <a:ea typeface="Aptos"/>
-                <a:cs typeface="Aptos"/>
+                <a:latin typeface="Microsoft YaHei"/>
+                <a:ea typeface="Microsoft YaHei"/>
+                <a:cs typeface="Microsoft YaHei"/>
               </a:rPr>
               <a:t>回答生成</a:t>
             </a:r>
@@ -6306,7 +6398,7 @@
           <p:cNvPr id="34" name="">
             <a:extLst xmlns:a="http://schemas.openxmlformats.org/drawingml/2006/main">
               <a:ext uri="{FF2B5EF4-FFF2-40B4-BE49-F238E27FC236}">
-                <a16:creationId xmlns:a16="http://schemas.microsoft.com/office/drawing/2014/main" id="{EED12136-E2FD-43D1-866F-FAC5D87F5071}"/>
+                <a16:creationId xmlns:a16="http://schemas.microsoft.com/office/drawing/2014/main" id="{41724D22-78B6-4779-BC93-1ECE6FEAFE5D}"/>
               </a:ext>
             </a:extLst>
           </p:cNvPr>
@@ -6339,7 +6431,7 @@
           <p:cNvPr id="35" name="">
             <a:extLst xmlns:a="http://schemas.openxmlformats.org/drawingml/2006/main">
               <a:ext uri="{FF2B5EF4-FFF2-40B4-BE49-F238E27FC236}">
-                <a16:creationId xmlns:a16="http://schemas.microsoft.com/office/drawing/2014/main" id="{F9DE52DA-2266-407C-A2B1-4ABA4BAFAD53}"/>
+                <a16:creationId xmlns:a16="http://schemas.microsoft.com/office/drawing/2014/main" id="{A3958F95-ACFA-40C5-8BFB-618436424366}"/>
               </a:ext>
             </a:extLst>
           </p:cNvPr>
@@ -6379,9 +6471,9 @@
                 <a:solidFill>
                   <a:srgbClr val="64748B"/>
                 </a:solidFill>
-                <a:latin typeface="Aptos"/>
-                <a:ea typeface="Aptos"/>
-                <a:cs typeface="Aptos"/>
+                <a:latin typeface="Microsoft YaHei"/>
+                <a:ea typeface="Microsoft YaHei"/>
+                <a:cs typeface="Microsoft YaHei"/>
               </a:defRPr>
             </a:pPr>
             <a:r>
@@ -6389,9 +6481,9 @@
                 <a:solidFill>
                   <a:srgbClr val="64748B"/>
                 </a:solidFill>
-                <a:latin typeface="Aptos"/>
-                <a:ea typeface="Aptos"/>
-                <a:cs typeface="Aptos"/>
+                <a:latin typeface="Microsoft YaHei"/>
+                <a:ea typeface="Microsoft YaHei"/>
+                <a:cs typeface="Microsoft YaHei"/>
               </a:rPr>
               <a:t>→</a:t>
             </a:r>
@@ -6403,7 +6495,7 @@
           <p:cNvPr id="36" name="">
             <a:extLst xmlns:a="http://schemas.openxmlformats.org/drawingml/2006/main">
               <a:ext uri="{FF2B5EF4-FFF2-40B4-BE49-F238E27FC236}">
-                <a16:creationId xmlns:a16="http://schemas.microsoft.com/office/drawing/2014/main" id="{04223989-79E9-4FC8-A3B0-88AA185F76E9}"/>
+                <a16:creationId xmlns:a16="http://schemas.microsoft.com/office/drawing/2014/main" id="{8C0424B9-A8B9-4088-9CFF-BEB1DC4D0F77}"/>
               </a:ext>
             </a:extLst>
           </p:cNvPr>
@@ -6436,7 +6528,7 @@
           <p:cNvPr id="37" name="">
             <a:extLst xmlns:a="http://schemas.openxmlformats.org/drawingml/2006/main">
               <a:ext uri="{FF2B5EF4-FFF2-40B4-BE49-F238E27FC236}">
-                <a16:creationId xmlns:a16="http://schemas.microsoft.com/office/drawing/2014/main" id="{C3588235-C239-4313-9124-8092E475EC3A}"/>
+                <a16:creationId xmlns:a16="http://schemas.microsoft.com/office/drawing/2014/main" id="{B43F80C9-AEE2-407F-940F-E5D39127FE4D}"/>
               </a:ext>
             </a:extLst>
           </p:cNvPr>
@@ -6469,7 +6561,7 @@
           <p:cNvPr id="38" name="">
             <a:extLst xmlns:a="http://schemas.openxmlformats.org/drawingml/2006/main">
               <a:ext uri="{FF2B5EF4-FFF2-40B4-BE49-F238E27FC236}">
-                <a16:creationId xmlns:a16="http://schemas.microsoft.com/office/drawing/2014/main" id="{9B35DE76-CEAB-4946-ACF4-974B60FDC718}"/>
+                <a16:creationId xmlns:a16="http://schemas.microsoft.com/office/drawing/2014/main" id="{1CF6E987-BB27-4BAC-B0A2-5A4B0817F1E7}"/>
               </a:ext>
             </a:extLst>
           </p:cNvPr>
@@ -6509,9 +6601,9 @@
                 <a:solidFill>
                   <a:srgbClr val="121826"/>
                 </a:solidFill>
-                <a:latin typeface="Aptos"/>
-                <a:ea typeface="Aptos"/>
-                <a:cs typeface="Aptos"/>
+                <a:latin typeface="Microsoft YaHei"/>
+                <a:ea typeface="Microsoft YaHei"/>
+                <a:cs typeface="Microsoft YaHei"/>
               </a:defRPr>
             </a:pPr>
             <a:r>
@@ -6519,9 +6611,9 @@
                 <a:solidFill>
                   <a:srgbClr val="121826"/>
                 </a:solidFill>
-                <a:latin typeface="Aptos"/>
-                <a:ea typeface="Aptos"/>
-                <a:cs typeface="Aptos"/>
+                <a:latin typeface="Microsoft YaHei"/>
+                <a:ea typeface="Microsoft YaHei"/>
+                <a:cs typeface="Microsoft YaHei"/>
               </a:rPr>
               <a:t>Playback</a:t>
             </a:r>
@@ -6533,7 +6625,7 @@
           <p:cNvPr id="39" name="">
             <a:extLst xmlns:a="http://schemas.openxmlformats.org/drawingml/2006/main">
               <a:ext uri="{FF2B5EF4-FFF2-40B4-BE49-F238E27FC236}">
-                <a16:creationId xmlns:a16="http://schemas.microsoft.com/office/drawing/2014/main" id="{37650526-43B7-4ADB-9067-82EC60641B11}"/>
+                <a16:creationId xmlns:a16="http://schemas.microsoft.com/office/drawing/2014/main" id="{E32514A3-0AB6-45CD-9D0A-42C83C8E2012}"/>
               </a:ext>
             </a:extLst>
           </p:cNvPr>
@@ -6573,9 +6665,9 @@
                 <a:solidFill>
                   <a:srgbClr val="64748B"/>
                 </a:solidFill>
-                <a:latin typeface="Aptos"/>
-                <a:ea typeface="Aptos"/>
-                <a:cs typeface="Aptos"/>
+                <a:latin typeface="Microsoft YaHei"/>
+                <a:ea typeface="Microsoft YaHei"/>
+                <a:cs typeface="Microsoft YaHei"/>
               </a:defRPr>
             </a:pPr>
             <a:r>
@@ -6583,9 +6675,9 @@
                 <a:solidFill>
                   <a:srgbClr val="64748B"/>
                 </a:solidFill>
-                <a:latin typeface="Aptos"/>
-                <a:ea typeface="Aptos"/>
-                <a:cs typeface="Aptos"/>
+                <a:latin typeface="Microsoft YaHei"/>
+                <a:ea typeface="Microsoft YaHei"/>
+                <a:cs typeface="Microsoft YaHei"/>
               </a:rPr>
               <a:t>句级播报</a:t>
             </a:r>
@@ -6597,7 +6689,7 @@
           <p:cNvPr id="40" name="">
             <a:extLst xmlns:a="http://schemas.openxmlformats.org/drawingml/2006/main">
               <a:ext uri="{FF2B5EF4-FFF2-40B4-BE49-F238E27FC236}">
-                <a16:creationId xmlns:a16="http://schemas.microsoft.com/office/drawing/2014/main" id="{B260FA80-8695-4FBB-B1F5-DFE3EB843A27}"/>
+                <a16:creationId xmlns:a16="http://schemas.microsoft.com/office/drawing/2014/main" id="{78DB2570-DFBE-4150-856D-64015627EF92}"/>
               </a:ext>
             </a:extLst>
           </p:cNvPr>
@@ -6630,7 +6722,7 @@
           <p:cNvPr id="41" name="">
             <a:extLst xmlns:a="http://schemas.openxmlformats.org/drawingml/2006/main">
               <a:ext uri="{FF2B5EF4-FFF2-40B4-BE49-F238E27FC236}">
-                <a16:creationId xmlns:a16="http://schemas.microsoft.com/office/drawing/2014/main" id="{ED4F34E2-6C41-4380-8EB2-842F5B4DEAE7}"/>
+                <a16:creationId xmlns:a16="http://schemas.microsoft.com/office/drawing/2014/main" id="{E8D3CEE2-0498-4AA9-90B3-4112129A2D7D}"/>
               </a:ext>
             </a:extLst>
           </p:cNvPr>
@@ -6670,9 +6762,9 @@
                 <a:solidFill>
                   <a:srgbClr val="64748B"/>
                 </a:solidFill>
-                <a:latin typeface="Aptos"/>
-                <a:ea typeface="Aptos"/>
-                <a:cs typeface="Aptos"/>
+                <a:latin typeface="Microsoft YaHei"/>
+                <a:ea typeface="Microsoft YaHei"/>
+                <a:cs typeface="Microsoft YaHei"/>
               </a:defRPr>
             </a:pPr>
             <a:r>
@@ -6680,9 +6772,9 @@
                 <a:solidFill>
                   <a:srgbClr val="64748B"/>
                 </a:solidFill>
-                <a:latin typeface="Aptos"/>
-                <a:ea typeface="Aptos"/>
-                <a:cs typeface="Aptos"/>
+                <a:latin typeface="Microsoft YaHei"/>
+                <a:ea typeface="Microsoft YaHei"/>
+                <a:cs typeface="Microsoft YaHei"/>
               </a:rPr>
               <a:t>→</a:t>
             </a:r>
@@ -6694,7 +6786,7 @@
           <p:cNvPr id="42" name="">
             <a:extLst xmlns:a="http://schemas.openxmlformats.org/drawingml/2006/main">
               <a:ext uri="{FF2B5EF4-FFF2-40B4-BE49-F238E27FC236}">
-                <a16:creationId xmlns:a16="http://schemas.microsoft.com/office/drawing/2014/main" id="{CF2C3330-3764-4F74-AAF7-C22088310613}"/>
+                <a16:creationId xmlns:a16="http://schemas.microsoft.com/office/drawing/2014/main" id="{BC8E9887-2F76-4E27-A221-FE1DFA720A17}"/>
               </a:ext>
             </a:extLst>
           </p:cNvPr>
@@ -6727,7 +6819,7 @@
           <p:cNvPr id="43" name="">
             <a:extLst xmlns:a="http://schemas.openxmlformats.org/drawingml/2006/main">
               <a:ext uri="{FF2B5EF4-FFF2-40B4-BE49-F238E27FC236}">
-                <a16:creationId xmlns:a16="http://schemas.microsoft.com/office/drawing/2014/main" id="{FA150507-39B8-4DFE-BD66-BD6E70D7E12D}"/>
+                <a16:creationId xmlns:a16="http://schemas.microsoft.com/office/drawing/2014/main" id="{E8347A71-E62A-4D66-9171-CAFE6C8BF4C9}"/>
               </a:ext>
             </a:extLst>
           </p:cNvPr>
@@ -6760,7 +6852,7 @@
           <p:cNvPr id="44" name="">
             <a:extLst xmlns:a="http://schemas.openxmlformats.org/drawingml/2006/main">
               <a:ext uri="{FF2B5EF4-FFF2-40B4-BE49-F238E27FC236}">
-                <a16:creationId xmlns:a16="http://schemas.microsoft.com/office/drawing/2014/main" id="{9D2E5F0D-5C65-4A31-8B29-86D47657C1A0}"/>
+                <a16:creationId xmlns:a16="http://schemas.microsoft.com/office/drawing/2014/main" id="{8B006F0C-3ABA-4E28-961E-744DFA85D956}"/>
               </a:ext>
             </a:extLst>
           </p:cNvPr>
@@ -6800,9 +6892,9 @@
                 <a:solidFill>
                   <a:srgbClr val="121826"/>
                 </a:solidFill>
-                <a:latin typeface="Aptos"/>
-                <a:ea typeface="Aptos"/>
-                <a:cs typeface="Aptos"/>
+                <a:latin typeface="Microsoft YaHei"/>
+                <a:ea typeface="Microsoft YaHei"/>
+                <a:cs typeface="Microsoft YaHei"/>
               </a:defRPr>
             </a:pPr>
             <a:r>
@@ -6810,9 +6902,9 @@
                 <a:solidFill>
                   <a:srgbClr val="121826"/>
                 </a:solidFill>
-                <a:latin typeface="Aptos"/>
-                <a:ea typeface="Aptos"/>
-                <a:cs typeface="Aptos"/>
+                <a:latin typeface="Microsoft YaHei"/>
+                <a:ea typeface="Microsoft YaHei"/>
+                <a:cs typeface="Microsoft YaHei"/>
               </a:rPr>
               <a:t>Logging</a:t>
             </a:r>
@@ -6824,7 +6916,7 @@
           <p:cNvPr id="45" name="">
             <a:extLst xmlns:a="http://schemas.openxmlformats.org/drawingml/2006/main">
               <a:ext uri="{FF2B5EF4-FFF2-40B4-BE49-F238E27FC236}">
-                <a16:creationId xmlns:a16="http://schemas.microsoft.com/office/drawing/2014/main" id="{0BF7B447-7BBE-474F-B67C-881C25E1CAE1}"/>
+                <a16:creationId xmlns:a16="http://schemas.microsoft.com/office/drawing/2014/main" id="{671D4F6A-DA7F-4652-8F98-16950A9BF25E}"/>
               </a:ext>
             </a:extLst>
           </p:cNvPr>
@@ -6864,9 +6956,9 @@
                 <a:solidFill>
                   <a:srgbClr val="64748B"/>
                 </a:solidFill>
-                <a:latin typeface="Aptos"/>
-                <a:ea typeface="Aptos"/>
-                <a:cs typeface="Aptos"/>
+                <a:latin typeface="Microsoft YaHei"/>
+                <a:ea typeface="Microsoft YaHei"/>
+                <a:cs typeface="Microsoft YaHei"/>
               </a:defRPr>
             </a:pPr>
             <a:r>
@@ -6874,9 +6966,9 @@
                 <a:solidFill>
                   <a:srgbClr val="64748B"/>
                 </a:solidFill>
-                <a:latin typeface="Aptos"/>
-                <a:ea typeface="Aptos"/>
-                <a:cs typeface="Aptos"/>
+                <a:latin typeface="Microsoft YaHei"/>
+                <a:ea typeface="Microsoft YaHei"/>
+                <a:cs typeface="Microsoft YaHei"/>
               </a:rPr>
               <a:t>指标记录</a:t>
             </a:r>
@@ -6888,7 +6980,7 @@
           <p:cNvPr id="46" name="">
             <a:extLst xmlns:a="http://schemas.openxmlformats.org/drawingml/2006/main">
               <a:ext uri="{FF2B5EF4-FFF2-40B4-BE49-F238E27FC236}">
-                <a16:creationId xmlns:a16="http://schemas.microsoft.com/office/drawing/2014/main" id="{4DA4DBBC-DBBB-4FB9-B590-D87E210E9F76}"/>
+                <a16:creationId xmlns:a16="http://schemas.microsoft.com/office/drawing/2014/main" id="{591F914C-7329-42E0-9E15-0AE2A7EDE827}"/>
               </a:ext>
             </a:extLst>
           </p:cNvPr>
@@ -6921,7 +7013,7 @@
           <p:cNvPr id="47" name="">
             <a:extLst xmlns:a="http://schemas.openxmlformats.org/drawingml/2006/main">
               <a:ext uri="{FF2B5EF4-FFF2-40B4-BE49-F238E27FC236}">
-                <a16:creationId xmlns:a16="http://schemas.microsoft.com/office/drawing/2014/main" id="{C772CEBC-9D48-4BB5-873D-58243C63286E}"/>
+                <a16:creationId xmlns:a16="http://schemas.microsoft.com/office/drawing/2014/main" id="{49635377-794B-4639-9804-7E4C0A32A17D}"/>
               </a:ext>
             </a:extLst>
           </p:cNvPr>
@@ -6961,9 +7053,9 @@
                 <a:solidFill>
                   <a:srgbClr val="DC2626"/>
                 </a:solidFill>
-                <a:latin typeface="Aptos"/>
-                <a:ea typeface="Aptos"/>
-                <a:cs typeface="Aptos"/>
+                <a:latin typeface="Microsoft YaHei"/>
+                <a:ea typeface="Microsoft YaHei"/>
+                <a:cs typeface="Microsoft YaHei"/>
               </a:defRPr>
             </a:pPr>
             <a:r>
@@ -6971,9 +7063,9 @@
                 <a:solidFill>
                   <a:srgbClr val="DC2626"/>
                 </a:solidFill>
-                <a:latin typeface="Aptos"/>
-                <a:ea typeface="Aptos"/>
-                <a:cs typeface="Aptos"/>
+                <a:latin typeface="Microsoft YaHei"/>
+                <a:ea typeface="Microsoft YaHei"/>
+                <a:cs typeface="Microsoft YaHei"/>
               </a:rPr>
               <a:t>原则 1：危险请求在模型前拦截</a:t>
             </a:r>
@@ -6985,7 +7077,7 @@
           <p:cNvPr id="48" name="">
             <a:extLst xmlns:a="http://schemas.openxmlformats.org/drawingml/2006/main">
               <a:ext uri="{FF2B5EF4-FFF2-40B4-BE49-F238E27FC236}">
-                <a16:creationId xmlns:a16="http://schemas.microsoft.com/office/drawing/2014/main" id="{99B654EE-64CD-496A-938D-B58567B6FCD5}"/>
+                <a16:creationId xmlns:a16="http://schemas.microsoft.com/office/drawing/2014/main" id="{E98CB98C-F4A1-4063-B814-56BC3825D4B9}"/>
               </a:ext>
             </a:extLst>
           </p:cNvPr>
@@ -7018,7 +7110,7 @@
           <p:cNvPr id="49" name="">
             <a:extLst xmlns:a="http://schemas.openxmlformats.org/drawingml/2006/main">
               <a:ext uri="{FF2B5EF4-FFF2-40B4-BE49-F238E27FC236}">
-                <a16:creationId xmlns:a16="http://schemas.microsoft.com/office/drawing/2014/main" id="{4A3C9D9F-6CAD-4F48-A031-809C4DBC9EFA}"/>
+                <a16:creationId xmlns:a16="http://schemas.microsoft.com/office/drawing/2014/main" id="{8C341911-EF47-4DC5-955A-EF0B5147D40E}"/>
               </a:ext>
             </a:extLst>
           </p:cNvPr>
@@ -7058,9 +7150,9 @@
                 <a:solidFill>
                   <a:srgbClr val="2563EB"/>
                 </a:solidFill>
-                <a:latin typeface="Aptos"/>
-                <a:ea typeface="Aptos"/>
-                <a:cs typeface="Aptos"/>
+                <a:latin typeface="Microsoft YaHei"/>
+                <a:ea typeface="Microsoft YaHei"/>
+                <a:cs typeface="Microsoft YaHei"/>
               </a:defRPr>
             </a:pPr>
             <a:r>
@@ -7068,9 +7160,9 @@
                 <a:solidFill>
                   <a:srgbClr val="2563EB"/>
                 </a:solidFill>
-                <a:latin typeface="Aptos"/>
-                <a:ea typeface="Aptos"/>
-                <a:cs typeface="Aptos"/>
+                <a:latin typeface="Microsoft YaHei"/>
+                <a:ea typeface="Microsoft YaHei"/>
+                <a:cs typeface="Microsoft YaHei"/>
               </a:rPr>
               <a:t>原则 2：领域回答必须带证据</a:t>
             </a:r>
@@ -7082,7 +7174,7 @@
           <p:cNvPr id="50" name="">
             <a:extLst xmlns:a="http://schemas.openxmlformats.org/drawingml/2006/main">
               <a:ext uri="{FF2B5EF4-FFF2-40B4-BE49-F238E27FC236}">
-                <a16:creationId xmlns:a16="http://schemas.microsoft.com/office/drawing/2014/main" id="{0781525A-67FF-43BC-8D3F-CC5A84DF6638}"/>
+                <a16:creationId xmlns:a16="http://schemas.microsoft.com/office/drawing/2014/main" id="{43800A9E-903F-4D0D-A699-668E0B19C7D7}"/>
               </a:ext>
             </a:extLst>
           </p:cNvPr>
@@ -7115,7 +7207,7 @@
           <p:cNvPr id="51" name="">
             <a:extLst xmlns:a="http://schemas.openxmlformats.org/drawingml/2006/main">
               <a:ext uri="{FF2B5EF4-FFF2-40B4-BE49-F238E27FC236}">
-                <a16:creationId xmlns:a16="http://schemas.microsoft.com/office/drawing/2014/main" id="{F6BE7233-4A0B-4307-82BA-9B2A33FBD8E3}"/>
+                <a16:creationId xmlns:a16="http://schemas.microsoft.com/office/drawing/2014/main" id="{BFE72542-D446-4327-808E-6C5601131953}"/>
               </a:ext>
             </a:extLst>
           </p:cNvPr>
@@ -7155,9 +7247,9 @@
                 <a:solidFill>
                   <a:srgbClr val="10B981"/>
                 </a:solidFill>
-                <a:latin typeface="Aptos"/>
-                <a:ea typeface="Aptos"/>
-                <a:cs typeface="Aptos"/>
+                <a:latin typeface="Microsoft YaHei"/>
+                <a:ea typeface="Microsoft YaHei"/>
+                <a:cs typeface="Microsoft YaHei"/>
               </a:defRPr>
             </a:pPr>
             <a:r>
@@ -7165,9 +7257,9 @@
                 <a:solidFill>
                   <a:srgbClr val="10B981"/>
                 </a:solidFill>
-                <a:latin typeface="Aptos"/>
-                <a:ea typeface="Aptos"/>
-                <a:cs typeface="Aptos"/>
+                <a:latin typeface="Microsoft YaHei"/>
+                <a:ea typeface="Microsoft YaHei"/>
+                <a:cs typeface="Microsoft YaHei"/>
               </a:rPr>
               <a:t>原则 3：答辩现场可无 GPU 运行</a:t>
             </a:r>
@@ -7179,7 +7271,7 @@
           <p:cNvPr id="52" name="">
             <a:extLst xmlns:a="http://schemas.openxmlformats.org/drawingml/2006/main">
               <a:ext uri="{FF2B5EF4-FFF2-40B4-BE49-F238E27FC236}">
-                <a16:creationId xmlns:a16="http://schemas.microsoft.com/office/drawing/2014/main" id="{62F3A1A8-D830-417C-AF6E-B4F9579908A5}"/>
+                <a16:creationId xmlns:a16="http://schemas.microsoft.com/office/drawing/2014/main" id="{1EA434CF-8BAA-45EB-929F-831EB687B6CE}"/>
               </a:ext>
             </a:extLst>
           </p:cNvPr>
@@ -7219,9 +7311,9 @@
                 <a:solidFill>
                   <a:srgbClr val="64748B"/>
                 </a:solidFill>
-                <a:latin typeface="Aptos"/>
-                <a:ea typeface="Aptos"/>
-                <a:cs typeface="Aptos"/>
+                <a:latin typeface="Microsoft YaHei"/>
+                <a:ea typeface="Microsoft YaHei"/>
+                <a:cs typeface="Microsoft YaHei"/>
               </a:defRPr>
             </a:pPr>
             <a:r>
@@ -7229,9 +7321,9 @@
                 <a:solidFill>
                   <a:srgbClr val="64748B"/>
                 </a:solidFill>
-                <a:latin typeface="Aptos"/>
-                <a:ea typeface="Aptos"/>
-                <a:cs typeface="Aptos"/>
+                <a:latin typeface="Microsoft YaHei"/>
+                <a:ea typeface="Microsoft YaHei"/>
+                <a:cs typeface="Microsoft YaHei"/>
               </a:rPr>
               <a:t>ShipVoice | 信息安全基础 A2</a:t>
             </a:r>
@@ -7243,7 +7335,7 @@
           <p:cNvPr id="53" name="">
             <a:extLst xmlns:a="http://schemas.openxmlformats.org/drawingml/2006/main">
               <a:ext uri="{FF2B5EF4-FFF2-40B4-BE49-F238E27FC236}">
-                <a16:creationId xmlns:a16="http://schemas.microsoft.com/office/drawing/2014/main" id="{39FCC0B1-A456-4998-B6CE-D3A9C7B33DE8}"/>
+                <a16:creationId xmlns:a16="http://schemas.microsoft.com/office/drawing/2014/main" id="{23B5342F-4C5C-4CE8-AEF4-97BEE4901980}"/>
               </a:ext>
             </a:extLst>
           </p:cNvPr>
@@ -7283,9 +7375,9 @@
                 <a:solidFill>
                   <a:srgbClr val="64748B"/>
                 </a:solidFill>
-                <a:latin typeface="Aptos"/>
-                <a:ea typeface="Aptos"/>
-                <a:cs typeface="Aptos"/>
+                <a:latin typeface="Microsoft YaHei"/>
+                <a:ea typeface="Microsoft YaHei"/>
+                <a:cs typeface="Microsoft YaHei"/>
               </a:defRPr>
             </a:pPr>
             <a:r>
@@ -7293,9 +7385,9 @@
                 <a:solidFill>
                   <a:srgbClr val="64748B"/>
                 </a:solidFill>
-                <a:latin typeface="Aptos"/>
-                <a:ea typeface="Aptos"/>
-                <a:cs typeface="Aptos"/>
+                <a:latin typeface="Microsoft YaHei"/>
+                <a:ea typeface="Microsoft YaHei"/>
+                <a:cs typeface="Microsoft YaHei"/>
               </a:rPr>
               <a:t>03</a:t>
             </a:r>
@@ -7305,7 +7397,7 @@
     </p:spTree>
     <p:extLst>
       <p:ext uri="{BB962C8B-B14F-4D97-AF65-F5344CB8AC3E}">
-        <p14:creationId xmlns:p14="http://schemas.microsoft.com/office/powerpoint/2010/main" val="1394226257"/>
+        <p14:creationId xmlns:p14="http://schemas.microsoft.com/office/powerpoint/2010/main" val="424430630"/>
       </p:ext>
     </p:extLst>
   </p:cSld>
@@ -7329,7 +7421,7 @@
           <p:cNvPr id="1" name="">
             <a:extLst xmlns:a="http://schemas.openxmlformats.org/drawingml/2006/main">
               <a:ext uri="{FF2B5EF4-FFF2-40B4-BE49-F238E27FC236}">
-                <a16:creationId xmlns:a16="http://schemas.microsoft.com/office/drawing/2014/main" id="{563B5CC6-34C0-4A94-8753-B31E020035AE}"/>
+                <a16:creationId xmlns:a16="http://schemas.microsoft.com/office/drawing/2014/main" id="{54E21719-B2E8-443C-801A-AA94FE2CAA1B}"/>
               </a:ext>
             </a:extLst>
           </p:cNvPr>
@@ -7362,7 +7454,7 @@
           <p:cNvPr id="2" name="">
             <a:extLst xmlns:a="http://schemas.openxmlformats.org/drawingml/2006/main">
               <a:ext uri="{FF2B5EF4-FFF2-40B4-BE49-F238E27FC236}">
-                <a16:creationId xmlns:a16="http://schemas.microsoft.com/office/drawing/2014/main" id="{6FA2484D-DB65-4ADF-99F4-E96AF29F130F}"/>
+                <a16:creationId xmlns:a16="http://schemas.microsoft.com/office/drawing/2014/main" id="{A9FD13AF-03BE-4E04-8DA1-303C008A2AF7}"/>
               </a:ext>
             </a:extLst>
           </p:cNvPr>
@@ -7395,7 +7487,7 @@
           <p:cNvPr id="3" name="">
             <a:extLst xmlns:a="http://schemas.openxmlformats.org/drawingml/2006/main">
               <a:ext uri="{FF2B5EF4-FFF2-40B4-BE49-F238E27FC236}">
-                <a16:creationId xmlns:a16="http://schemas.microsoft.com/office/drawing/2014/main" id="{A43C465B-6F76-4076-ABFB-1D288CCD3975}"/>
+                <a16:creationId xmlns:a16="http://schemas.microsoft.com/office/drawing/2014/main" id="{37D292B2-0998-4A3E-B5A5-BAA04FD36AE0}"/>
               </a:ext>
             </a:extLst>
           </p:cNvPr>
@@ -7435,9 +7527,9 @@
                 <a:solidFill>
                   <a:srgbClr val="2563EB"/>
                 </a:solidFill>
-                <a:latin typeface="Aptos"/>
-                <a:ea typeface="Aptos"/>
-                <a:cs typeface="Aptos"/>
+                <a:latin typeface="Microsoft YaHei"/>
+                <a:ea typeface="Microsoft YaHei"/>
+                <a:cs typeface="Microsoft YaHei"/>
               </a:defRPr>
             </a:pPr>
             <a:r>
@@ -7445,9 +7537,9 @@
                 <a:solidFill>
                   <a:srgbClr val="2563EB"/>
                 </a:solidFill>
-                <a:latin typeface="Aptos"/>
-                <a:ea typeface="Aptos"/>
-                <a:cs typeface="Aptos"/>
+                <a:latin typeface="Microsoft YaHei"/>
+                <a:ea typeface="Microsoft YaHei"/>
+                <a:cs typeface="Microsoft YaHei"/>
               </a:rPr>
               <a:t>RAG EVIDENCE</a:t>
             </a:r>
@@ -7459,7 +7551,7 @@
           <p:cNvPr id="4" name="">
             <a:extLst xmlns:a="http://schemas.openxmlformats.org/drawingml/2006/main">
               <a:ext uri="{FF2B5EF4-FFF2-40B4-BE49-F238E27FC236}">
-                <a16:creationId xmlns:a16="http://schemas.microsoft.com/office/drawing/2014/main" id="{574CBDEE-D10F-4D03-A02D-BC527DC8A20A}"/>
+                <a16:creationId xmlns:a16="http://schemas.microsoft.com/office/drawing/2014/main" id="{646D8D95-0413-4B02-8309-A846E1E33B2B}"/>
               </a:ext>
             </a:extLst>
           </p:cNvPr>
@@ -7523,7 +7615,7 @@
           <p:cNvPr id="5" name="">
             <a:extLst xmlns:a="http://schemas.openxmlformats.org/drawingml/2006/main">
               <a:ext uri="{FF2B5EF4-FFF2-40B4-BE49-F238E27FC236}">
-                <a16:creationId xmlns:a16="http://schemas.microsoft.com/office/drawing/2014/main" id="{D3DE4544-08B3-44BC-A556-C32B7E0102AD}"/>
+                <a16:creationId xmlns:a16="http://schemas.microsoft.com/office/drawing/2014/main" id="{2A902CEF-7846-4930-8667-B7A910AE775B}"/>
               </a:ext>
             </a:extLst>
           </p:cNvPr>
@@ -7563,9 +7655,9 @@
                 <a:solidFill>
                   <a:srgbClr val="64748B"/>
                 </a:solidFill>
-                <a:latin typeface="Aptos"/>
-                <a:ea typeface="Aptos"/>
-                <a:cs typeface="Aptos"/>
+                <a:latin typeface="Microsoft YaHei"/>
+                <a:ea typeface="Microsoft YaHei"/>
+                <a:cs typeface="Microsoft YaHei"/>
               </a:defRPr>
             </a:pPr>
             <a:r>
@@ -7573,9 +7665,9 @@
                 <a:solidFill>
                   <a:srgbClr val="64748B"/>
                 </a:solidFill>
-                <a:latin typeface="Aptos"/>
-                <a:ea typeface="Aptos"/>
-                <a:cs typeface="Aptos"/>
+                <a:latin typeface="Microsoft YaHei"/>
+                <a:ea typeface="Microsoft YaHei"/>
+                <a:cs typeface="Microsoft YaHei"/>
               </a:rPr>
               <a:t>ShipVoice 不是凭空生成安全建议。</a:t>
             </a:r>
@@ -7587,7 +7679,7 @@
           <p:cNvPr id="6" name="">
             <a:extLst xmlns:a="http://schemas.openxmlformats.org/drawingml/2006/main">
               <a:ext uri="{FF2B5EF4-FFF2-40B4-BE49-F238E27FC236}">
-                <a16:creationId xmlns:a16="http://schemas.microsoft.com/office/drawing/2014/main" id="{C3F0F2B3-77A9-4228-959D-96F62568E6BD}"/>
+                <a16:creationId xmlns:a16="http://schemas.microsoft.com/office/drawing/2014/main" id="{41FC83A4-5DED-419C-9FEF-BA4869FA1D34}"/>
               </a:ext>
             </a:extLst>
           </p:cNvPr>
@@ -7620,7 +7712,7 @@
           <p:cNvPr id="7" name="">
             <a:extLst xmlns:a="http://schemas.openxmlformats.org/drawingml/2006/main">
               <a:ext uri="{FF2B5EF4-FFF2-40B4-BE49-F238E27FC236}">
-                <a16:creationId xmlns:a16="http://schemas.microsoft.com/office/drawing/2014/main" id="{98C1B538-851E-4668-81BC-ED4270F3F429}"/>
+                <a16:creationId xmlns:a16="http://schemas.microsoft.com/office/drawing/2014/main" id="{A6D5F5A1-0E3A-4FF2-B10F-405B152A068E}"/>
               </a:ext>
             </a:extLst>
           </p:cNvPr>
@@ -7653,7 +7745,7 @@
           <p:cNvPr id="8" name="">
             <a:extLst xmlns:a="http://schemas.openxmlformats.org/drawingml/2006/main">
               <a:ext uri="{FF2B5EF4-FFF2-40B4-BE49-F238E27FC236}">
-                <a16:creationId xmlns:a16="http://schemas.microsoft.com/office/drawing/2014/main" id="{0A0086ED-D91C-4A85-992F-68C699F84ADE}"/>
+                <a16:creationId xmlns:a16="http://schemas.microsoft.com/office/drawing/2014/main" id="{B6152F18-FAE1-452E-B3D6-F3A448B74817}"/>
               </a:ext>
             </a:extLst>
           </p:cNvPr>
@@ -7717,7 +7809,7 @@
           <p:cNvPr id="9" name="">
             <a:extLst xmlns:a="http://schemas.openxmlformats.org/drawingml/2006/main">
               <a:ext uri="{FF2B5EF4-FFF2-40B4-BE49-F238E27FC236}">
-                <a16:creationId xmlns:a16="http://schemas.microsoft.com/office/drawing/2014/main" id="{B3386FA4-7216-40FF-89E8-0BE893BAF20B}"/>
+                <a16:creationId xmlns:a16="http://schemas.microsoft.com/office/drawing/2014/main" id="{F8B6CF53-0AF6-4E02-9763-1E29F30689BC}"/>
               </a:ext>
             </a:extLst>
           </p:cNvPr>
@@ -7757,9 +7849,9 @@
                 <a:solidFill>
                   <a:srgbClr val="64748B"/>
                 </a:solidFill>
-                <a:latin typeface="Aptos"/>
-                <a:ea typeface="Aptos"/>
-                <a:cs typeface="Aptos"/>
+                <a:latin typeface="Microsoft YaHei"/>
+                <a:ea typeface="Microsoft YaHei"/>
+                <a:cs typeface="Microsoft YaHei"/>
               </a:defRPr>
             </a:pPr>
             <a:r>
@@ -7767,9 +7859,9 @@
                 <a:solidFill>
                   <a:srgbClr val="64748B"/>
                 </a:solidFill>
-                <a:latin typeface="Aptos"/>
-                <a:ea typeface="Aptos"/>
-                <a:cs typeface="Aptos"/>
+                <a:latin typeface="Microsoft YaHei"/>
+                <a:ea typeface="Microsoft YaHei"/>
+                <a:cs typeface="Microsoft YaHei"/>
               </a:rPr>
               <a:t>船厂安全知识条目</a:t>
             </a:r>
@@ -7781,7 +7873,7 @@
           <p:cNvPr id="10" name="">
             <a:extLst xmlns:a="http://schemas.openxmlformats.org/drawingml/2006/main">
               <a:ext uri="{FF2B5EF4-FFF2-40B4-BE49-F238E27FC236}">
-                <a16:creationId xmlns:a16="http://schemas.microsoft.com/office/drawing/2014/main" id="{0C617D95-6543-4E4B-B9C1-AE1F899A3D60}"/>
+                <a16:creationId xmlns:a16="http://schemas.microsoft.com/office/drawing/2014/main" id="{876058EE-9DD7-4196-AF03-12589B95B8E5}"/>
               </a:ext>
             </a:extLst>
           </p:cNvPr>
@@ -7814,7 +7906,7 @@
           <p:cNvPr id="11" name="">
             <a:extLst xmlns:a="http://schemas.openxmlformats.org/drawingml/2006/main">
               <a:ext uri="{FF2B5EF4-FFF2-40B4-BE49-F238E27FC236}">
-                <a16:creationId xmlns:a16="http://schemas.microsoft.com/office/drawing/2014/main" id="{9D415C69-7D7B-4CE2-8974-7AE21B14A8FF}"/>
+                <a16:creationId xmlns:a16="http://schemas.microsoft.com/office/drawing/2014/main" id="{01153962-89DD-4D45-9807-FA5D2FF20B73}"/>
               </a:ext>
             </a:extLst>
           </p:cNvPr>
@@ -7847,7 +7939,7 @@
           <p:cNvPr id="12" name="">
             <a:extLst xmlns:a="http://schemas.openxmlformats.org/drawingml/2006/main">
               <a:ext uri="{FF2B5EF4-FFF2-40B4-BE49-F238E27FC236}">
-                <a16:creationId xmlns:a16="http://schemas.microsoft.com/office/drawing/2014/main" id="{7F802577-D28B-4A75-9659-76EEE5F84901}"/>
+                <a16:creationId xmlns:a16="http://schemas.microsoft.com/office/drawing/2014/main" id="{FE1F1499-57EC-4D61-BEE4-BB673D1F0BBD}"/>
               </a:ext>
             </a:extLst>
           </p:cNvPr>
@@ -7911,7 +8003,7 @@
           <p:cNvPr id="13" name="">
             <a:extLst xmlns:a="http://schemas.openxmlformats.org/drawingml/2006/main">
               <a:ext uri="{FF2B5EF4-FFF2-40B4-BE49-F238E27FC236}">
-                <a16:creationId xmlns:a16="http://schemas.microsoft.com/office/drawing/2014/main" id="{436FE860-2B23-4E07-AE9C-B1C558054A25}"/>
+                <a16:creationId xmlns:a16="http://schemas.microsoft.com/office/drawing/2014/main" id="{00EA25DE-FECC-421F-9805-00FD8AAC3F2C}"/>
               </a:ext>
             </a:extLst>
           </p:cNvPr>
@@ -7951,9 +8043,9 @@
                 <a:solidFill>
                   <a:srgbClr val="64748B"/>
                 </a:solidFill>
-                <a:latin typeface="Aptos"/>
-                <a:ea typeface="Aptos"/>
-                <a:cs typeface="Aptos"/>
+                <a:latin typeface="Microsoft YaHei"/>
+                <a:ea typeface="Microsoft YaHei"/>
+                <a:cs typeface="Microsoft YaHei"/>
               </a:defRPr>
             </a:pPr>
             <a:r>
@@ -7961,9 +8053,9 @@
                 <a:solidFill>
                   <a:srgbClr val="64748B"/>
                 </a:solidFill>
-                <a:latin typeface="Aptos"/>
-                <a:ea typeface="Aptos"/>
-                <a:cs typeface="Aptos"/>
+                <a:latin typeface="Microsoft YaHei"/>
+                <a:ea typeface="Microsoft YaHei"/>
+                <a:cs typeface="Microsoft YaHei"/>
               </a:rPr>
               <a:t>代表问题 hit@1</a:t>
             </a:r>
@@ -7975,7 +8067,7 @@
           <p:cNvPr id="14" name="">
             <a:extLst xmlns:a="http://schemas.openxmlformats.org/drawingml/2006/main">
               <a:ext uri="{FF2B5EF4-FFF2-40B4-BE49-F238E27FC236}">
-                <a16:creationId xmlns:a16="http://schemas.microsoft.com/office/drawing/2014/main" id="{22440CC1-2CD8-404A-9A11-8B5521456332}"/>
+                <a16:creationId xmlns:a16="http://schemas.microsoft.com/office/drawing/2014/main" id="{3AE6788A-ACED-47D6-B6D7-1017F8BDF431}"/>
               </a:ext>
             </a:extLst>
           </p:cNvPr>
@@ -8008,7 +8100,7 @@
           <p:cNvPr id="15" name="">
             <a:extLst xmlns:a="http://schemas.openxmlformats.org/drawingml/2006/main">
               <a:ext uri="{FF2B5EF4-FFF2-40B4-BE49-F238E27FC236}">
-                <a16:creationId xmlns:a16="http://schemas.microsoft.com/office/drawing/2014/main" id="{BD4EAEA7-F591-45D9-87A8-1276CAFF5D08}"/>
+                <a16:creationId xmlns:a16="http://schemas.microsoft.com/office/drawing/2014/main" id="{54D91D27-1CE7-4BA1-A6ED-D1F7A52095E2}"/>
               </a:ext>
             </a:extLst>
           </p:cNvPr>
@@ -8041,7 +8133,7 @@
           <p:cNvPr id="16" name="">
             <a:extLst xmlns:a="http://schemas.openxmlformats.org/drawingml/2006/main">
               <a:ext uri="{FF2B5EF4-FFF2-40B4-BE49-F238E27FC236}">
-                <a16:creationId xmlns:a16="http://schemas.microsoft.com/office/drawing/2014/main" id="{CADF3118-B999-460E-A80E-3ED8C992DF70}"/>
+                <a16:creationId xmlns:a16="http://schemas.microsoft.com/office/drawing/2014/main" id="{3A0EA012-0406-472D-88D6-D5A65340D6EE}"/>
               </a:ext>
             </a:extLst>
           </p:cNvPr>
@@ -8105,7 +8197,7 @@
           <p:cNvPr id="17" name="">
             <a:extLst xmlns:a="http://schemas.openxmlformats.org/drawingml/2006/main">
               <a:ext uri="{FF2B5EF4-FFF2-40B4-BE49-F238E27FC236}">
-                <a16:creationId xmlns:a16="http://schemas.microsoft.com/office/drawing/2014/main" id="{7045A884-BC16-4BC7-B1E9-698E7CC2B6F7}"/>
+                <a16:creationId xmlns:a16="http://schemas.microsoft.com/office/drawing/2014/main" id="{81FEAD08-2C5A-4813-B908-5E0090A61F0B}"/>
               </a:ext>
             </a:extLst>
           </p:cNvPr>
@@ -8145,9 +8237,9 @@
                 <a:solidFill>
                   <a:srgbClr val="64748B"/>
                 </a:solidFill>
-                <a:latin typeface="Aptos"/>
-                <a:ea typeface="Aptos"/>
-                <a:cs typeface="Aptos"/>
+                <a:latin typeface="Microsoft YaHei"/>
+                <a:ea typeface="Microsoft YaHei"/>
+                <a:cs typeface="Microsoft YaHei"/>
               </a:defRPr>
             </a:pPr>
             <a:r>
@@ -8155,9 +8247,9 @@
                 <a:solidFill>
                   <a:srgbClr val="64748B"/>
                 </a:solidFill>
-                <a:latin typeface="Aptos"/>
-                <a:ea typeface="Aptos"/>
-                <a:cs typeface="Aptos"/>
+                <a:latin typeface="Microsoft YaHei"/>
+                <a:ea typeface="Microsoft YaHei"/>
+                <a:cs typeface="Microsoft YaHei"/>
               </a:rPr>
               <a:t>代表问题 hit@3</a:t>
             </a:r>
@@ -8169,7 +8261,7 @@
           <p:cNvPr id="18" name="">
             <a:extLst xmlns:a="http://schemas.openxmlformats.org/drawingml/2006/main">
               <a:ext uri="{FF2B5EF4-FFF2-40B4-BE49-F238E27FC236}">
-                <a16:creationId xmlns:a16="http://schemas.microsoft.com/office/drawing/2014/main" id="{505F9D18-DD5E-4FC4-8972-18D69861A530}"/>
+                <a16:creationId xmlns:a16="http://schemas.microsoft.com/office/drawing/2014/main" id="{85BFF099-9C2F-494E-9E36-BA6C1EACA74F}"/>
               </a:ext>
             </a:extLst>
           </p:cNvPr>
@@ -8202,7 +8294,7 @@
           <p:cNvPr id="19" name="">
             <a:extLst xmlns:a="http://schemas.openxmlformats.org/drawingml/2006/main">
               <a:ext uri="{FF2B5EF4-FFF2-40B4-BE49-F238E27FC236}">
-                <a16:creationId xmlns:a16="http://schemas.microsoft.com/office/drawing/2014/main" id="{EF97A1DF-98A9-4B78-969E-D7D62B26C58E}"/>
+                <a16:creationId xmlns:a16="http://schemas.microsoft.com/office/drawing/2014/main" id="{CA412429-8FBC-43F2-92AA-B608AAC4BEEF}"/>
               </a:ext>
             </a:extLst>
           </p:cNvPr>
@@ -8235,7 +8327,7 @@
           <p:cNvPr id="20" name="">
             <a:extLst xmlns:a="http://schemas.openxmlformats.org/drawingml/2006/main">
               <a:ext uri="{FF2B5EF4-FFF2-40B4-BE49-F238E27FC236}">
-                <a16:creationId xmlns:a16="http://schemas.microsoft.com/office/drawing/2014/main" id="{3E401103-B3A2-41DF-B7FE-8F0BD4868F9F}"/>
+                <a16:creationId xmlns:a16="http://schemas.microsoft.com/office/drawing/2014/main" id="{F47F902F-0C9F-45F6-808E-C24A3B7DD134}"/>
               </a:ext>
             </a:extLst>
           </p:cNvPr>
@@ -8299,7 +8391,7 @@
           <p:cNvPr id="21" name="">
             <a:extLst xmlns:a="http://schemas.openxmlformats.org/drawingml/2006/main">
               <a:ext uri="{FF2B5EF4-FFF2-40B4-BE49-F238E27FC236}">
-                <a16:creationId xmlns:a16="http://schemas.microsoft.com/office/drawing/2014/main" id="{C2B1D139-9636-418E-A0A9-8366C0C28294}"/>
+                <a16:creationId xmlns:a16="http://schemas.microsoft.com/office/drawing/2014/main" id="{48824A14-34B6-4798-BC6D-5F54656038AA}"/>
               </a:ext>
             </a:extLst>
           </p:cNvPr>
@@ -8339,9 +8431,9 @@
                 <a:solidFill>
                   <a:srgbClr val="64748B"/>
                 </a:solidFill>
-                <a:latin typeface="Aptos"/>
-                <a:ea typeface="Aptos"/>
-                <a:cs typeface="Aptos"/>
+                <a:latin typeface="Microsoft YaHei"/>
+                <a:ea typeface="Microsoft YaHei"/>
+                <a:cs typeface="Microsoft YaHei"/>
               </a:defRPr>
             </a:pPr>
             <a:r>
@@ -8349,9 +8441,9 @@
                 <a:solidFill>
                   <a:srgbClr val="64748B"/>
                 </a:solidFill>
-                <a:latin typeface="Aptos"/>
-                <a:ea typeface="Aptos"/>
-                <a:cs typeface="Aptos"/>
+                <a:latin typeface="Microsoft YaHei"/>
+                <a:ea typeface="Microsoft YaHei"/>
+                <a:cs typeface="Microsoft YaHei"/>
               </a:rPr>
               <a:t>每次回答展示证据</a:t>
             </a:r>
@@ -8363,7 +8455,7 @@
           <p:cNvPr id="22" name="">
             <a:extLst xmlns:a="http://schemas.openxmlformats.org/drawingml/2006/main">
               <a:ext uri="{FF2B5EF4-FFF2-40B4-BE49-F238E27FC236}">
-                <a16:creationId xmlns:a16="http://schemas.microsoft.com/office/drawing/2014/main" id="{6DE0C5A3-781C-4E16-88EE-DD4634DE429F}"/>
+                <a16:creationId xmlns:a16="http://schemas.microsoft.com/office/drawing/2014/main" id="{BEF461CF-F468-41CB-9D57-009C3D5E7CC5}"/>
               </a:ext>
             </a:extLst>
           </p:cNvPr>
@@ -8396,7 +8488,7 @@
           <p:cNvPr id="23" name="">
             <a:extLst xmlns:a="http://schemas.openxmlformats.org/drawingml/2006/main">
               <a:ext uri="{FF2B5EF4-FFF2-40B4-BE49-F238E27FC236}">
-                <a16:creationId xmlns:a16="http://schemas.microsoft.com/office/drawing/2014/main" id="{BC1E8FB7-EF86-4066-B792-664A6FDC09B5}"/>
+                <a16:creationId xmlns:a16="http://schemas.microsoft.com/office/drawing/2014/main" id="{981C0669-5F3D-41B5-A445-5B7382031778}"/>
               </a:ext>
             </a:extLst>
           </p:cNvPr>
@@ -8429,7 +8521,7 @@
           <p:cNvPr id="24" name="">
             <a:extLst xmlns:a="http://schemas.openxmlformats.org/drawingml/2006/main">
               <a:ext uri="{FF2B5EF4-FFF2-40B4-BE49-F238E27FC236}">
-                <a16:creationId xmlns:a16="http://schemas.microsoft.com/office/drawing/2014/main" id="{7953F120-AC9F-420C-8BB2-C7ABD6E49AA8}"/>
+                <a16:creationId xmlns:a16="http://schemas.microsoft.com/office/drawing/2014/main" id="{CF34FFC6-ADF9-4DAB-91B0-7E22C0F88CC7}"/>
               </a:ext>
             </a:extLst>
           </p:cNvPr>
@@ -8469,9 +8561,9 @@
                 <a:solidFill>
                   <a:srgbClr val="121826"/>
                 </a:solidFill>
-                <a:latin typeface="Aptos"/>
-                <a:ea typeface="Aptos"/>
-                <a:cs typeface="Aptos"/>
+                <a:latin typeface="Microsoft YaHei"/>
+                <a:ea typeface="Microsoft YaHei"/>
+                <a:cs typeface="Microsoft YaHei"/>
               </a:defRPr>
             </a:pPr>
             <a:r>
@@ -8479,9 +8571,9 @@
                 <a:solidFill>
                   <a:srgbClr val="121826"/>
                 </a:solidFill>
-                <a:latin typeface="Aptos"/>
-                <a:ea typeface="Aptos"/>
-                <a:cs typeface="Aptos"/>
+                <a:latin typeface="Microsoft YaHei"/>
+                <a:ea typeface="Microsoft YaHei"/>
+                <a:cs typeface="Microsoft YaHei"/>
               </a:rPr>
               <a:t>覆盖主题：密闭舱室、动火、高处焊接、船体分段吊装、舾装管路试压、压载水舱检修、PPE、应急处置、术语识别。</a:t>
             </a:r>
@@ -8493,7 +8585,7 @@
           <p:cNvPr id="25" name="">
             <a:extLst xmlns:a="http://schemas.openxmlformats.org/drawingml/2006/main">
               <a:ext uri="{FF2B5EF4-FFF2-40B4-BE49-F238E27FC236}">
-                <a16:creationId xmlns:a16="http://schemas.microsoft.com/office/drawing/2014/main" id="{0623BE77-5EB6-4D90-8B06-CA88AC066284}"/>
+                <a16:creationId xmlns:a16="http://schemas.microsoft.com/office/drawing/2014/main" id="{62CD6408-C1A6-4A0B-9F5E-716050C5EB6D}"/>
               </a:ext>
             </a:extLst>
           </p:cNvPr>
@@ -8526,7 +8618,7 @@
           <p:cNvPr id="26" name="">
             <a:extLst xmlns:a="http://schemas.openxmlformats.org/drawingml/2006/main">
               <a:ext uri="{FF2B5EF4-FFF2-40B4-BE49-F238E27FC236}">
-                <a16:creationId xmlns:a16="http://schemas.microsoft.com/office/drawing/2014/main" id="{A7D0722F-8654-40DA-878E-776ED4544120}"/>
+                <a16:creationId xmlns:a16="http://schemas.microsoft.com/office/drawing/2014/main" id="{22B5FC35-837F-43B8-A1E4-EE581126E02A}"/>
               </a:ext>
             </a:extLst>
           </p:cNvPr>
@@ -8559,7 +8651,7 @@
           <p:cNvPr id="27" name="">
             <a:extLst xmlns:a="http://schemas.openxmlformats.org/drawingml/2006/main">
               <a:ext uri="{FF2B5EF4-FFF2-40B4-BE49-F238E27FC236}">
-                <a16:creationId xmlns:a16="http://schemas.microsoft.com/office/drawing/2014/main" id="{257310C4-1B9F-475A-8BFD-1D580EA0A847}"/>
+                <a16:creationId xmlns:a16="http://schemas.microsoft.com/office/drawing/2014/main" id="{E88C31FA-AEF9-458C-AF93-0E15B8E3C62F}"/>
               </a:ext>
             </a:extLst>
           </p:cNvPr>
@@ -8599,9 +8691,9 @@
                 <a:solidFill>
                   <a:srgbClr val="121826"/>
                 </a:solidFill>
-                <a:latin typeface="Aptos"/>
-                <a:ea typeface="Aptos"/>
-                <a:cs typeface="Aptos"/>
+                <a:latin typeface="Microsoft YaHei"/>
+                <a:ea typeface="Microsoft YaHei"/>
+                <a:cs typeface="Microsoft YaHei"/>
               </a:defRPr>
             </a:pPr>
             <a:r>
@@ -8609,9 +8701,9 @@
                 <a:solidFill>
                   <a:srgbClr val="121826"/>
                 </a:solidFill>
-                <a:latin typeface="Aptos"/>
-                <a:ea typeface="Aptos"/>
-                <a:cs typeface="Aptos"/>
+                <a:latin typeface="Microsoft YaHei"/>
+                <a:ea typeface="Microsoft YaHei"/>
+                <a:cs typeface="Microsoft YaHei"/>
               </a:rPr>
               <a:t>证据展示：每次回答显示 top-k 知识条目、检索分数和门控标签，便于老师现场追问时解释系统行为。</a:t>
             </a:r>
@@ -8623,7 +8715,7 @@
           <p:cNvPr id="28" name="">
             <a:extLst xmlns:a="http://schemas.openxmlformats.org/drawingml/2006/main">
               <a:ext uri="{FF2B5EF4-FFF2-40B4-BE49-F238E27FC236}">
-                <a16:creationId xmlns:a16="http://schemas.microsoft.com/office/drawing/2014/main" id="{7DDD8012-5B64-441B-BFCD-77916307056C}"/>
+                <a16:creationId xmlns:a16="http://schemas.microsoft.com/office/drawing/2014/main" id="{6C695AD1-465D-45D9-9342-661E3CD0AB06}"/>
               </a:ext>
             </a:extLst>
           </p:cNvPr>
@@ -8663,9 +8755,9 @@
                 <a:solidFill>
                   <a:srgbClr val="64748B"/>
                 </a:solidFill>
-                <a:latin typeface="Aptos"/>
-                <a:ea typeface="Aptos"/>
-                <a:cs typeface="Aptos"/>
+                <a:latin typeface="Microsoft YaHei"/>
+                <a:ea typeface="Microsoft YaHei"/>
+                <a:cs typeface="Microsoft YaHei"/>
               </a:defRPr>
             </a:pPr>
             <a:r>
@@ -8673,9 +8765,9 @@
                 <a:solidFill>
                   <a:srgbClr val="64748B"/>
                 </a:solidFill>
-                <a:latin typeface="Aptos"/>
-                <a:ea typeface="Aptos"/>
-                <a:cs typeface="Aptos"/>
+                <a:latin typeface="Microsoft YaHei"/>
+                <a:ea typeface="Microsoft YaHei"/>
+                <a:cs typeface="Microsoft YaHei"/>
               </a:rPr>
               <a:t>ShipVoice | 信息安全基础 A2</a:t>
             </a:r>
@@ -8687,7 +8779,7 @@
           <p:cNvPr id="29" name="">
             <a:extLst xmlns:a="http://schemas.openxmlformats.org/drawingml/2006/main">
               <a:ext uri="{FF2B5EF4-FFF2-40B4-BE49-F238E27FC236}">
-                <a16:creationId xmlns:a16="http://schemas.microsoft.com/office/drawing/2014/main" id="{A09511DC-901E-43A8-AB47-B48FADE9F1B8}"/>
+                <a16:creationId xmlns:a16="http://schemas.microsoft.com/office/drawing/2014/main" id="{9AD348EE-EAF5-45A5-956B-A9E5579C7A39}"/>
               </a:ext>
             </a:extLst>
           </p:cNvPr>
@@ -8727,9 +8819,9 @@
                 <a:solidFill>
                   <a:srgbClr val="64748B"/>
                 </a:solidFill>
-                <a:latin typeface="Aptos"/>
-                <a:ea typeface="Aptos"/>
-                <a:cs typeface="Aptos"/>
+                <a:latin typeface="Microsoft YaHei"/>
+                <a:ea typeface="Microsoft YaHei"/>
+                <a:cs typeface="Microsoft YaHei"/>
               </a:defRPr>
             </a:pPr>
             <a:r>
@@ -8737,9 +8829,9 @@
                 <a:solidFill>
                   <a:srgbClr val="64748B"/>
                 </a:solidFill>
-                <a:latin typeface="Aptos"/>
-                <a:ea typeface="Aptos"/>
-                <a:cs typeface="Aptos"/>
+                <a:latin typeface="Microsoft YaHei"/>
+                <a:ea typeface="Microsoft YaHei"/>
+                <a:cs typeface="Microsoft YaHei"/>
               </a:rPr>
               <a:t>04</a:t>
             </a:r>
@@ -8749,7 +8841,7 @@
     </p:spTree>
     <p:extLst>
       <p:ext uri="{BB962C8B-B14F-4D97-AF65-F5344CB8AC3E}">
-        <p14:creationId xmlns:p14="http://schemas.microsoft.com/office/powerpoint/2010/main" val="1057928860"/>
+        <p14:creationId xmlns:p14="http://schemas.microsoft.com/office/powerpoint/2010/main" val="1214952480"/>
       </p:ext>
     </p:extLst>
   </p:cSld>
@@ -8773,7 +8865,7 @@
           <p:cNvPr id="1" name="">
             <a:extLst xmlns:a="http://schemas.openxmlformats.org/drawingml/2006/main">
               <a:ext uri="{FF2B5EF4-FFF2-40B4-BE49-F238E27FC236}">
-                <a16:creationId xmlns:a16="http://schemas.microsoft.com/office/drawing/2014/main" id="{232808C4-0F37-43B3-85A5-C4CBDB03C628}"/>
+                <a16:creationId xmlns:a16="http://schemas.microsoft.com/office/drawing/2014/main" id="{C0589AF2-053E-4EE9-A864-7094C83E55CD}"/>
               </a:ext>
             </a:extLst>
           </p:cNvPr>
@@ -8806,7 +8898,7 @@
           <p:cNvPr id="2" name="">
             <a:extLst xmlns:a="http://schemas.openxmlformats.org/drawingml/2006/main">
               <a:ext uri="{FF2B5EF4-FFF2-40B4-BE49-F238E27FC236}">
-                <a16:creationId xmlns:a16="http://schemas.microsoft.com/office/drawing/2014/main" id="{E48BFF33-AE85-41EB-88B9-D30515FC4A4C}"/>
+                <a16:creationId xmlns:a16="http://schemas.microsoft.com/office/drawing/2014/main" id="{B9E1E9FE-62D3-436E-92E8-B4D198D40840}"/>
               </a:ext>
             </a:extLst>
           </p:cNvPr>
@@ -8839,7 +8931,7 @@
           <p:cNvPr id="3" name="">
             <a:extLst xmlns:a="http://schemas.openxmlformats.org/drawingml/2006/main">
               <a:ext uri="{FF2B5EF4-FFF2-40B4-BE49-F238E27FC236}">
-                <a16:creationId xmlns:a16="http://schemas.microsoft.com/office/drawing/2014/main" id="{AD1D930A-8855-4C66-9025-634AD4D5C83C}"/>
+                <a16:creationId xmlns:a16="http://schemas.microsoft.com/office/drawing/2014/main" id="{79A19806-2829-4E2B-8B6B-3B860DCA54E7}"/>
               </a:ext>
             </a:extLst>
           </p:cNvPr>
@@ -8879,9 +8971,9 @@
                 <a:solidFill>
                   <a:srgbClr val="2563EB"/>
                 </a:solidFill>
-                <a:latin typeface="Aptos"/>
-                <a:ea typeface="Aptos"/>
-                <a:cs typeface="Aptos"/>
+                <a:latin typeface="Microsoft YaHei"/>
+                <a:ea typeface="Microsoft YaHei"/>
+                <a:cs typeface="Microsoft YaHei"/>
               </a:defRPr>
             </a:pPr>
             <a:r>
@@ -8889,9 +8981,9 @@
                 <a:solidFill>
                   <a:srgbClr val="2563EB"/>
                 </a:solidFill>
-                <a:latin typeface="Aptos"/>
-                <a:ea typeface="Aptos"/>
-                <a:cs typeface="Aptos"/>
+                <a:latin typeface="Microsoft YaHei"/>
+                <a:ea typeface="Microsoft YaHei"/>
+                <a:cs typeface="Microsoft YaHei"/>
               </a:rPr>
               <a:t>SAFETY GATE</a:t>
             </a:r>
@@ -8903,7 +8995,7 @@
           <p:cNvPr id="4" name="">
             <a:extLst xmlns:a="http://schemas.openxmlformats.org/drawingml/2006/main">
               <a:ext uri="{FF2B5EF4-FFF2-40B4-BE49-F238E27FC236}">
-                <a16:creationId xmlns:a16="http://schemas.microsoft.com/office/drawing/2014/main" id="{C270960C-290C-4BC2-BE86-70D86EF63FC3}"/>
+                <a16:creationId xmlns:a16="http://schemas.microsoft.com/office/drawing/2014/main" id="{7B5DA6DC-21DE-4FBF-A127-E7D8F75EB9CC}"/>
               </a:ext>
             </a:extLst>
           </p:cNvPr>
@@ -8967,7 +9059,7 @@
           <p:cNvPr id="5" name="">
             <a:extLst xmlns:a="http://schemas.openxmlformats.org/drawingml/2006/main">
               <a:ext uri="{FF2B5EF4-FFF2-40B4-BE49-F238E27FC236}">
-                <a16:creationId xmlns:a16="http://schemas.microsoft.com/office/drawing/2014/main" id="{9073954C-6C97-4422-B3E6-529CCBBB2C1D}"/>
+                <a16:creationId xmlns:a16="http://schemas.microsoft.com/office/drawing/2014/main" id="{DD8A237C-9944-4972-B7B2-9FB22822BAA1}"/>
               </a:ext>
             </a:extLst>
           </p:cNvPr>
@@ -9007,9 +9099,9 @@
                 <a:solidFill>
                   <a:srgbClr val="64748B"/>
                 </a:solidFill>
-                <a:latin typeface="Aptos"/>
-                <a:ea typeface="Aptos"/>
-                <a:cs typeface="Aptos"/>
+                <a:latin typeface="Microsoft YaHei"/>
+                <a:ea typeface="Microsoft YaHei"/>
+                <a:cs typeface="Microsoft YaHei"/>
               </a:defRPr>
             </a:pPr>
             <a:r>
@@ -9017,9 +9109,9 @@
                 <a:solidFill>
                   <a:srgbClr val="64748B"/>
                 </a:solidFill>
-                <a:latin typeface="Aptos"/>
-                <a:ea typeface="Aptos"/>
-                <a:cs typeface="Aptos"/>
+                <a:latin typeface="Microsoft YaHei"/>
+                <a:ea typeface="Microsoft YaHei"/>
+                <a:cs typeface="Microsoft YaHei"/>
               </a:rPr>
               <a:t>55 条 benchmark 验证离题、违规绕行、提示注入和边界应急。</a:t>
             </a:r>
@@ -9031,7 +9123,7 @@
           <p:cNvPr id="6" name="">
             <a:extLst xmlns:a="http://schemas.openxmlformats.org/drawingml/2006/main">
               <a:ext uri="{FF2B5EF4-FFF2-40B4-BE49-F238E27FC236}">
-                <a16:creationId xmlns:a16="http://schemas.microsoft.com/office/drawing/2014/main" id="{D6E91ABA-78C5-4D0D-8538-9C914B503D0B}"/>
+                <a16:creationId xmlns:a16="http://schemas.microsoft.com/office/drawing/2014/main" id="{0090D317-8B1B-48DC-97CB-14EB913E4AF7}"/>
               </a:ext>
             </a:extLst>
           </p:cNvPr>
@@ -9064,7 +9156,7 @@
           <p:cNvPr id="7" name="">
             <a:extLst xmlns:a="http://schemas.openxmlformats.org/drawingml/2006/main">
               <a:ext uri="{FF2B5EF4-FFF2-40B4-BE49-F238E27FC236}">
-                <a16:creationId xmlns:a16="http://schemas.microsoft.com/office/drawing/2014/main" id="{4DED3446-5D04-4186-9F59-57B5CAEF4730}"/>
+                <a16:creationId xmlns:a16="http://schemas.microsoft.com/office/drawing/2014/main" id="{E8F25F46-2EC2-4F9E-894D-8C3DD1A5DD8E}"/>
               </a:ext>
             </a:extLst>
           </p:cNvPr>
@@ -9104,9 +9196,9 @@
                 <a:solidFill>
                   <a:srgbClr val="F59E0B"/>
                 </a:solidFill>
-                <a:latin typeface="Aptos"/>
-                <a:ea typeface="Aptos"/>
-                <a:cs typeface="Aptos"/>
+                <a:latin typeface="Microsoft YaHei"/>
+                <a:ea typeface="Microsoft YaHei"/>
+                <a:cs typeface="Microsoft YaHei"/>
               </a:defRPr>
             </a:pPr>
             <a:r>
@@ -9114,9 +9206,9 @@
                 <a:solidFill>
                   <a:srgbClr val="F59E0B"/>
                 </a:solidFill>
-                <a:latin typeface="Aptos"/>
-                <a:ea typeface="Aptos"/>
-                <a:cs typeface="Aptos"/>
+                <a:latin typeface="Microsoft YaHei"/>
+                <a:ea typeface="Microsoft YaHei"/>
+                <a:cs typeface="Microsoft YaHei"/>
               </a:rPr>
               <a:t>off-domain</a:t>
             </a:r>
@@ -9128,7 +9220,7 @@
           <p:cNvPr id="8" name="">
             <a:extLst xmlns:a="http://schemas.openxmlformats.org/drawingml/2006/main">
               <a:ext uri="{FF2B5EF4-FFF2-40B4-BE49-F238E27FC236}">
-                <a16:creationId xmlns:a16="http://schemas.microsoft.com/office/drawing/2014/main" id="{3041C4BD-3EE5-4A86-A983-DBDF36DA5F68}"/>
+                <a16:creationId xmlns:a16="http://schemas.microsoft.com/office/drawing/2014/main" id="{80324B8A-521B-4F32-BC9F-899B0CD7BA68}"/>
               </a:ext>
             </a:extLst>
           </p:cNvPr>
@@ -9168,9 +9260,9 @@
                 <a:solidFill>
                   <a:srgbClr val="121826"/>
                 </a:solidFill>
-                <a:latin typeface="Aptos"/>
-                <a:ea typeface="Aptos"/>
-                <a:cs typeface="Aptos"/>
+                <a:latin typeface="Microsoft YaHei"/>
+                <a:ea typeface="Microsoft YaHei"/>
+                <a:cs typeface="Microsoft YaHei"/>
               </a:defRPr>
             </a:pPr>
             <a:r>
@@ -9178,9 +9270,9 @@
                 <a:solidFill>
                   <a:srgbClr val="121826"/>
                 </a:solidFill>
-                <a:latin typeface="Aptos"/>
-                <a:ea typeface="Aptos"/>
-                <a:cs typeface="Aptos"/>
+                <a:latin typeface="Microsoft YaHei"/>
+                <a:ea typeface="Microsoft YaHei"/>
+                <a:cs typeface="Microsoft YaHei"/>
               </a:rPr>
               <a:t>股票投资等非船厂安全问题</a:t>
             </a:r>
@@ -9192,7 +9284,7 @@
           <p:cNvPr id="9" name="">
             <a:extLst xmlns:a="http://schemas.openxmlformats.org/drawingml/2006/main">
               <a:ext uri="{FF2B5EF4-FFF2-40B4-BE49-F238E27FC236}">
-                <a16:creationId xmlns:a16="http://schemas.microsoft.com/office/drawing/2014/main" id="{8D240082-2F13-45BB-944E-292385BD6569}"/>
+                <a16:creationId xmlns:a16="http://schemas.microsoft.com/office/drawing/2014/main" id="{FF9D15D0-9C57-47EC-8632-3A2C2C3AECC3}"/>
               </a:ext>
             </a:extLst>
           </p:cNvPr>
@@ -9232,9 +9324,9 @@
                 <a:solidFill>
                   <a:srgbClr val="F59E0B"/>
                 </a:solidFill>
-                <a:latin typeface="Aptos"/>
-                <a:ea typeface="Aptos"/>
-                <a:cs typeface="Aptos"/>
+                <a:latin typeface="Microsoft YaHei"/>
+                <a:ea typeface="Microsoft YaHei"/>
+                <a:cs typeface="Microsoft YaHei"/>
               </a:defRPr>
             </a:pPr>
             <a:r>
@@ -9242,9 +9334,9 @@
                 <a:solidFill>
                   <a:srgbClr val="F59E0B"/>
                 </a:solidFill>
-                <a:latin typeface="Aptos"/>
-                <a:ea typeface="Aptos"/>
-                <a:cs typeface="Aptos"/>
+                <a:latin typeface="Microsoft YaHei"/>
+                <a:ea typeface="Microsoft YaHei"/>
+                <a:cs typeface="Microsoft YaHei"/>
               </a:rPr>
               <a:t>短路拒答</a:t>
             </a:r>
@@ -9256,7 +9348,7 @@
           <p:cNvPr id="10" name="">
             <a:extLst xmlns:a="http://schemas.openxmlformats.org/drawingml/2006/main">
               <a:ext uri="{FF2B5EF4-FFF2-40B4-BE49-F238E27FC236}">
-                <a16:creationId xmlns:a16="http://schemas.microsoft.com/office/drawing/2014/main" id="{F9614670-1572-4D2A-927F-F438B6CB695A}"/>
+                <a16:creationId xmlns:a16="http://schemas.microsoft.com/office/drawing/2014/main" id="{2DBAF284-02D5-49B1-B7C6-8782B70E96CE}"/>
               </a:ext>
             </a:extLst>
           </p:cNvPr>
@@ -9289,7 +9381,7 @@
           <p:cNvPr id="11" name="">
             <a:extLst xmlns:a="http://schemas.openxmlformats.org/drawingml/2006/main">
               <a:ext uri="{FF2B5EF4-FFF2-40B4-BE49-F238E27FC236}">
-                <a16:creationId xmlns:a16="http://schemas.microsoft.com/office/drawing/2014/main" id="{99C139B0-BBB5-4125-8C04-1629E3447573}"/>
+                <a16:creationId xmlns:a16="http://schemas.microsoft.com/office/drawing/2014/main" id="{921FAD01-33A2-4E7E-8182-DEA98628EA3E}"/>
               </a:ext>
             </a:extLst>
           </p:cNvPr>
@@ -9322,7 +9414,7 @@
           <p:cNvPr id="12" name="">
             <a:extLst xmlns:a="http://schemas.openxmlformats.org/drawingml/2006/main">
               <a:ext uri="{FF2B5EF4-FFF2-40B4-BE49-F238E27FC236}">
-                <a16:creationId xmlns:a16="http://schemas.microsoft.com/office/drawing/2014/main" id="{DC2CE275-1831-41D0-85CD-0432956C45CA}"/>
+                <a16:creationId xmlns:a16="http://schemas.microsoft.com/office/drawing/2014/main" id="{D1ABBECC-1D3F-4994-944F-C9EEBE5654CF}"/>
               </a:ext>
             </a:extLst>
           </p:cNvPr>
@@ -9362,9 +9454,9 @@
                 <a:solidFill>
                   <a:srgbClr val="DC2626"/>
                 </a:solidFill>
-                <a:latin typeface="Aptos"/>
-                <a:ea typeface="Aptos"/>
-                <a:cs typeface="Aptos"/>
+                <a:latin typeface="Microsoft YaHei"/>
+                <a:ea typeface="Microsoft YaHei"/>
+                <a:cs typeface="Microsoft YaHei"/>
               </a:defRPr>
             </a:pPr>
             <a:r>
@@ -9372,9 +9464,9 @@
                 <a:solidFill>
                   <a:srgbClr val="DC2626"/>
                 </a:solidFill>
-                <a:latin typeface="Aptos"/>
-                <a:ea typeface="Aptos"/>
-                <a:cs typeface="Aptos"/>
+                <a:latin typeface="Microsoft YaHei"/>
+                <a:ea typeface="Microsoft YaHei"/>
+                <a:cs typeface="Microsoft YaHei"/>
               </a:rPr>
               <a:t>unsafe request</a:t>
             </a:r>
@@ -9386,7 +9478,7 @@
           <p:cNvPr id="13" name="">
             <a:extLst xmlns:a="http://schemas.openxmlformats.org/drawingml/2006/main">
               <a:ext uri="{FF2B5EF4-FFF2-40B4-BE49-F238E27FC236}">
-                <a16:creationId xmlns:a16="http://schemas.microsoft.com/office/drawing/2014/main" id="{903038C5-380E-4E72-9469-623A67AAF96F}"/>
+                <a16:creationId xmlns:a16="http://schemas.microsoft.com/office/drawing/2014/main" id="{33649AB0-85BB-4685-826C-6BAD59B674FA}"/>
               </a:ext>
             </a:extLst>
           </p:cNvPr>
@@ -9426,9 +9518,9 @@
                 <a:solidFill>
                   <a:srgbClr val="121826"/>
                 </a:solidFill>
-                <a:latin typeface="Aptos"/>
-                <a:ea typeface="Aptos"/>
-                <a:cs typeface="Aptos"/>
+                <a:latin typeface="Microsoft YaHei"/>
+                <a:ea typeface="Microsoft YaHei"/>
+                <a:cs typeface="Microsoft YaHei"/>
               </a:defRPr>
             </a:pPr>
             <a:r>
@@ -9436,9 +9528,9 @@
                 <a:solidFill>
                   <a:srgbClr val="121826"/>
                 </a:solidFill>
-                <a:latin typeface="Aptos"/>
-                <a:ea typeface="Aptos"/>
-                <a:cs typeface="Aptos"/>
+                <a:latin typeface="Microsoft YaHei"/>
+                <a:ea typeface="Microsoft YaHei"/>
+                <a:cs typeface="Microsoft YaHei"/>
               </a:rPr>
               <a:t>绕过检查、跳过审批、破坏流程</a:t>
             </a:r>
@@ -9450,7 +9542,7 @@
           <p:cNvPr id="14" name="">
             <a:extLst xmlns:a="http://schemas.openxmlformats.org/drawingml/2006/main">
               <a:ext uri="{FF2B5EF4-FFF2-40B4-BE49-F238E27FC236}">
-                <a16:creationId xmlns:a16="http://schemas.microsoft.com/office/drawing/2014/main" id="{84030AF8-0B57-41AD-865E-8BE44940B671}"/>
+                <a16:creationId xmlns:a16="http://schemas.microsoft.com/office/drawing/2014/main" id="{C0CD64D6-0A6C-42FE-849B-1F8578651386}"/>
               </a:ext>
             </a:extLst>
           </p:cNvPr>
@@ -9490,9 +9582,9 @@
                 <a:solidFill>
                   <a:srgbClr val="DC2626"/>
                 </a:solidFill>
-                <a:latin typeface="Aptos"/>
-                <a:ea typeface="Aptos"/>
-                <a:cs typeface="Aptos"/>
+                <a:latin typeface="Microsoft YaHei"/>
+                <a:ea typeface="Microsoft YaHei"/>
+                <a:cs typeface="Microsoft YaHei"/>
               </a:defRPr>
             </a:pPr>
             <a:r>
@@ -9500,9 +9592,9 @@
                 <a:solidFill>
                   <a:srgbClr val="DC2626"/>
                 </a:solidFill>
-                <a:latin typeface="Aptos"/>
-                <a:ea typeface="Aptos"/>
-                <a:cs typeface="Aptos"/>
+                <a:latin typeface="Microsoft YaHei"/>
+                <a:ea typeface="Microsoft YaHei"/>
+                <a:cs typeface="Microsoft YaHei"/>
               </a:rPr>
               <a:t>拒绝并重申规范</a:t>
             </a:r>
@@ -9514,7 +9606,7 @@
           <p:cNvPr id="15" name="">
             <a:extLst xmlns:a="http://schemas.openxmlformats.org/drawingml/2006/main">
               <a:ext uri="{FF2B5EF4-FFF2-40B4-BE49-F238E27FC236}">
-                <a16:creationId xmlns:a16="http://schemas.microsoft.com/office/drawing/2014/main" id="{50253347-615F-4D6E-84F2-E2DFA94151A1}"/>
+                <a16:creationId xmlns:a16="http://schemas.microsoft.com/office/drawing/2014/main" id="{431034D1-31EC-4CD0-94CD-E863B4988FFB}"/>
               </a:ext>
             </a:extLst>
           </p:cNvPr>
@@ -9547,7 +9639,7 @@
           <p:cNvPr id="16" name="">
             <a:extLst xmlns:a="http://schemas.openxmlformats.org/drawingml/2006/main">
               <a:ext uri="{FF2B5EF4-FFF2-40B4-BE49-F238E27FC236}">
-                <a16:creationId xmlns:a16="http://schemas.microsoft.com/office/drawing/2014/main" id="{13B8D82A-78B9-4545-8427-624F6AE3391F}"/>
+                <a16:creationId xmlns:a16="http://schemas.microsoft.com/office/drawing/2014/main" id="{FBA95EFD-6825-4355-9836-36F73EA4170B}"/>
               </a:ext>
             </a:extLst>
           </p:cNvPr>
@@ -9580,7 +9672,7 @@
           <p:cNvPr id="17" name="">
             <a:extLst xmlns:a="http://schemas.openxmlformats.org/drawingml/2006/main">
               <a:ext uri="{FF2B5EF4-FFF2-40B4-BE49-F238E27FC236}">
-                <a16:creationId xmlns:a16="http://schemas.microsoft.com/office/drawing/2014/main" id="{C2F6B7EE-D26A-4273-9BAF-802979D8017D}"/>
+                <a16:creationId xmlns:a16="http://schemas.microsoft.com/office/drawing/2014/main" id="{F634A5AC-3EFD-4200-8670-285062470CFF}"/>
               </a:ext>
             </a:extLst>
           </p:cNvPr>
@@ -9620,9 +9712,9 @@
                 <a:solidFill>
                   <a:srgbClr val="DC2626"/>
                 </a:solidFill>
-                <a:latin typeface="Aptos"/>
-                <a:ea typeface="Aptos"/>
-                <a:cs typeface="Aptos"/>
+                <a:latin typeface="Microsoft YaHei"/>
+                <a:ea typeface="Microsoft YaHei"/>
+                <a:cs typeface="Microsoft YaHei"/>
               </a:defRPr>
             </a:pPr>
             <a:r>
@@ -9630,9 +9722,9 @@
                 <a:solidFill>
                   <a:srgbClr val="DC2626"/>
                 </a:solidFill>
-                <a:latin typeface="Aptos"/>
-                <a:ea typeface="Aptos"/>
-                <a:cs typeface="Aptos"/>
+                <a:latin typeface="Microsoft YaHei"/>
+                <a:ea typeface="Microsoft YaHei"/>
+                <a:cs typeface="Microsoft YaHei"/>
               </a:rPr>
               <a:t>prompt injection</a:t>
             </a:r>
@@ -9644,7 +9736,7 @@
           <p:cNvPr id="18" name="">
             <a:extLst xmlns:a="http://schemas.openxmlformats.org/drawingml/2006/main">
               <a:ext uri="{FF2B5EF4-FFF2-40B4-BE49-F238E27FC236}">
-                <a16:creationId xmlns:a16="http://schemas.microsoft.com/office/drawing/2014/main" id="{1FD1C874-5B08-4861-A6A9-02F272AA42A6}"/>
+                <a16:creationId xmlns:a16="http://schemas.microsoft.com/office/drawing/2014/main" id="{06695016-9729-4B7C-B857-4257CB792306}"/>
               </a:ext>
             </a:extLst>
           </p:cNvPr>
@@ -9684,9 +9776,9 @@
                 <a:solidFill>
                   <a:srgbClr val="121826"/>
                 </a:solidFill>
-                <a:latin typeface="Aptos"/>
-                <a:ea typeface="Aptos"/>
-                <a:cs typeface="Aptos"/>
+                <a:latin typeface="Microsoft YaHei"/>
+                <a:ea typeface="Microsoft YaHei"/>
+                <a:cs typeface="Microsoft YaHei"/>
               </a:defRPr>
             </a:pPr>
             <a:r>
@@ -9694,9 +9786,9 @@
                 <a:solidFill>
                   <a:srgbClr val="121826"/>
                 </a:solidFill>
-                <a:latin typeface="Aptos"/>
-                <a:ea typeface="Aptos"/>
-                <a:cs typeface="Aptos"/>
+                <a:latin typeface="Microsoft YaHei"/>
+                <a:ea typeface="Microsoft YaHei"/>
+                <a:cs typeface="Microsoft YaHei"/>
               </a:rPr>
               <a:t>要求忽略安全规则或规避审批</a:t>
             </a:r>
@@ -9708,7 +9800,7 @@
           <p:cNvPr id="19" name="">
             <a:extLst xmlns:a="http://schemas.openxmlformats.org/drawingml/2006/main">
               <a:ext uri="{FF2B5EF4-FFF2-40B4-BE49-F238E27FC236}">
-                <a16:creationId xmlns:a16="http://schemas.microsoft.com/office/drawing/2014/main" id="{961EAD2E-8024-40CB-9740-D8996C3F69C5}"/>
+                <a16:creationId xmlns:a16="http://schemas.microsoft.com/office/drawing/2014/main" id="{41AFE8B5-D8D6-4126-90D6-574F5FB9BD88}"/>
               </a:ext>
             </a:extLst>
           </p:cNvPr>
@@ -9748,9 +9840,9 @@
                 <a:solidFill>
                   <a:srgbClr val="DC2626"/>
                 </a:solidFill>
-                <a:latin typeface="Aptos"/>
-                <a:ea typeface="Aptos"/>
-                <a:cs typeface="Aptos"/>
+                <a:latin typeface="Microsoft YaHei"/>
+                <a:ea typeface="Microsoft YaHei"/>
+                <a:cs typeface="Microsoft YaHei"/>
               </a:defRPr>
             </a:pPr>
             <a:r>
@@ -9758,9 +9850,9 @@
                 <a:solidFill>
                   <a:srgbClr val="DC2626"/>
                 </a:solidFill>
-                <a:latin typeface="Aptos"/>
-                <a:ea typeface="Aptos"/>
-                <a:cs typeface="Aptos"/>
+                <a:latin typeface="Microsoft YaHei"/>
+                <a:ea typeface="Microsoft YaHei"/>
+                <a:cs typeface="Microsoft YaHei"/>
               </a:rPr>
               <a:t>不服从恶意指令</a:t>
             </a:r>
@@ -9772,7 +9864,7 @@
           <p:cNvPr id="20" name="">
             <a:extLst xmlns:a="http://schemas.openxmlformats.org/drawingml/2006/main">
               <a:ext uri="{FF2B5EF4-FFF2-40B4-BE49-F238E27FC236}">
-                <a16:creationId xmlns:a16="http://schemas.microsoft.com/office/drawing/2014/main" id="{FA1BBD14-2758-46FD-AA1F-E864C9EB3214}"/>
+                <a16:creationId xmlns:a16="http://schemas.microsoft.com/office/drawing/2014/main" id="{06C54B7D-D96A-4FDF-A261-F1AB98347F0B}"/>
               </a:ext>
             </a:extLst>
           </p:cNvPr>
@@ -9805,7 +9897,7 @@
           <p:cNvPr id="21" name="">
             <a:extLst xmlns:a="http://schemas.openxmlformats.org/drawingml/2006/main">
               <a:ext uri="{FF2B5EF4-FFF2-40B4-BE49-F238E27FC236}">
-                <a16:creationId xmlns:a16="http://schemas.microsoft.com/office/drawing/2014/main" id="{08E8CC3B-591B-4A51-A6DD-0863A7545E7A}"/>
+                <a16:creationId xmlns:a16="http://schemas.microsoft.com/office/drawing/2014/main" id="{4BCFFA52-52E3-4DC4-8545-15CAAC4EABC4}"/>
               </a:ext>
             </a:extLst>
           </p:cNvPr>
@@ -9838,7 +9930,7 @@
           <p:cNvPr id="22" name="">
             <a:extLst xmlns:a="http://schemas.openxmlformats.org/drawingml/2006/main">
               <a:ext uri="{FF2B5EF4-FFF2-40B4-BE49-F238E27FC236}">
-                <a16:creationId xmlns:a16="http://schemas.microsoft.com/office/drawing/2014/main" id="{8681BF33-69EB-494A-99C0-42714612118D}"/>
+                <a16:creationId xmlns:a16="http://schemas.microsoft.com/office/drawing/2014/main" id="{383F95DE-A9E1-4E0E-89C7-6CD506A01B6C}"/>
               </a:ext>
             </a:extLst>
           </p:cNvPr>
@@ -9878,9 +9970,9 @@
                 <a:solidFill>
                   <a:srgbClr val="10B981"/>
                 </a:solidFill>
-                <a:latin typeface="Aptos"/>
-                <a:ea typeface="Aptos"/>
-                <a:cs typeface="Aptos"/>
+                <a:latin typeface="Microsoft YaHei"/>
+                <a:ea typeface="Microsoft YaHei"/>
+                <a:cs typeface="Microsoft YaHei"/>
               </a:defRPr>
             </a:pPr>
             <a:r>
@@ -9888,9 +9980,9 @@
                 <a:solidFill>
                   <a:srgbClr val="10B981"/>
                 </a:solidFill>
-                <a:latin typeface="Aptos"/>
-                <a:ea typeface="Aptos"/>
-                <a:cs typeface="Aptos"/>
+                <a:latin typeface="Microsoft YaHei"/>
+                <a:ea typeface="Microsoft YaHei"/>
+                <a:cs typeface="Microsoft YaHei"/>
               </a:rPr>
               <a:t>domain-safe</a:t>
             </a:r>
@@ -9902,7 +9994,7 @@
           <p:cNvPr id="23" name="">
             <a:extLst xmlns:a="http://schemas.openxmlformats.org/drawingml/2006/main">
               <a:ext uri="{FF2B5EF4-FFF2-40B4-BE49-F238E27FC236}">
-                <a16:creationId xmlns:a16="http://schemas.microsoft.com/office/drawing/2014/main" id="{0C9E0B7B-7825-4EF5-ABB0-EE07F2A49DDB}"/>
+                <a16:creationId xmlns:a16="http://schemas.microsoft.com/office/drawing/2014/main" id="{31329531-071E-4C74-B055-AEA5DE5BD86D}"/>
               </a:ext>
             </a:extLst>
           </p:cNvPr>
@@ -9942,9 +10034,9 @@
                 <a:solidFill>
                   <a:srgbClr val="121826"/>
                 </a:solidFill>
-                <a:latin typeface="Aptos"/>
-                <a:ea typeface="Aptos"/>
-                <a:cs typeface="Aptos"/>
+                <a:latin typeface="Microsoft YaHei"/>
+                <a:ea typeface="Microsoft YaHei"/>
+                <a:cs typeface="Microsoft YaHei"/>
               </a:defRPr>
             </a:pPr>
             <a:r>
@@ -9952,9 +10044,9 @@
                 <a:solidFill>
                   <a:srgbClr val="121826"/>
                 </a:solidFill>
-                <a:latin typeface="Aptos"/>
-                <a:ea typeface="Aptos"/>
-                <a:cs typeface="Aptos"/>
+                <a:latin typeface="Microsoft YaHei"/>
+                <a:ea typeface="Microsoft YaHei"/>
+                <a:cs typeface="Microsoft YaHei"/>
               </a:rPr>
               <a:t>密闭舱室、动火、吊装、试压等</a:t>
             </a:r>
@@ -9966,7 +10058,7 @@
           <p:cNvPr id="24" name="">
             <a:extLst xmlns:a="http://schemas.openxmlformats.org/drawingml/2006/main">
               <a:ext uri="{FF2B5EF4-FFF2-40B4-BE49-F238E27FC236}">
-                <a16:creationId xmlns:a16="http://schemas.microsoft.com/office/drawing/2014/main" id="{2CBD4257-5501-4657-B73C-19008369CEE9}"/>
+                <a16:creationId xmlns:a16="http://schemas.microsoft.com/office/drawing/2014/main" id="{AF5C1DFF-E99B-4600-AB35-738A138926E4}"/>
               </a:ext>
             </a:extLst>
           </p:cNvPr>
@@ -10006,9 +10098,9 @@
                 <a:solidFill>
                   <a:srgbClr val="10B981"/>
                 </a:solidFill>
-                <a:latin typeface="Aptos"/>
-                <a:ea typeface="Aptos"/>
-                <a:cs typeface="Aptos"/>
+                <a:latin typeface="Microsoft YaHei"/>
+                <a:ea typeface="Microsoft YaHei"/>
+                <a:cs typeface="Microsoft YaHei"/>
               </a:defRPr>
             </a:pPr>
             <a:r>
@@ -10016,9 +10108,9 @@
                 <a:solidFill>
                   <a:srgbClr val="10B981"/>
                 </a:solidFill>
-                <a:latin typeface="Aptos"/>
-                <a:ea typeface="Aptos"/>
-                <a:cs typeface="Aptos"/>
+                <a:latin typeface="Microsoft YaHei"/>
+                <a:ea typeface="Microsoft YaHei"/>
+                <a:cs typeface="Microsoft YaHei"/>
               </a:rPr>
               <a:t>进入 RAG + 生成</a:t>
             </a:r>
@@ -10030,7 +10122,7 @@
           <p:cNvPr id="25" name="">
             <a:extLst xmlns:a="http://schemas.openxmlformats.org/drawingml/2006/main">
               <a:ext uri="{FF2B5EF4-FFF2-40B4-BE49-F238E27FC236}">
-                <a16:creationId xmlns:a16="http://schemas.microsoft.com/office/drawing/2014/main" id="{B089C68C-A3FB-4CFF-93F9-FAADB93B7AA4}"/>
+                <a16:creationId xmlns:a16="http://schemas.microsoft.com/office/drawing/2014/main" id="{54BA499E-B0AC-457D-B925-6C7FEED66F0D}"/>
               </a:ext>
             </a:extLst>
           </p:cNvPr>
@@ -10063,7 +10155,7 @@
           <p:cNvPr id="26" name="">
             <a:extLst xmlns:a="http://schemas.openxmlformats.org/drawingml/2006/main">
               <a:ext uri="{FF2B5EF4-FFF2-40B4-BE49-F238E27FC236}">
-                <a16:creationId xmlns:a16="http://schemas.microsoft.com/office/drawing/2014/main" id="{B16FA40E-2129-4C4C-8CA8-97E07A695F35}"/>
+                <a16:creationId xmlns:a16="http://schemas.microsoft.com/office/drawing/2014/main" id="{0010AE6C-6916-4C5B-9F05-34C4C414667D}"/>
               </a:ext>
             </a:extLst>
           </p:cNvPr>
@@ -10096,7 +10188,7 @@
           <p:cNvPr id="27" name="">
             <a:extLst xmlns:a="http://schemas.openxmlformats.org/drawingml/2006/main">
               <a:ext uri="{FF2B5EF4-FFF2-40B4-BE49-F238E27FC236}">
-                <a16:creationId xmlns:a16="http://schemas.microsoft.com/office/drawing/2014/main" id="{6CC7D31A-5717-4779-ADAB-79182912DD6C}"/>
+                <a16:creationId xmlns:a16="http://schemas.microsoft.com/office/drawing/2014/main" id="{6B1CF0B6-AB3E-4D0D-8D4A-436622D2B28E}"/>
               </a:ext>
             </a:extLst>
           </p:cNvPr>
@@ -10129,7 +10221,7 @@
           <p:cNvPr id="28" name="">
             <a:extLst xmlns:a="http://schemas.openxmlformats.org/drawingml/2006/main">
               <a:ext uri="{FF2B5EF4-FFF2-40B4-BE49-F238E27FC236}">
-                <a16:creationId xmlns:a16="http://schemas.microsoft.com/office/drawing/2014/main" id="{E65EAC15-B3A4-4BDD-85E5-484863D9873F}"/>
+                <a16:creationId xmlns:a16="http://schemas.microsoft.com/office/drawing/2014/main" id="{2744F0E3-455C-438A-997A-3F23AD8D26B0}"/>
               </a:ext>
             </a:extLst>
           </p:cNvPr>
@@ -10169,9 +10261,9 @@
                 <a:solidFill>
                   <a:srgbClr val="121826"/>
                 </a:solidFill>
-                <a:latin typeface="Aptos"/>
-                <a:ea typeface="Aptos"/>
-                <a:cs typeface="Aptos"/>
+                <a:latin typeface="Microsoft YaHei"/>
+                <a:ea typeface="Microsoft YaHei"/>
+                <a:cs typeface="Microsoft YaHei"/>
               </a:defRPr>
             </a:pPr>
             <a:r>
@@ -10179,9 +10271,9 @@
                 <a:solidFill>
                   <a:srgbClr val="121826"/>
                 </a:solidFill>
-                <a:latin typeface="Aptos"/>
-                <a:ea typeface="Aptos"/>
-                <a:cs typeface="Aptos"/>
+                <a:latin typeface="Microsoft YaHei"/>
+                <a:ea typeface="Microsoft YaHei"/>
+                <a:cs typeface="Microsoft YaHei"/>
               </a:rPr>
               <a:t>当前完整 pipeline 安全评测：标签准确率 100.0%，allow/block 决策准确率 100.0%，危险请求误放行 0。LoRA 不能绕过门控。</a:t>
             </a:r>
@@ -10193,7 +10285,7 @@
           <p:cNvPr id="29" name="">
             <a:extLst xmlns:a="http://schemas.openxmlformats.org/drawingml/2006/main">
               <a:ext uri="{FF2B5EF4-FFF2-40B4-BE49-F238E27FC236}">
-                <a16:creationId xmlns:a16="http://schemas.microsoft.com/office/drawing/2014/main" id="{F2E76E31-A698-4BAC-9398-6D0E5A5113DF}"/>
+                <a16:creationId xmlns:a16="http://schemas.microsoft.com/office/drawing/2014/main" id="{8933F433-3320-47E4-82D3-24AB75FEB343}"/>
               </a:ext>
             </a:extLst>
           </p:cNvPr>
@@ -10233,9 +10325,9 @@
                 <a:solidFill>
                   <a:srgbClr val="64748B"/>
                 </a:solidFill>
-                <a:latin typeface="Aptos"/>
-                <a:ea typeface="Aptos"/>
-                <a:cs typeface="Aptos"/>
+                <a:latin typeface="Microsoft YaHei"/>
+                <a:ea typeface="Microsoft YaHei"/>
+                <a:cs typeface="Microsoft YaHei"/>
               </a:defRPr>
             </a:pPr>
             <a:r>
@@ -10243,9 +10335,9 @@
                 <a:solidFill>
                   <a:srgbClr val="64748B"/>
                 </a:solidFill>
-                <a:latin typeface="Aptos"/>
-                <a:ea typeface="Aptos"/>
-                <a:cs typeface="Aptos"/>
+                <a:latin typeface="Microsoft YaHei"/>
+                <a:ea typeface="Microsoft YaHei"/>
+                <a:cs typeface="Microsoft YaHei"/>
               </a:rPr>
               <a:t>ShipVoice | 信息安全基础 A2</a:t>
             </a:r>
@@ -10257,7 +10349,7 @@
           <p:cNvPr id="30" name="">
             <a:extLst xmlns:a="http://schemas.openxmlformats.org/drawingml/2006/main">
               <a:ext uri="{FF2B5EF4-FFF2-40B4-BE49-F238E27FC236}">
-                <a16:creationId xmlns:a16="http://schemas.microsoft.com/office/drawing/2014/main" id="{68B3892C-A317-48BE-86A0-1AD2DBE84F2A}"/>
+                <a16:creationId xmlns:a16="http://schemas.microsoft.com/office/drawing/2014/main" id="{B45D571C-B8DB-44F4-94A3-12248F4BC25C}"/>
               </a:ext>
             </a:extLst>
           </p:cNvPr>
@@ -10297,9 +10389,9 @@
                 <a:solidFill>
                   <a:srgbClr val="64748B"/>
                 </a:solidFill>
-                <a:latin typeface="Aptos"/>
-                <a:ea typeface="Aptos"/>
-                <a:cs typeface="Aptos"/>
+                <a:latin typeface="Microsoft YaHei"/>
+                <a:ea typeface="Microsoft YaHei"/>
+                <a:cs typeface="Microsoft YaHei"/>
               </a:defRPr>
             </a:pPr>
             <a:r>
@@ -10307,9 +10399,9 @@
                 <a:solidFill>
                   <a:srgbClr val="64748B"/>
                 </a:solidFill>
-                <a:latin typeface="Aptos"/>
-                <a:ea typeface="Aptos"/>
-                <a:cs typeface="Aptos"/>
+                <a:latin typeface="Microsoft YaHei"/>
+                <a:ea typeface="Microsoft YaHei"/>
+                <a:cs typeface="Microsoft YaHei"/>
               </a:rPr>
               <a:t>05</a:t>
             </a:r>
@@ -10319,7 +10411,7 @@
     </p:spTree>
     <p:extLst>
       <p:ext uri="{BB962C8B-B14F-4D97-AF65-F5344CB8AC3E}">
-        <p14:creationId xmlns:p14="http://schemas.microsoft.com/office/powerpoint/2010/main" val="1053854629"/>
+        <p14:creationId xmlns:p14="http://schemas.microsoft.com/office/powerpoint/2010/main" val="991061459"/>
       </p:ext>
     </p:extLst>
   </p:cSld>
@@ -10343,7 +10435,7 @@
           <p:cNvPr id="1" name="">
             <a:extLst xmlns:a="http://schemas.openxmlformats.org/drawingml/2006/main">
               <a:ext uri="{FF2B5EF4-FFF2-40B4-BE49-F238E27FC236}">
-                <a16:creationId xmlns:a16="http://schemas.microsoft.com/office/drawing/2014/main" id="{BA6D20D8-721E-4503-823E-59F522909B17}"/>
+                <a16:creationId xmlns:a16="http://schemas.microsoft.com/office/drawing/2014/main" id="{7B7E4B79-76D4-4C29-95FD-61F65D9FCACF}"/>
               </a:ext>
             </a:extLst>
           </p:cNvPr>
@@ -10376,7 +10468,7 @@
           <p:cNvPr id="2" name="">
             <a:extLst xmlns:a="http://schemas.openxmlformats.org/drawingml/2006/main">
               <a:ext uri="{FF2B5EF4-FFF2-40B4-BE49-F238E27FC236}">
-                <a16:creationId xmlns:a16="http://schemas.microsoft.com/office/drawing/2014/main" id="{49D5E664-E5A6-4DA6-A707-50F53B291F45}"/>
+                <a16:creationId xmlns:a16="http://schemas.microsoft.com/office/drawing/2014/main" id="{DFF78ECF-65DD-4C82-AC8B-3CB187D02582}"/>
               </a:ext>
             </a:extLst>
           </p:cNvPr>
@@ -10409,7 +10501,7 @@
           <p:cNvPr id="3" name="">
             <a:extLst xmlns:a="http://schemas.openxmlformats.org/drawingml/2006/main">
               <a:ext uri="{FF2B5EF4-FFF2-40B4-BE49-F238E27FC236}">
-                <a16:creationId xmlns:a16="http://schemas.microsoft.com/office/drawing/2014/main" id="{78BA864B-B05E-48E3-BF99-8B4CF7A35ACE}"/>
+                <a16:creationId xmlns:a16="http://schemas.microsoft.com/office/drawing/2014/main" id="{097FCDB8-35D2-4BAF-9564-859A31D45FA3}"/>
               </a:ext>
             </a:extLst>
           </p:cNvPr>
@@ -10449,9 +10541,9 @@
                 <a:solidFill>
                   <a:srgbClr val="2563EB"/>
                 </a:solidFill>
-                <a:latin typeface="Aptos"/>
-                <a:ea typeface="Aptos"/>
-                <a:cs typeface="Aptos"/>
+                <a:latin typeface="Microsoft YaHei"/>
+                <a:ea typeface="Microsoft YaHei"/>
+                <a:cs typeface="Microsoft YaHei"/>
               </a:defRPr>
             </a:pPr>
             <a:r>
@@ -10459,9 +10551,9 @@
                 <a:solidFill>
                   <a:srgbClr val="2563EB"/>
                 </a:solidFill>
-                <a:latin typeface="Aptos"/>
-                <a:ea typeface="Aptos"/>
-                <a:cs typeface="Aptos"/>
+                <a:latin typeface="Microsoft YaHei"/>
+                <a:ea typeface="Microsoft YaHei"/>
+                <a:cs typeface="Microsoft YaHei"/>
               </a:rPr>
               <a:t>DEMO</a:t>
             </a:r>
@@ -10473,7 +10565,7 @@
           <p:cNvPr id="4" name="">
             <a:extLst xmlns:a="http://schemas.openxmlformats.org/drawingml/2006/main">
               <a:ext uri="{FF2B5EF4-FFF2-40B4-BE49-F238E27FC236}">
-                <a16:creationId xmlns:a16="http://schemas.microsoft.com/office/drawing/2014/main" id="{40CBAAC1-1BE3-42CC-8591-A1B3A1FF10B1}"/>
+                <a16:creationId xmlns:a16="http://schemas.microsoft.com/office/drawing/2014/main" id="{F3291426-C8D2-40DF-A092-D4B971695A65}"/>
               </a:ext>
             </a:extLst>
           </p:cNvPr>
@@ -10537,7 +10629,7 @@
           <p:cNvPr id="5" name="">
             <a:extLst xmlns:a="http://schemas.openxmlformats.org/drawingml/2006/main">
               <a:ext uri="{FF2B5EF4-FFF2-40B4-BE49-F238E27FC236}">
-                <a16:creationId xmlns:a16="http://schemas.microsoft.com/office/drawing/2014/main" id="{613F4AEB-D9F6-45C3-BF50-8D713BCCE7EC}"/>
+                <a16:creationId xmlns:a16="http://schemas.microsoft.com/office/drawing/2014/main" id="{E6AE2AEE-1674-4F17-97BC-8F2C0D5E7D6C}"/>
               </a:ext>
             </a:extLst>
           </p:cNvPr>
@@ -10577,9 +10669,9 @@
                 <a:solidFill>
                   <a:srgbClr val="64748B"/>
                 </a:solidFill>
-                <a:latin typeface="Aptos"/>
-                <a:ea typeface="Aptos"/>
-                <a:cs typeface="Aptos"/>
+                <a:latin typeface="Microsoft YaHei"/>
+                <a:ea typeface="Microsoft YaHei"/>
+                <a:cs typeface="Microsoft YaHei"/>
               </a:defRPr>
             </a:pPr>
             <a:r>
@@ -10587,9 +10679,9 @@
                 <a:solidFill>
                   <a:srgbClr val="64748B"/>
                 </a:solidFill>
-                <a:latin typeface="Aptos"/>
-                <a:ea typeface="Aptos"/>
-                <a:cs typeface="Aptos"/>
+                <a:latin typeface="Microsoft YaHei"/>
+                <a:ea typeface="Microsoft YaHei"/>
+                <a:cs typeface="Microsoft YaHei"/>
               </a:rPr>
               <a:t>无 GPU 时也可以跑通输入、门控、证据、回答和指标。</a:t>
             </a:r>
@@ -10598,14 +10690,14 @@
       </p:sp>
       <p:pic>
         <p:nvPicPr>
-          <p:cNvPr id="6" name=""/>
+          <p:cNvPr id="16" name=""/>
           <p:cNvPicPr>
             <a:picLocks xmlns:a="http://schemas.openxmlformats.org/drawingml/2006/main" noChangeAspect="1"/>
           </p:cNvPicPr>
           <p:nvPr/>
         </p:nvPicPr>
         <p:blipFill>
-          <a:blip xmlns:r="http://schemas.openxmlformats.org/officeDocument/2006/relationships" xmlns:a="http://schemas.openxmlformats.org/drawingml/2006/main" r:embed="R597c063f184f46c8"/>
+          <a:blip xmlns:r="http://schemas.openxmlformats.org/officeDocument/2006/relationships" xmlns:a="http://schemas.openxmlformats.org/drawingml/2006/main" r:embed="R7c1c7f9e18774e05"/>
           <a:stretch xmlns:a="http://schemas.openxmlformats.org/drawingml/2006/main"/>
         </p:blipFill>
         <p:spPr>
@@ -10620,14 +10712,14 @@
       </p:pic>
       <p:pic>
         <p:nvPicPr>
-          <p:cNvPr id="7" name=""/>
+          <p:cNvPr id="17" name=""/>
           <p:cNvPicPr>
             <a:picLocks xmlns:a="http://schemas.openxmlformats.org/drawingml/2006/main" noChangeAspect="1"/>
           </p:cNvPicPr>
           <p:nvPr/>
         </p:nvPicPr>
         <p:blipFill>
-          <a:blip xmlns:r="http://schemas.openxmlformats.org/officeDocument/2006/relationships" xmlns:a="http://schemas.openxmlformats.org/drawingml/2006/main" r:embed="R4cf2d92d27804516"/>
+          <a:blip xmlns:r="http://schemas.openxmlformats.org/officeDocument/2006/relationships" xmlns:a="http://schemas.openxmlformats.org/drawingml/2006/main" r:embed="R6b486e1d96164a04"/>
           <a:stretch xmlns:a="http://schemas.openxmlformats.org/drawingml/2006/main"/>
         </p:blipFill>
         <p:spPr>
@@ -10645,7 +10737,7 @@
           <p:cNvPr id="8" name="">
             <a:extLst xmlns:a="http://schemas.openxmlformats.org/drawingml/2006/main">
               <a:ext uri="{FF2B5EF4-FFF2-40B4-BE49-F238E27FC236}">
-                <a16:creationId xmlns:a16="http://schemas.microsoft.com/office/drawing/2014/main" id="{17FEDA50-4022-4F31-872E-AC6E87C9F487}"/>
+                <a16:creationId xmlns:a16="http://schemas.microsoft.com/office/drawing/2014/main" id="{C76B9B03-0735-4B95-B3C8-6A68034D90CB}"/>
               </a:ext>
             </a:extLst>
           </p:cNvPr>
@@ -10685,9 +10777,9 @@
                 <a:solidFill>
                   <a:srgbClr val="121826"/>
                 </a:solidFill>
-                <a:latin typeface="Aptos"/>
-                <a:ea typeface="Aptos"/>
-                <a:cs typeface="Aptos"/>
+                <a:latin typeface="Microsoft YaHei"/>
+                <a:ea typeface="Microsoft YaHei"/>
+                <a:cs typeface="Microsoft YaHei"/>
               </a:defRPr>
             </a:pPr>
             <a:r>
@@ -10695,9 +10787,9 @@
                 <a:solidFill>
                   <a:srgbClr val="121826"/>
                 </a:solidFill>
-                <a:latin typeface="Aptos"/>
-                <a:ea typeface="Aptos"/>
-                <a:cs typeface="Aptos"/>
+                <a:latin typeface="Microsoft YaHei"/>
+                <a:ea typeface="Microsoft YaHei"/>
+                <a:cs typeface="Microsoft YaHei"/>
               </a:rPr>
               <a:t>演示问题覆盖：安全作业、领域术语、off-domain、危险请求、prompt injection。</a:t>
             </a:r>
@@ -10709,7 +10801,7 @@
           <p:cNvPr id="9" name="">
             <a:extLst xmlns:a="http://schemas.openxmlformats.org/drawingml/2006/main">
               <a:ext uri="{FF2B5EF4-FFF2-40B4-BE49-F238E27FC236}">
-                <a16:creationId xmlns:a16="http://schemas.microsoft.com/office/drawing/2014/main" id="{7434E7D0-9554-49B1-8ADA-982C448411F9}"/>
+                <a16:creationId xmlns:a16="http://schemas.microsoft.com/office/drawing/2014/main" id="{D31E21A3-81E3-4087-9ECD-C004BB9940BB}"/>
               </a:ext>
             </a:extLst>
           </p:cNvPr>
@@ -10749,9 +10841,9 @@
                 <a:solidFill>
                   <a:srgbClr val="64748B"/>
                 </a:solidFill>
-                <a:latin typeface="Aptos"/>
-                <a:ea typeface="Aptos"/>
-                <a:cs typeface="Aptos"/>
+                <a:latin typeface="Microsoft YaHei"/>
+                <a:ea typeface="Microsoft YaHei"/>
+                <a:cs typeface="Microsoft YaHei"/>
               </a:defRPr>
             </a:pPr>
             <a:r>
@@ -10759,9 +10851,9 @@
                 <a:solidFill>
                   <a:srgbClr val="64748B"/>
                 </a:solidFill>
-                <a:latin typeface="Aptos"/>
-                <a:ea typeface="Aptos"/>
-                <a:cs typeface="Aptos"/>
+                <a:latin typeface="Microsoft YaHei"/>
+                <a:ea typeface="Microsoft YaHei"/>
+                <a:cs typeface="Microsoft YaHei"/>
               </a:rPr>
               <a:t>ShipVoice | 信息安全基础 A2</a:t>
             </a:r>
@@ -10773,7 +10865,7 @@
           <p:cNvPr id="10" name="">
             <a:extLst xmlns:a="http://schemas.openxmlformats.org/drawingml/2006/main">
               <a:ext uri="{FF2B5EF4-FFF2-40B4-BE49-F238E27FC236}">
-                <a16:creationId xmlns:a16="http://schemas.microsoft.com/office/drawing/2014/main" id="{377BD4FA-CCEC-4B28-83A5-1C1AFA613A9B}"/>
+                <a16:creationId xmlns:a16="http://schemas.microsoft.com/office/drawing/2014/main" id="{30762983-9C2B-489D-910E-B04F0DB5BC37}"/>
               </a:ext>
             </a:extLst>
           </p:cNvPr>
@@ -10813,9 +10905,9 @@
                 <a:solidFill>
                   <a:srgbClr val="64748B"/>
                 </a:solidFill>
-                <a:latin typeface="Aptos"/>
-                <a:ea typeface="Aptos"/>
-                <a:cs typeface="Aptos"/>
+                <a:latin typeface="Microsoft YaHei"/>
+                <a:ea typeface="Microsoft YaHei"/>
+                <a:cs typeface="Microsoft YaHei"/>
               </a:defRPr>
             </a:pPr>
             <a:r>
@@ -10823,9 +10915,9 @@
                 <a:solidFill>
                   <a:srgbClr val="64748B"/>
                 </a:solidFill>
-                <a:latin typeface="Aptos"/>
-                <a:ea typeface="Aptos"/>
-                <a:cs typeface="Aptos"/>
+                <a:latin typeface="Microsoft YaHei"/>
+                <a:ea typeface="Microsoft YaHei"/>
+                <a:cs typeface="Microsoft YaHei"/>
               </a:rPr>
               <a:t>06</a:t>
             </a:r>
@@ -10835,7 +10927,7 @@
     </p:spTree>
     <p:extLst>
       <p:ext uri="{BB962C8B-B14F-4D97-AF65-F5344CB8AC3E}">
-        <p14:creationId xmlns:p14="http://schemas.microsoft.com/office/powerpoint/2010/main" val="1065798780"/>
+        <p14:creationId xmlns:p14="http://schemas.microsoft.com/office/powerpoint/2010/main" val="314975427"/>
       </p:ext>
     </p:extLst>
   </p:cSld>
@@ -10859,7 +10951,7 @@
           <p:cNvPr id="1" name="">
             <a:extLst xmlns:a="http://schemas.openxmlformats.org/drawingml/2006/main">
               <a:ext uri="{FF2B5EF4-FFF2-40B4-BE49-F238E27FC236}">
-                <a16:creationId xmlns:a16="http://schemas.microsoft.com/office/drawing/2014/main" id="{FAA48C97-65D5-4175-8E1E-2BA9F9848BD1}"/>
+                <a16:creationId xmlns:a16="http://schemas.microsoft.com/office/drawing/2014/main" id="{8E4CF2DA-EC02-491F-863A-AE9B55D1A64A}"/>
               </a:ext>
             </a:extLst>
           </p:cNvPr>
@@ -10892,7 +10984,7 @@
           <p:cNvPr id="2" name="">
             <a:extLst xmlns:a="http://schemas.openxmlformats.org/drawingml/2006/main">
               <a:ext uri="{FF2B5EF4-FFF2-40B4-BE49-F238E27FC236}">
-                <a16:creationId xmlns:a16="http://schemas.microsoft.com/office/drawing/2014/main" id="{4F04B8C6-E0B7-47B1-B4F8-BEB84FBC6753}"/>
+                <a16:creationId xmlns:a16="http://schemas.microsoft.com/office/drawing/2014/main" id="{9D4F87DC-0300-403B-B8B7-458016B809C3}"/>
               </a:ext>
             </a:extLst>
           </p:cNvPr>
@@ -10925,7 +11017,7 @@
           <p:cNvPr id="3" name="">
             <a:extLst xmlns:a="http://schemas.openxmlformats.org/drawingml/2006/main">
               <a:ext uri="{FF2B5EF4-FFF2-40B4-BE49-F238E27FC236}">
-                <a16:creationId xmlns:a16="http://schemas.microsoft.com/office/drawing/2014/main" id="{21E2B5B5-CD86-40E9-8AC9-BE6206A74BB9}"/>
+                <a16:creationId xmlns:a16="http://schemas.microsoft.com/office/drawing/2014/main" id="{B744DEC6-BE7A-4EBF-B8C5-2B1BF8CB6FE6}"/>
               </a:ext>
             </a:extLst>
           </p:cNvPr>
@@ -10965,9 +11057,9 @@
                 <a:solidFill>
                   <a:srgbClr val="2563EB"/>
                 </a:solidFill>
-                <a:latin typeface="Aptos"/>
-                <a:ea typeface="Aptos"/>
-                <a:cs typeface="Aptos"/>
+                <a:latin typeface="Microsoft YaHei"/>
+                <a:ea typeface="Microsoft YaHei"/>
+                <a:cs typeface="Microsoft YaHei"/>
               </a:defRPr>
             </a:pPr>
             <a:r>
@@ -10975,9 +11067,9 @@
                 <a:solidFill>
                   <a:srgbClr val="2563EB"/>
                 </a:solidFill>
-                <a:latin typeface="Aptos"/>
-                <a:ea typeface="Aptos"/>
-                <a:cs typeface="Aptos"/>
+                <a:latin typeface="Microsoft YaHei"/>
+                <a:ea typeface="Microsoft YaHei"/>
+                <a:cs typeface="Microsoft YaHei"/>
               </a:rPr>
               <a:t>FINE-TUNING</a:t>
             </a:r>
@@ -10989,7 +11081,7 @@
           <p:cNvPr id="4" name="">
             <a:extLst xmlns:a="http://schemas.openxmlformats.org/drawingml/2006/main">
               <a:ext uri="{FF2B5EF4-FFF2-40B4-BE49-F238E27FC236}">
-                <a16:creationId xmlns:a16="http://schemas.microsoft.com/office/drawing/2014/main" id="{6C83FA76-5829-42F1-B4A1-AFD8930FE311}"/>
+                <a16:creationId xmlns:a16="http://schemas.microsoft.com/office/drawing/2014/main" id="{D50B551F-2AF2-4F35-9672-FDF8C6D73713}"/>
               </a:ext>
             </a:extLst>
           </p:cNvPr>
@@ -11053,7 +11145,7 @@
           <p:cNvPr id="5" name="">
             <a:extLst xmlns:a="http://schemas.openxmlformats.org/drawingml/2006/main">
               <a:ext uri="{FF2B5EF4-FFF2-40B4-BE49-F238E27FC236}">
-                <a16:creationId xmlns:a16="http://schemas.microsoft.com/office/drawing/2014/main" id="{9F51B985-F4F3-4FA7-92DA-5AFFDFD2EBB5}"/>
+                <a16:creationId xmlns:a16="http://schemas.microsoft.com/office/drawing/2014/main" id="{93BA6944-9DAA-4756-8CE2-147826F97EED}"/>
               </a:ext>
             </a:extLst>
           </p:cNvPr>
@@ -11093,9 +11185,9 @@
                 <a:solidFill>
                   <a:srgbClr val="64748B"/>
                 </a:solidFill>
-                <a:latin typeface="Aptos"/>
-                <a:ea typeface="Aptos"/>
-                <a:cs typeface="Aptos"/>
+                <a:latin typeface="Microsoft YaHei"/>
+                <a:ea typeface="Microsoft YaHei"/>
+                <a:cs typeface="Microsoft YaHei"/>
               </a:defRPr>
             </a:pPr>
             <a:r>
@@ -11103,9 +11195,9 @@
                 <a:solidFill>
                   <a:srgbClr val="64748B"/>
                 </a:solidFill>
-                <a:latin typeface="Aptos"/>
-                <a:ea typeface="Aptos"/>
-                <a:cs typeface="Aptos"/>
+                <a:latin typeface="Microsoft YaHei"/>
+                <a:ea typeface="Microsoft YaHei"/>
+                <a:cs typeface="Microsoft YaHei"/>
               </a:rPr>
               <a:t>我们跑了真实远端 GPU 训练，而不是只写计划。</a:t>
             </a:r>
@@ -11117,7 +11209,7 @@
           <p:cNvPr id="6" name="">
             <a:extLst xmlns:a="http://schemas.openxmlformats.org/drawingml/2006/main">
               <a:ext uri="{FF2B5EF4-FFF2-40B4-BE49-F238E27FC236}">
-                <a16:creationId xmlns:a16="http://schemas.microsoft.com/office/drawing/2014/main" id="{3735ABC8-484E-425A-8D4C-D302FD7EB951}"/>
+                <a16:creationId xmlns:a16="http://schemas.microsoft.com/office/drawing/2014/main" id="{85B9DEE6-F025-45D7-B8DA-1E49B48B20E0}"/>
               </a:ext>
             </a:extLst>
           </p:cNvPr>
@@ -11150,7 +11242,7 @@
           <p:cNvPr id="7" name="">
             <a:extLst xmlns:a="http://schemas.openxmlformats.org/drawingml/2006/main">
               <a:ext uri="{FF2B5EF4-FFF2-40B4-BE49-F238E27FC236}">
-                <a16:creationId xmlns:a16="http://schemas.microsoft.com/office/drawing/2014/main" id="{E418EB86-E7B4-46BA-8EC9-F8C1D0EA5A33}"/>
+                <a16:creationId xmlns:a16="http://schemas.microsoft.com/office/drawing/2014/main" id="{1BE6590C-B270-4FA0-A9A7-BC61814C362F}"/>
               </a:ext>
             </a:extLst>
           </p:cNvPr>
@@ -11183,7 +11275,7 @@
           <p:cNvPr id="8" name="">
             <a:extLst xmlns:a="http://schemas.openxmlformats.org/drawingml/2006/main">
               <a:ext uri="{FF2B5EF4-FFF2-40B4-BE49-F238E27FC236}">
-                <a16:creationId xmlns:a16="http://schemas.microsoft.com/office/drawing/2014/main" id="{717C132D-0560-4694-8841-F2720E01824D}"/>
+                <a16:creationId xmlns:a16="http://schemas.microsoft.com/office/drawing/2014/main" id="{CBA00E16-3334-4C73-BF23-5D8DE2E61002}"/>
               </a:ext>
             </a:extLst>
           </p:cNvPr>
@@ -11247,7 +11339,7 @@
           <p:cNvPr id="9" name="">
             <a:extLst xmlns:a="http://schemas.openxmlformats.org/drawingml/2006/main">
               <a:ext uri="{FF2B5EF4-FFF2-40B4-BE49-F238E27FC236}">
-                <a16:creationId xmlns:a16="http://schemas.microsoft.com/office/drawing/2014/main" id="{9B6545C0-324F-4D90-98CC-C85F7A4C3FEF}"/>
+                <a16:creationId xmlns:a16="http://schemas.microsoft.com/office/drawing/2014/main" id="{7310584C-15EA-4B77-9E66-F8D6238BBE47}"/>
               </a:ext>
             </a:extLst>
           </p:cNvPr>
@@ -11287,9 +11379,9 @@
                 <a:solidFill>
                   <a:srgbClr val="64748B"/>
                 </a:solidFill>
-                <a:latin typeface="Aptos"/>
-                <a:ea typeface="Aptos"/>
-                <a:cs typeface="Aptos"/>
+                <a:latin typeface="Microsoft YaHei"/>
+                <a:ea typeface="Microsoft YaHei"/>
+                <a:cs typeface="Microsoft YaHei"/>
               </a:defRPr>
             </a:pPr>
             <a:r>
@@ -11297,9 +11389,9 @@
                 <a:solidFill>
                   <a:srgbClr val="64748B"/>
                 </a:solidFill>
-                <a:latin typeface="Aptos"/>
-                <a:ea typeface="Aptos"/>
-                <a:cs typeface="Aptos"/>
+                <a:latin typeface="Microsoft YaHei"/>
+                <a:ea typeface="Microsoft YaHei"/>
+                <a:cs typeface="Microsoft YaHei"/>
               </a:rPr>
               <a:t>Base model</a:t>
             </a:r>
@@ -11311,7 +11403,7 @@
           <p:cNvPr id="10" name="">
             <a:extLst xmlns:a="http://schemas.openxmlformats.org/drawingml/2006/main">
               <a:ext uri="{FF2B5EF4-FFF2-40B4-BE49-F238E27FC236}">
-                <a16:creationId xmlns:a16="http://schemas.microsoft.com/office/drawing/2014/main" id="{5F9C882C-4497-45F7-B4AE-2EFE776C822C}"/>
+                <a16:creationId xmlns:a16="http://schemas.microsoft.com/office/drawing/2014/main" id="{5E426D6D-D8E0-4ACE-BBDE-0E4B3ED19B7C}"/>
               </a:ext>
             </a:extLst>
           </p:cNvPr>
@@ -11344,7 +11436,7 @@
           <p:cNvPr id="11" name="">
             <a:extLst xmlns:a="http://schemas.openxmlformats.org/drawingml/2006/main">
               <a:ext uri="{FF2B5EF4-FFF2-40B4-BE49-F238E27FC236}">
-                <a16:creationId xmlns:a16="http://schemas.microsoft.com/office/drawing/2014/main" id="{65346802-13EF-49F9-B714-C60FEB0F34F5}"/>
+                <a16:creationId xmlns:a16="http://schemas.microsoft.com/office/drawing/2014/main" id="{E2197776-2B0E-4161-86A0-357B21803A2B}"/>
               </a:ext>
             </a:extLst>
           </p:cNvPr>
@@ -11377,7 +11469,7 @@
           <p:cNvPr id="12" name="">
             <a:extLst xmlns:a="http://schemas.openxmlformats.org/drawingml/2006/main">
               <a:ext uri="{FF2B5EF4-FFF2-40B4-BE49-F238E27FC236}">
-                <a16:creationId xmlns:a16="http://schemas.microsoft.com/office/drawing/2014/main" id="{67208C46-B69D-49F7-BBC5-8FCC68CD0168}"/>
+                <a16:creationId xmlns:a16="http://schemas.microsoft.com/office/drawing/2014/main" id="{FE5D3352-CBB2-4BFC-9AAA-1E2AFD8186C5}"/>
               </a:ext>
             </a:extLst>
           </p:cNvPr>
@@ -11441,7 +11533,7 @@
           <p:cNvPr id="13" name="">
             <a:extLst xmlns:a="http://schemas.openxmlformats.org/drawingml/2006/main">
               <a:ext uri="{FF2B5EF4-FFF2-40B4-BE49-F238E27FC236}">
-                <a16:creationId xmlns:a16="http://schemas.microsoft.com/office/drawing/2014/main" id="{FC7EBB59-CC04-4422-A17D-89892F3E8BB3}"/>
+                <a16:creationId xmlns:a16="http://schemas.microsoft.com/office/drawing/2014/main" id="{5B8CA554-E0AD-450F-A3A0-04112B5E3202}"/>
               </a:ext>
             </a:extLst>
           </p:cNvPr>
@@ -11481,9 +11573,9 @@
                 <a:solidFill>
                   <a:srgbClr val="64748B"/>
                 </a:solidFill>
-                <a:latin typeface="Aptos"/>
-                <a:ea typeface="Aptos"/>
-                <a:cs typeface="Aptos"/>
+                <a:latin typeface="Microsoft YaHei"/>
+                <a:ea typeface="Microsoft YaHei"/>
+                <a:cs typeface="Microsoft YaHei"/>
               </a:defRPr>
             </a:pPr>
             <a:r>
@@ -11491,9 +11583,9 @@
                 <a:solidFill>
                   <a:srgbClr val="64748B"/>
                 </a:solidFill>
-                <a:latin typeface="Aptos"/>
-                <a:ea typeface="Aptos"/>
-                <a:cs typeface="Aptos"/>
+                <a:latin typeface="Microsoft YaHei"/>
+                <a:ea typeface="Microsoft YaHei"/>
+                <a:cs typeface="Microsoft YaHei"/>
               </a:rPr>
               <a:t>24GB GPU</a:t>
             </a:r>
@@ -11505,7 +11597,7 @@
           <p:cNvPr id="14" name="">
             <a:extLst xmlns:a="http://schemas.openxmlformats.org/drawingml/2006/main">
               <a:ext uri="{FF2B5EF4-FFF2-40B4-BE49-F238E27FC236}">
-                <a16:creationId xmlns:a16="http://schemas.microsoft.com/office/drawing/2014/main" id="{5DA43B5E-BCD2-4B7B-B4C9-B705B1428479}"/>
+                <a16:creationId xmlns:a16="http://schemas.microsoft.com/office/drawing/2014/main" id="{BF27CD65-51EF-46C4-83BF-C7694D0BDC03}"/>
               </a:ext>
             </a:extLst>
           </p:cNvPr>
@@ -11538,7 +11630,7 @@
           <p:cNvPr id="15" name="">
             <a:extLst xmlns:a="http://schemas.openxmlformats.org/drawingml/2006/main">
               <a:ext uri="{FF2B5EF4-FFF2-40B4-BE49-F238E27FC236}">
-                <a16:creationId xmlns:a16="http://schemas.microsoft.com/office/drawing/2014/main" id="{7F1B865E-3DBF-4A3C-AE4C-592C059979B8}"/>
+                <a16:creationId xmlns:a16="http://schemas.microsoft.com/office/drawing/2014/main" id="{FCDA7AE9-118D-4E93-832F-EE9D4575E656}"/>
               </a:ext>
             </a:extLst>
           </p:cNvPr>
@@ -11571,7 +11663,7 @@
           <p:cNvPr id="16" name="">
             <a:extLst xmlns:a="http://schemas.openxmlformats.org/drawingml/2006/main">
               <a:ext uri="{FF2B5EF4-FFF2-40B4-BE49-F238E27FC236}">
-                <a16:creationId xmlns:a16="http://schemas.microsoft.com/office/drawing/2014/main" id="{18756D20-B92D-4C0C-B0CB-ED54C475CB5D}"/>
+                <a16:creationId xmlns:a16="http://schemas.microsoft.com/office/drawing/2014/main" id="{FD7CFCE7-8864-4C84-952D-6C68BCAA3100}"/>
               </a:ext>
             </a:extLst>
           </p:cNvPr>
@@ -11625,7 +11717,7 @@
                 <a:ea typeface="Aptos Display"/>
                 <a:cs typeface="Aptos Display"/>
               </a:rPr>
-              <a:t>63</a:t>
+              <a:t>1000</a:t>
             </a:r>
           </a:p>
         </p:txBody>
@@ -11635,7 +11727,7 @@
           <p:cNvPr id="17" name="">
             <a:extLst xmlns:a="http://schemas.openxmlformats.org/drawingml/2006/main">
               <a:ext uri="{FF2B5EF4-FFF2-40B4-BE49-F238E27FC236}">
-                <a16:creationId xmlns:a16="http://schemas.microsoft.com/office/drawing/2014/main" id="{56447B2F-979A-433B-AB8D-61F96757FC21}"/>
+                <a16:creationId xmlns:a16="http://schemas.microsoft.com/office/drawing/2014/main" id="{7205B039-DD41-4B57-9C9D-7AE1CE34F08E}"/>
               </a:ext>
             </a:extLst>
           </p:cNvPr>
@@ -11675,9 +11767,9 @@
                 <a:solidFill>
                   <a:srgbClr val="64748B"/>
                 </a:solidFill>
-                <a:latin typeface="Aptos"/>
-                <a:ea typeface="Aptos"/>
-                <a:cs typeface="Aptos"/>
+                <a:latin typeface="Microsoft YaHei"/>
+                <a:ea typeface="Microsoft YaHei"/>
+                <a:cs typeface="Microsoft YaHei"/>
               </a:defRPr>
             </a:pPr>
             <a:r>
@@ -11685,11 +11777,11 @@
                 <a:solidFill>
                   <a:srgbClr val="64748B"/>
                 </a:solidFill>
-                <a:latin typeface="Aptos"/>
-                <a:ea typeface="Aptos"/>
-                <a:cs typeface="Aptos"/>
+                <a:latin typeface="Microsoft YaHei"/>
+                <a:ea typeface="Microsoft YaHei"/>
+                <a:cs typeface="Microsoft YaHei"/>
               </a:rPr>
-              <a:t>SFT seed</a:t>
+              <a:t>SFT train</a:t>
             </a:r>
           </a:p>
         </p:txBody>
@@ -11699,7 +11791,7 @@
           <p:cNvPr id="18" name="">
             <a:extLst xmlns:a="http://schemas.openxmlformats.org/drawingml/2006/main">
               <a:ext uri="{FF2B5EF4-FFF2-40B4-BE49-F238E27FC236}">
-                <a16:creationId xmlns:a16="http://schemas.microsoft.com/office/drawing/2014/main" id="{54454D0B-74BE-4EC7-8A1D-B6A5BBB71C6C}"/>
+                <a16:creationId xmlns:a16="http://schemas.microsoft.com/office/drawing/2014/main" id="{E8E8F815-3A11-420C-A820-8413B852D038}"/>
               </a:ext>
             </a:extLst>
           </p:cNvPr>
@@ -11732,7 +11824,7 @@
           <p:cNvPr id="19" name="">
             <a:extLst xmlns:a="http://schemas.openxmlformats.org/drawingml/2006/main">
               <a:ext uri="{FF2B5EF4-FFF2-40B4-BE49-F238E27FC236}">
-                <a16:creationId xmlns:a16="http://schemas.microsoft.com/office/drawing/2014/main" id="{9D95B4AF-046A-48E1-8E55-D4D606504444}"/>
+                <a16:creationId xmlns:a16="http://schemas.microsoft.com/office/drawing/2014/main" id="{66ECD567-4152-4D4C-A4D1-353293109669}"/>
               </a:ext>
             </a:extLst>
           </p:cNvPr>
@@ -11765,7 +11857,7 @@
           <p:cNvPr id="20" name="">
             <a:extLst xmlns:a="http://schemas.openxmlformats.org/drawingml/2006/main">
               <a:ext uri="{FF2B5EF4-FFF2-40B4-BE49-F238E27FC236}">
-                <a16:creationId xmlns:a16="http://schemas.microsoft.com/office/drawing/2014/main" id="{433200CE-F784-4DE7-B004-62275C53D73A}"/>
+                <a16:creationId xmlns:a16="http://schemas.microsoft.com/office/drawing/2014/main" id="{FDCB2C4F-017E-4278-A6A0-C7EDA939084D}"/>
               </a:ext>
             </a:extLst>
           </p:cNvPr>
@@ -11819,7 +11911,7 @@
                 <a:ea typeface="Aptos Display"/>
                 <a:cs typeface="Aptos Display"/>
               </a:rPr>
-              <a:t>14</a:t>
+              <a:t>250</a:t>
             </a:r>
           </a:p>
         </p:txBody>
@@ -11829,7 +11921,7 @@
           <p:cNvPr id="21" name="">
             <a:extLst xmlns:a="http://schemas.openxmlformats.org/drawingml/2006/main">
               <a:ext uri="{FF2B5EF4-FFF2-40B4-BE49-F238E27FC236}">
-                <a16:creationId xmlns:a16="http://schemas.microsoft.com/office/drawing/2014/main" id="{61EC1B51-B775-458C-9BE9-D7FF355D4CDE}"/>
+                <a16:creationId xmlns:a16="http://schemas.microsoft.com/office/drawing/2014/main" id="{7DF27DE6-F652-4AC0-87D1-DE7F642F8BFC}"/>
               </a:ext>
             </a:extLst>
           </p:cNvPr>
@@ -11869,9 +11961,9 @@
                 <a:solidFill>
                   <a:srgbClr val="64748B"/>
                 </a:solidFill>
-                <a:latin typeface="Aptos"/>
-                <a:ea typeface="Aptos"/>
-                <a:cs typeface="Aptos"/>
+                <a:latin typeface="Microsoft YaHei"/>
+                <a:ea typeface="Microsoft YaHei"/>
+                <a:cs typeface="Microsoft YaHei"/>
               </a:defRPr>
             </a:pPr>
             <a:r>
@@ -11879,9 +11971,9 @@
                 <a:solidFill>
                   <a:srgbClr val="64748B"/>
                 </a:solidFill>
-                <a:latin typeface="Aptos"/>
-                <a:ea typeface="Aptos"/>
-                <a:cs typeface="Aptos"/>
+                <a:latin typeface="Microsoft YaHei"/>
+                <a:ea typeface="Microsoft YaHei"/>
+                <a:cs typeface="Microsoft YaHei"/>
               </a:rPr>
               <a:t>optimizer steps</a:t>
             </a:r>
@@ -11893,7 +11985,7 @@
           <p:cNvPr id="22" name="">
             <a:extLst xmlns:a="http://schemas.openxmlformats.org/drawingml/2006/main">
               <a:ext uri="{FF2B5EF4-FFF2-40B4-BE49-F238E27FC236}">
-                <a16:creationId xmlns:a16="http://schemas.microsoft.com/office/drawing/2014/main" id="{354B9A99-CFF2-40C6-A091-320D9C1997E7}"/>
+                <a16:creationId xmlns:a16="http://schemas.microsoft.com/office/drawing/2014/main" id="{8493A2AA-8E95-4749-9BFA-C93957B6C93C}"/>
               </a:ext>
             </a:extLst>
           </p:cNvPr>
@@ -11926,7 +12018,7 @@
           <p:cNvPr id="23" name="">
             <a:extLst xmlns:a="http://schemas.openxmlformats.org/drawingml/2006/main">
               <a:ext uri="{FF2B5EF4-FFF2-40B4-BE49-F238E27FC236}">
-                <a16:creationId xmlns:a16="http://schemas.microsoft.com/office/drawing/2014/main" id="{81F440E8-8FE8-45E1-8F46-D3B05B59224C}"/>
+                <a16:creationId xmlns:a16="http://schemas.microsoft.com/office/drawing/2014/main" id="{7DD51092-6610-4801-B2A6-68C79D6397DC}"/>
               </a:ext>
             </a:extLst>
           </p:cNvPr>
@@ -11959,7 +12051,7 @@
           <p:cNvPr id="24" name="">
             <a:extLst xmlns:a="http://schemas.openxmlformats.org/drawingml/2006/main">
               <a:ext uri="{FF2B5EF4-FFF2-40B4-BE49-F238E27FC236}">
-                <a16:creationId xmlns:a16="http://schemas.microsoft.com/office/drawing/2014/main" id="{C0C21D09-8984-4E80-B30D-3D96EF7A45B4}"/>
+                <a16:creationId xmlns:a16="http://schemas.microsoft.com/office/drawing/2014/main" id="{B0A6D68E-9194-474A-B476-8A9331793785}"/>
               </a:ext>
             </a:extLst>
           </p:cNvPr>
@@ -11999,9 +12091,9 @@
                 <a:solidFill>
                   <a:srgbClr val="121826"/>
                 </a:solidFill>
-                <a:latin typeface="Aptos"/>
-                <a:ea typeface="Aptos"/>
-                <a:cs typeface="Aptos"/>
+                <a:latin typeface="Microsoft YaHei"/>
+                <a:ea typeface="Microsoft YaHei"/>
+                <a:cs typeface="Microsoft YaHei"/>
               </a:defRPr>
             </a:pPr>
             <a:r>
@@ -12009,11 +12101,11 @@
                 <a:solidFill>
                   <a:srgbClr val="121826"/>
                 </a:solidFill>
-                <a:latin typeface="Aptos"/>
-                <a:ea typeface="Aptos"/>
-                <a:cs typeface="Aptos"/>
+                <a:latin typeface="Microsoft YaHei"/>
+                <a:ea typeface="Microsoft YaHei"/>
+                <a:cs typeface="Microsoft YaHei"/>
               </a:rPr>
-              <a:t>训练配置：4-bit LoRA/QLoRA，target modules 覆盖 attention 与 MLP 投影层，2 epochs，最终 train_loss = 1.7777。</a:t>
+              <a:t>训练配置：4-bit LoRA/QLoRA，target modules 覆盖 attention 与 MLP 投影层，2 epochs，最终 train_loss = 0.1677。</a:t>
             </a:r>
           </a:p>
         </p:txBody>
@@ -12023,7 +12115,7 @@
           <p:cNvPr id="25" name="">
             <a:extLst xmlns:a="http://schemas.openxmlformats.org/drawingml/2006/main">
               <a:ext uri="{FF2B5EF4-FFF2-40B4-BE49-F238E27FC236}">
-                <a16:creationId xmlns:a16="http://schemas.microsoft.com/office/drawing/2014/main" id="{B72C533C-DFB0-4457-A06C-6DF3E336530A}"/>
+                <a16:creationId xmlns:a16="http://schemas.microsoft.com/office/drawing/2014/main" id="{96848221-E67B-4850-A91E-6A0B561B0F95}"/>
               </a:ext>
             </a:extLst>
           </p:cNvPr>
@@ -12056,7 +12148,7 @@
           <p:cNvPr id="26" name="">
             <a:extLst xmlns:a="http://schemas.openxmlformats.org/drawingml/2006/main">
               <a:ext uri="{FF2B5EF4-FFF2-40B4-BE49-F238E27FC236}">
-                <a16:creationId xmlns:a16="http://schemas.microsoft.com/office/drawing/2014/main" id="{A00E2805-1030-414D-B289-43788ABC252C}"/>
+                <a16:creationId xmlns:a16="http://schemas.microsoft.com/office/drawing/2014/main" id="{E5E8A90F-57A1-4802-91A5-7664839D19C7}"/>
               </a:ext>
             </a:extLst>
           </p:cNvPr>
@@ -12089,7 +12181,7 @@
           <p:cNvPr id="27" name="">
             <a:extLst xmlns:a="http://schemas.openxmlformats.org/drawingml/2006/main">
               <a:ext uri="{FF2B5EF4-FFF2-40B4-BE49-F238E27FC236}">
-                <a16:creationId xmlns:a16="http://schemas.microsoft.com/office/drawing/2014/main" id="{5BD13E15-C380-4C91-92BB-04E0A32D51B9}"/>
+                <a16:creationId xmlns:a16="http://schemas.microsoft.com/office/drawing/2014/main" id="{3C3B60F5-C659-4713-B5EC-5B0E12659978}"/>
               </a:ext>
             </a:extLst>
           </p:cNvPr>
@@ -12129,9 +12221,9 @@
                 <a:solidFill>
                   <a:srgbClr val="121826"/>
                 </a:solidFill>
-                <a:latin typeface="Aptos"/>
-                <a:ea typeface="Aptos"/>
-                <a:cs typeface="Aptos"/>
+                <a:latin typeface="Microsoft YaHei"/>
+                <a:ea typeface="Microsoft YaHei"/>
+                <a:cs typeface="Microsoft YaHei"/>
               </a:defRPr>
             </a:pPr>
             <a:r>
@@ -12139,11 +12231,11 @@
                 <a:solidFill>
                   <a:srgbClr val="121826"/>
                 </a:solidFill>
-                <a:latin typeface="Aptos"/>
-                <a:ea typeface="Aptos"/>
-                <a:cs typeface="Aptos"/>
+                <a:latin typeface="Microsoft YaHei"/>
+                <a:ea typeface="Microsoft YaHei"/>
+                <a:cs typeface="Microsoft YaHei"/>
               </a:rPr>
-              <a:t>产物证据：adapter_model.safetensors 约 154MB，base_eval.jsonl、lora_eval.jsonl、训练日志与 artifact manifest 均已拉回本地。</a:t>
+              <a:t>产物证据：150 条 holdout 对比、adapter_model.safetensors 约 154MB，base/LoRA JSONL、训练日志与 artifact manifest 均已拉回本地。</a:t>
             </a:r>
           </a:p>
         </p:txBody>
@@ -12153,7 +12245,7 @@
           <p:cNvPr id="28" name="">
             <a:extLst xmlns:a="http://schemas.openxmlformats.org/drawingml/2006/main">
               <a:ext uri="{FF2B5EF4-FFF2-40B4-BE49-F238E27FC236}">
-                <a16:creationId xmlns:a16="http://schemas.microsoft.com/office/drawing/2014/main" id="{36F6C739-3054-4682-9183-5621B79C58EC}"/>
+                <a16:creationId xmlns:a16="http://schemas.microsoft.com/office/drawing/2014/main" id="{89BC66DB-4812-4F7D-837C-0B0B44E36DBD}"/>
               </a:ext>
             </a:extLst>
           </p:cNvPr>
@@ -12193,9 +12285,9 @@
                 <a:solidFill>
                   <a:srgbClr val="64748B"/>
                 </a:solidFill>
-                <a:latin typeface="Aptos"/>
-                <a:ea typeface="Aptos"/>
-                <a:cs typeface="Aptos"/>
+                <a:latin typeface="Microsoft YaHei"/>
+                <a:ea typeface="Microsoft YaHei"/>
+                <a:cs typeface="Microsoft YaHei"/>
               </a:defRPr>
             </a:pPr>
             <a:r>
@@ -12203,9 +12295,9 @@
                 <a:solidFill>
                   <a:srgbClr val="64748B"/>
                 </a:solidFill>
-                <a:latin typeface="Aptos"/>
-                <a:ea typeface="Aptos"/>
-                <a:cs typeface="Aptos"/>
+                <a:latin typeface="Microsoft YaHei"/>
+                <a:ea typeface="Microsoft YaHei"/>
+                <a:cs typeface="Microsoft YaHei"/>
               </a:rPr>
               <a:t>ShipVoice | 信息安全基础 A2</a:t>
             </a:r>
@@ -12217,7 +12309,7 @@
           <p:cNvPr id="29" name="">
             <a:extLst xmlns:a="http://schemas.openxmlformats.org/drawingml/2006/main">
               <a:ext uri="{FF2B5EF4-FFF2-40B4-BE49-F238E27FC236}">
-                <a16:creationId xmlns:a16="http://schemas.microsoft.com/office/drawing/2014/main" id="{9054282D-4F89-4006-BE75-87731C7313C3}"/>
+                <a16:creationId xmlns:a16="http://schemas.microsoft.com/office/drawing/2014/main" id="{8099F2BA-A56E-4917-BEF3-CCC2A47D863C}"/>
               </a:ext>
             </a:extLst>
           </p:cNvPr>
@@ -12257,9 +12349,9 @@
                 <a:solidFill>
                   <a:srgbClr val="64748B"/>
                 </a:solidFill>
-                <a:latin typeface="Aptos"/>
-                <a:ea typeface="Aptos"/>
-                <a:cs typeface="Aptos"/>
+                <a:latin typeface="Microsoft YaHei"/>
+                <a:ea typeface="Microsoft YaHei"/>
+                <a:cs typeface="Microsoft YaHei"/>
               </a:defRPr>
             </a:pPr>
             <a:r>
@@ -12267,9 +12359,9 @@
                 <a:solidFill>
                   <a:srgbClr val="64748B"/>
                 </a:solidFill>
-                <a:latin typeface="Aptos"/>
-                <a:ea typeface="Aptos"/>
-                <a:cs typeface="Aptos"/>
+                <a:latin typeface="Microsoft YaHei"/>
+                <a:ea typeface="Microsoft YaHei"/>
+                <a:cs typeface="Microsoft YaHei"/>
               </a:rPr>
               <a:t>07</a:t>
             </a:r>
@@ -12279,7 +12371,7 @@
     </p:spTree>
     <p:extLst>
       <p:ext uri="{BB962C8B-B14F-4D97-AF65-F5344CB8AC3E}">
-        <p14:creationId xmlns:p14="http://schemas.microsoft.com/office/powerpoint/2010/main" val="583536454"/>
+        <p14:creationId xmlns:p14="http://schemas.microsoft.com/office/powerpoint/2010/main" val="1134802644"/>
       </p:ext>
     </p:extLst>
   </p:cSld>
@@ -12303,7 +12395,7 @@
           <p:cNvPr id="1" name="">
             <a:extLst xmlns:a="http://schemas.openxmlformats.org/drawingml/2006/main">
               <a:ext uri="{FF2B5EF4-FFF2-40B4-BE49-F238E27FC236}">
-                <a16:creationId xmlns:a16="http://schemas.microsoft.com/office/drawing/2014/main" id="{59511163-E0C9-4D1D-8FDA-2B51450738BE}"/>
+                <a16:creationId xmlns:a16="http://schemas.microsoft.com/office/drawing/2014/main" id="{EB417022-88DE-44C0-8D6A-0A5B5C1DC073}"/>
               </a:ext>
             </a:extLst>
           </p:cNvPr>
@@ -12336,7 +12428,7 @@
           <p:cNvPr id="2" name="">
             <a:extLst xmlns:a="http://schemas.openxmlformats.org/drawingml/2006/main">
               <a:ext uri="{FF2B5EF4-FFF2-40B4-BE49-F238E27FC236}">
-                <a16:creationId xmlns:a16="http://schemas.microsoft.com/office/drawing/2014/main" id="{6C75F86E-8472-4CE5-9DA7-CADE9C7E6D2E}"/>
+                <a16:creationId xmlns:a16="http://schemas.microsoft.com/office/drawing/2014/main" id="{09BAF73A-6B4A-44CD-8907-693A6CC40F90}"/>
               </a:ext>
             </a:extLst>
           </p:cNvPr>
@@ -12369,7 +12461,7 @@
           <p:cNvPr id="3" name="">
             <a:extLst xmlns:a="http://schemas.openxmlformats.org/drawingml/2006/main">
               <a:ext uri="{FF2B5EF4-FFF2-40B4-BE49-F238E27FC236}">
-                <a16:creationId xmlns:a16="http://schemas.microsoft.com/office/drawing/2014/main" id="{6F4F391C-C9FC-4A1F-A2AF-DA2683F44740}"/>
+                <a16:creationId xmlns:a16="http://schemas.microsoft.com/office/drawing/2014/main" id="{B4074C97-44F8-4F65-87FF-B5A7A4E13DEC}"/>
               </a:ext>
             </a:extLst>
           </p:cNvPr>
@@ -12409,9 +12501,9 @@
                 <a:solidFill>
                   <a:srgbClr val="2563EB"/>
                 </a:solidFill>
-                <a:latin typeface="Aptos"/>
-                <a:ea typeface="Aptos"/>
-                <a:cs typeface="Aptos"/>
+                <a:latin typeface="Microsoft YaHei"/>
+                <a:ea typeface="Microsoft YaHei"/>
+                <a:cs typeface="Microsoft YaHei"/>
               </a:defRPr>
             </a:pPr>
             <a:r>
@@ -12419,9 +12511,9 @@
                 <a:solidFill>
                   <a:srgbClr val="2563EB"/>
                 </a:solidFill>
-                <a:latin typeface="Aptos"/>
-                <a:ea typeface="Aptos"/>
-                <a:cs typeface="Aptos"/>
+                <a:latin typeface="Microsoft YaHei"/>
+                <a:ea typeface="Microsoft YaHei"/>
+                <a:cs typeface="Microsoft YaHei"/>
               </a:rPr>
               <a:t>EVALUATION</a:t>
             </a:r>
@@ -12433,7 +12525,7 @@
           <p:cNvPr id="4" name="">
             <a:extLst xmlns:a="http://schemas.openxmlformats.org/drawingml/2006/main">
               <a:ext uri="{FF2B5EF4-FFF2-40B4-BE49-F238E27FC236}">
-                <a16:creationId xmlns:a16="http://schemas.microsoft.com/office/drawing/2014/main" id="{CB697E39-EFD0-4574-9CE6-1CB47F401FE9}"/>
+                <a16:creationId xmlns:a16="http://schemas.microsoft.com/office/drawing/2014/main" id="{87C194F6-DF5B-432F-8669-E2FCAC8435BE}"/>
               </a:ext>
             </a:extLst>
           </p:cNvPr>
@@ -12487,7 +12579,7 @@
                 <a:ea typeface="Aptos Display"/>
                 <a:cs typeface="Aptos Display"/>
               </a:rPr>
-              <a:t>Base 更稳，LoRA 更领域化；最终系统选择“门控 + RAG + 可选 LoRA”</a:t>
+              <a:t>Base 与 LoRA 对比：微调用于增强，不替代门控</a:t>
             </a:r>
           </a:p>
         </p:txBody>
@@ -12497,7 +12589,7 @@
           <p:cNvPr id="5" name="">
             <a:extLst xmlns:a="http://schemas.openxmlformats.org/drawingml/2006/main">
               <a:ext uri="{FF2B5EF4-FFF2-40B4-BE49-F238E27FC236}">
-                <a16:creationId xmlns:a16="http://schemas.microsoft.com/office/drawing/2014/main" id="{3A0C0766-FF2D-4850-AADB-C4B346AC882B}"/>
+                <a16:creationId xmlns:a16="http://schemas.microsoft.com/office/drawing/2014/main" id="{6FB0CAE3-0FCF-47DF-A836-02AB3898B3BC}"/>
               </a:ext>
             </a:extLst>
           </p:cNvPr>
@@ -12537,9 +12629,9 @@
                 <a:solidFill>
                   <a:srgbClr val="64748B"/>
                 </a:solidFill>
-                <a:latin typeface="Aptos"/>
-                <a:ea typeface="Aptos"/>
-                <a:cs typeface="Aptos"/>
+                <a:latin typeface="Microsoft YaHei"/>
+                <a:ea typeface="Microsoft YaHei"/>
+                <a:cs typeface="Microsoft YaHei"/>
               </a:defRPr>
             </a:pPr>
             <a:r>
@@ -12547,9 +12639,9 @@
                 <a:solidFill>
                   <a:srgbClr val="64748B"/>
                 </a:solidFill>
-                <a:latin typeface="Aptos"/>
-                <a:ea typeface="Aptos"/>
-                <a:cs typeface="Aptos"/>
+                <a:latin typeface="Microsoft YaHei"/>
+                <a:ea typeface="Microsoft YaHei"/>
+                <a:cs typeface="Microsoft YaHei"/>
               </a:rPr>
               <a:t>实验结果支持安全架构，而不是盲目吹微调。</a:t>
             </a:r>
@@ -12561,7 +12653,7 @@
           <p:cNvPr id="6" name="">
             <a:extLst xmlns:a="http://schemas.openxmlformats.org/drawingml/2006/main">
               <a:ext uri="{FF2B5EF4-FFF2-40B4-BE49-F238E27FC236}">
-                <a16:creationId xmlns:a16="http://schemas.microsoft.com/office/drawing/2014/main" id="{A0F85555-E03E-4F8C-BA19-2EBB4B03F9A4}"/>
+                <a16:creationId xmlns:a16="http://schemas.microsoft.com/office/drawing/2014/main" id="{400E1945-75CC-4FC0-BAB7-68357E7928E0}"/>
               </a:ext>
             </a:extLst>
           </p:cNvPr>
@@ -12601,9 +12693,9 @@
                 <a:solidFill>
                   <a:srgbClr val="121826"/>
                 </a:solidFill>
-                <a:latin typeface="Aptos"/>
-                <a:ea typeface="Aptos"/>
-                <a:cs typeface="Aptos"/>
+                <a:latin typeface="Microsoft YaHei"/>
+                <a:ea typeface="Microsoft YaHei"/>
+                <a:cs typeface="Microsoft YaHei"/>
               </a:defRPr>
             </a:pPr>
             <a:r>
@@ -12611,9 +12703,9 @@
                 <a:solidFill>
                   <a:srgbClr val="121826"/>
                 </a:solidFill>
-                <a:latin typeface="Aptos"/>
-                <a:ea typeface="Aptos"/>
-                <a:cs typeface="Aptos"/>
+                <a:latin typeface="Microsoft YaHei"/>
+                <a:ea typeface="Microsoft YaHei"/>
+                <a:cs typeface="Microsoft YaHei"/>
               </a:rPr>
               <a:t>平均回答长度</a:t>
             </a:r>
@@ -12625,7 +12717,7 @@
           <p:cNvPr id="7" name="">
             <a:extLst xmlns:a="http://schemas.openxmlformats.org/drawingml/2006/main">
               <a:ext uri="{FF2B5EF4-FFF2-40B4-BE49-F238E27FC236}">
-                <a16:creationId xmlns:a16="http://schemas.microsoft.com/office/drawing/2014/main" id="{F2EE66E4-8AEA-444C-8CB4-0CAB8B24868E}"/>
+                <a16:creationId xmlns:a16="http://schemas.microsoft.com/office/drawing/2014/main" id="{2CBDCDC3-2B35-432B-A742-8B5D7C4C76C5}"/>
               </a:ext>
             </a:extLst>
           </p:cNvPr>
@@ -12637,7 +12729,7 @@
         <p:spPr>
           <a:xfrm xmlns:a="http://schemas.openxmlformats.org/drawingml/2006/main">
             <a:off x="1143000" y="2724150"/>
-            <a:ext cx="6112972" cy="400050"/>
+            <a:ext cx="6583680" cy="400050"/>
           </a:xfrm>
           <a:prstGeom xmlns:a="http://schemas.openxmlformats.org/drawingml/2006/main" prst="rect">
             <a:avLst/>
@@ -12658,18 +12750,18 @@
           <p:cNvPr id="8" name="">
             <a:extLst xmlns:a="http://schemas.openxmlformats.org/drawingml/2006/main">
               <a:ext uri="{FF2B5EF4-FFF2-40B4-BE49-F238E27FC236}">
-                <a16:creationId xmlns:a16="http://schemas.microsoft.com/office/drawing/2014/main" id="{C9BEEF6B-EC6F-4D7E-878E-1DF078070005}"/>
-              </a:ext>
-            </a:extLst>
-          </p:cNvPr>
-          <p:cNvSpPr>
-            <a:spLocks xmlns:a="http://schemas.openxmlformats.org/drawingml/2006/main" noGrp="1"/>
-          </p:cNvSpPr>
-          <p:nvPr/>
-        </p:nvSpPr>
-        <p:spPr>
-          <a:xfrm xmlns:a="http://schemas.openxmlformats.org/drawingml/2006/main">
-            <a:off x="7427422" y="2781300"/>
+                <a16:creationId xmlns:a16="http://schemas.microsoft.com/office/drawing/2014/main" id="{9FC64A70-A456-4540-8F4D-661D213D3BC7}"/>
+              </a:ext>
+            </a:extLst>
+          </p:cNvPr>
+          <p:cNvSpPr>
+            <a:spLocks xmlns:a="http://schemas.openxmlformats.org/drawingml/2006/main" noGrp="1"/>
+          </p:cNvSpPr>
+          <p:nvPr/>
+        </p:nvSpPr>
+        <p:spPr>
+          <a:xfrm xmlns:a="http://schemas.openxmlformats.org/drawingml/2006/main">
+            <a:off x="7898130" y="2781300"/>
             <a:ext cx="2286000" cy="266700"/>
           </a:xfrm>
           <a:prstGeom xmlns:a="http://schemas.openxmlformats.org/drawingml/2006/main" prst="rect">
@@ -12698,9 +12790,9 @@
                 <a:solidFill>
                   <a:srgbClr val="121826"/>
                 </a:solidFill>
-                <a:latin typeface="Aptos"/>
-                <a:ea typeface="Aptos"/>
-                <a:cs typeface="Aptos"/>
+                <a:latin typeface="Microsoft YaHei"/>
+                <a:ea typeface="Microsoft YaHei"/>
+                <a:cs typeface="Microsoft YaHei"/>
               </a:defRPr>
             </a:pPr>
             <a:r>
@@ -12708,11 +12800,11 @@
                 <a:solidFill>
                   <a:srgbClr val="121826"/>
                 </a:solidFill>
-                <a:latin typeface="Aptos"/>
-                <a:ea typeface="Aptos"/>
-                <a:cs typeface="Aptos"/>
+                <a:latin typeface="Microsoft YaHei"/>
+                <a:ea typeface="Microsoft YaHei"/>
+                <a:cs typeface="Microsoft YaHei"/>
               </a:rPr>
-              <a:t>Base 196.1 chars</a:t>
+              <a:t>Base 211.2 chars</a:t>
             </a:r>
           </a:p>
         </p:txBody>
@@ -12722,7 +12814,7 @@
           <p:cNvPr id="9" name="">
             <a:extLst xmlns:a="http://schemas.openxmlformats.org/drawingml/2006/main">
               <a:ext uri="{FF2B5EF4-FFF2-40B4-BE49-F238E27FC236}">
-                <a16:creationId xmlns:a16="http://schemas.microsoft.com/office/drawing/2014/main" id="{5BD7B5ED-4706-4B91-9228-3DE648C00866}"/>
+                <a16:creationId xmlns:a16="http://schemas.microsoft.com/office/drawing/2014/main" id="{A0750265-D6F4-4218-BD01-ECAFCC1D677D}"/>
               </a:ext>
             </a:extLst>
           </p:cNvPr>
@@ -12734,7 +12826,7 @@
         <p:spPr>
           <a:xfrm xmlns:a="http://schemas.openxmlformats.org/drawingml/2006/main">
             <a:off x="1143000" y="3486150"/>
-            <a:ext cx="4482638" cy="400050"/>
+            <a:ext cx="5025044" cy="400050"/>
           </a:xfrm>
           <a:prstGeom xmlns:a="http://schemas.openxmlformats.org/drawingml/2006/main" prst="rect">
             <a:avLst/>
@@ -12755,18 +12847,18 @@
           <p:cNvPr id="10" name="">
             <a:extLst xmlns:a="http://schemas.openxmlformats.org/drawingml/2006/main">
               <a:ext uri="{FF2B5EF4-FFF2-40B4-BE49-F238E27FC236}">
-                <a16:creationId xmlns:a16="http://schemas.microsoft.com/office/drawing/2014/main" id="{E7CDEF0B-EC7E-419A-8E98-C03D7D0B05AF}"/>
-              </a:ext>
-            </a:extLst>
-          </p:cNvPr>
-          <p:cNvSpPr>
-            <a:spLocks xmlns:a="http://schemas.openxmlformats.org/drawingml/2006/main" noGrp="1"/>
-          </p:cNvSpPr>
-          <p:nvPr/>
-        </p:nvSpPr>
-        <p:spPr>
-          <a:xfrm xmlns:a="http://schemas.openxmlformats.org/drawingml/2006/main">
-            <a:off x="5797088" y="3543300"/>
+                <a16:creationId xmlns:a16="http://schemas.microsoft.com/office/drawing/2014/main" id="{6DDCF919-9952-4F13-B9F4-46A44371A9CB}"/>
+              </a:ext>
+            </a:extLst>
+          </p:cNvPr>
+          <p:cNvSpPr>
+            <a:spLocks xmlns:a="http://schemas.openxmlformats.org/drawingml/2006/main" noGrp="1"/>
+          </p:cNvSpPr>
+          <p:nvPr/>
+        </p:nvSpPr>
+        <p:spPr>
+          <a:xfrm xmlns:a="http://schemas.openxmlformats.org/drawingml/2006/main">
+            <a:off x="6339494" y="3543300"/>
             <a:ext cx="2286000" cy="266700"/>
           </a:xfrm>
           <a:prstGeom xmlns:a="http://schemas.openxmlformats.org/drawingml/2006/main" prst="rect">
@@ -12795,9 +12887,9 @@
                 <a:solidFill>
                   <a:srgbClr val="121826"/>
                 </a:solidFill>
-                <a:latin typeface="Aptos"/>
-                <a:ea typeface="Aptos"/>
-                <a:cs typeface="Aptos"/>
+                <a:latin typeface="Microsoft YaHei"/>
+                <a:ea typeface="Microsoft YaHei"/>
+                <a:cs typeface="Microsoft YaHei"/>
               </a:defRPr>
             </a:pPr>
             <a:r>
@@ -12805,11 +12897,11 @@
                 <a:solidFill>
                   <a:srgbClr val="121826"/>
                 </a:solidFill>
-                <a:latin typeface="Aptos"/>
-                <a:ea typeface="Aptos"/>
-                <a:cs typeface="Aptos"/>
+                <a:latin typeface="Microsoft YaHei"/>
+                <a:ea typeface="Microsoft YaHei"/>
+                <a:cs typeface="Microsoft YaHei"/>
               </a:rPr>
-              <a:t>LoRA 143.8 chars</a:t>
+              <a:t>LoRA 161.2 chars</a:t>
             </a:r>
           </a:p>
         </p:txBody>
@@ -12819,7 +12911,7 @@
           <p:cNvPr id="11" name="">
             <a:extLst xmlns:a="http://schemas.openxmlformats.org/drawingml/2006/main">
               <a:ext uri="{FF2B5EF4-FFF2-40B4-BE49-F238E27FC236}">
-                <a16:creationId xmlns:a16="http://schemas.microsoft.com/office/drawing/2014/main" id="{541ABD00-A157-4AFC-A83F-FF3055D54DB9}"/>
+                <a16:creationId xmlns:a16="http://schemas.microsoft.com/office/drawing/2014/main" id="{29860A81-7A54-4E60-BD52-6C1E0FE0259D}"/>
               </a:ext>
             </a:extLst>
           </p:cNvPr>
@@ -12852,7 +12944,7 @@
           <p:cNvPr id="12" name="">
             <a:extLst xmlns:a="http://schemas.openxmlformats.org/drawingml/2006/main">
               <a:ext uri="{FF2B5EF4-FFF2-40B4-BE49-F238E27FC236}">
-                <a16:creationId xmlns:a16="http://schemas.microsoft.com/office/drawing/2014/main" id="{E78DBBD1-3462-4943-99EA-026467E6AFA6}"/>
+                <a16:creationId xmlns:a16="http://schemas.microsoft.com/office/drawing/2014/main" id="{7377DDD9-48E9-4075-9F5D-2EB21C14913E}"/>
               </a:ext>
             </a:extLst>
           </p:cNvPr>
@@ -12885,7 +12977,7 @@
           <p:cNvPr id="13" name="">
             <a:extLst xmlns:a="http://schemas.openxmlformats.org/drawingml/2006/main">
               <a:ext uri="{FF2B5EF4-FFF2-40B4-BE49-F238E27FC236}">
-                <a16:creationId xmlns:a16="http://schemas.microsoft.com/office/drawing/2014/main" id="{F7547052-2BD9-4489-BDD9-432AD552F4BC}"/>
+                <a16:creationId xmlns:a16="http://schemas.microsoft.com/office/drawing/2014/main" id="{4FE8B685-304F-4E95-9DFD-607DE8678B64}"/>
               </a:ext>
             </a:extLst>
           </p:cNvPr>
@@ -12925,9 +13017,9 @@
                 <a:solidFill>
                   <a:srgbClr val="121826"/>
                 </a:solidFill>
-                <a:latin typeface="Aptos"/>
-                <a:ea typeface="Aptos"/>
-                <a:cs typeface="Aptos"/>
+                <a:latin typeface="Microsoft YaHei"/>
+                <a:ea typeface="Microsoft YaHei"/>
+                <a:cs typeface="Microsoft YaHei"/>
               </a:defRPr>
             </a:pPr>
             <a:r>
@@ -12935,11 +13027,11 @@
                 <a:solidFill>
                   <a:srgbClr val="121826"/>
                 </a:solidFill>
-                <a:latin typeface="Aptos"/>
-                <a:ea typeface="Aptos"/>
-                <a:cs typeface="Aptos"/>
+                <a:latin typeface="Microsoft YaHei"/>
+                <a:ea typeface="Microsoft YaHei"/>
+                <a:cs typeface="Microsoft YaHei"/>
               </a:rPr>
-              <a:t>Base：off-domain 拒答更稳，重复更少，适合作为安全基线。</a:t>
+              <a:t>Base：150 条 holdout 中更像通用助手，off-domain 拒答 1/10。</a:t>
             </a:r>
           </a:p>
         </p:txBody>
@@ -12949,7 +13041,7 @@
           <p:cNvPr id="14" name="">
             <a:extLst xmlns:a="http://schemas.openxmlformats.org/drawingml/2006/main">
               <a:ext uri="{FF2B5EF4-FFF2-40B4-BE49-F238E27FC236}">
-                <a16:creationId xmlns:a16="http://schemas.microsoft.com/office/drawing/2014/main" id="{BB8ABA91-98CF-4A6E-B339-EB5BFA36FE29}"/>
+                <a16:creationId xmlns:a16="http://schemas.microsoft.com/office/drawing/2014/main" id="{7A9BA17C-0A45-4436-834B-3471A02A1701}"/>
               </a:ext>
             </a:extLst>
           </p:cNvPr>
@@ -12982,7 +13074,7 @@
           <p:cNvPr id="15" name="">
             <a:extLst xmlns:a="http://schemas.openxmlformats.org/drawingml/2006/main">
               <a:ext uri="{FF2B5EF4-FFF2-40B4-BE49-F238E27FC236}">
-                <a16:creationId xmlns:a16="http://schemas.microsoft.com/office/drawing/2014/main" id="{D59F2DB2-D0CB-4CB8-9E30-2E5CBEBBE411}"/>
+                <a16:creationId xmlns:a16="http://schemas.microsoft.com/office/drawing/2014/main" id="{22616C15-62EB-4F91-B78E-CE7406FBA79D}"/>
               </a:ext>
             </a:extLst>
           </p:cNvPr>
@@ -13015,7 +13107,7 @@
           <p:cNvPr id="16" name="">
             <a:extLst xmlns:a="http://schemas.openxmlformats.org/drawingml/2006/main">
               <a:ext uri="{FF2B5EF4-FFF2-40B4-BE49-F238E27FC236}">
-                <a16:creationId xmlns:a16="http://schemas.microsoft.com/office/drawing/2014/main" id="{109463BE-341A-4287-B4C3-AB448937F8A6}"/>
+                <a16:creationId xmlns:a16="http://schemas.microsoft.com/office/drawing/2014/main" id="{A017D3E2-8D09-483A-AAE2-EAB915E5F822}"/>
               </a:ext>
             </a:extLst>
           </p:cNvPr>
@@ -13055,9 +13147,9 @@
                 <a:solidFill>
                   <a:srgbClr val="121826"/>
                 </a:solidFill>
-                <a:latin typeface="Aptos"/>
-                <a:ea typeface="Aptos"/>
-                <a:cs typeface="Aptos"/>
+                <a:latin typeface="Microsoft YaHei"/>
+                <a:ea typeface="Microsoft YaHei"/>
+                <a:cs typeface="Microsoft YaHei"/>
               </a:defRPr>
             </a:pPr>
             <a:r>
@@ -13065,11 +13157,11 @@
                 <a:solidFill>
                   <a:srgbClr val="121826"/>
                 </a:solidFill>
-                <a:latin typeface="Aptos"/>
-                <a:ea typeface="Aptos"/>
-                <a:cs typeface="Aptos"/>
+                <a:latin typeface="Microsoft YaHei"/>
+                <a:ea typeface="Microsoft YaHei"/>
+                <a:cs typeface="Microsoft YaHei"/>
               </a:rPr>
-              <a:t>LoRA：回答更短、更像船厂安全作业提示，领域风格更一致。</a:t>
+              <a:t>LoRA：安全类拒答从 12 提升到 38，off-domain 拒答达到 10/10。</a:t>
             </a:r>
           </a:p>
         </p:txBody>
@@ -13079,7 +13171,7 @@
           <p:cNvPr id="17" name="">
             <a:extLst xmlns:a="http://schemas.openxmlformats.org/drawingml/2006/main">
               <a:ext uri="{FF2B5EF4-FFF2-40B4-BE49-F238E27FC236}">
-                <a16:creationId xmlns:a16="http://schemas.microsoft.com/office/drawing/2014/main" id="{6547CBB0-93A9-4423-B5BE-354F11DD3A68}"/>
+                <a16:creationId xmlns:a16="http://schemas.microsoft.com/office/drawing/2014/main" id="{916F2FB3-ADD3-49BD-B052-E85AD14195E1}"/>
               </a:ext>
             </a:extLst>
           </p:cNvPr>
@@ -13112,7 +13204,7 @@
           <p:cNvPr id="18" name="">
             <a:extLst xmlns:a="http://schemas.openxmlformats.org/drawingml/2006/main">
               <a:ext uri="{FF2B5EF4-FFF2-40B4-BE49-F238E27FC236}">
-                <a16:creationId xmlns:a16="http://schemas.microsoft.com/office/drawing/2014/main" id="{DDDCE771-E1BF-40A0-A54C-3AF15E0CFDBB}"/>
+                <a16:creationId xmlns:a16="http://schemas.microsoft.com/office/drawing/2014/main" id="{A7C4E34C-C904-416D-BEEB-8930245989D3}"/>
               </a:ext>
             </a:extLst>
           </p:cNvPr>
@@ -13145,7 +13237,7 @@
           <p:cNvPr id="19" name="">
             <a:extLst xmlns:a="http://schemas.openxmlformats.org/drawingml/2006/main">
               <a:ext uri="{FF2B5EF4-FFF2-40B4-BE49-F238E27FC236}">
-                <a16:creationId xmlns:a16="http://schemas.microsoft.com/office/drawing/2014/main" id="{ECFA2260-A523-4F21-A4D5-CC200D7A4D99}"/>
+                <a16:creationId xmlns:a16="http://schemas.microsoft.com/office/drawing/2014/main" id="{0933D359-6E6F-4833-BE17-FF5AB525188F}"/>
               </a:ext>
             </a:extLst>
           </p:cNvPr>
@@ -13185,9 +13277,9 @@
                 <a:solidFill>
                   <a:srgbClr val="121826"/>
                 </a:solidFill>
-                <a:latin typeface="Aptos"/>
-                <a:ea typeface="Aptos"/>
-                <a:cs typeface="Aptos"/>
+                <a:latin typeface="Microsoft YaHei"/>
+                <a:ea typeface="Microsoft YaHei"/>
+                <a:cs typeface="Microsoft YaHei"/>
               </a:defRPr>
             </a:pPr>
             <a:r>
@@ -13195,11 +13287,11 @@
                 <a:solidFill>
                   <a:srgbClr val="121826"/>
                 </a:solidFill>
-                <a:latin typeface="Aptos"/>
-                <a:ea typeface="Aptos"/>
-                <a:cs typeface="Aptos"/>
+                <a:latin typeface="Microsoft YaHei"/>
+                <a:ea typeface="Microsoft YaHei"/>
+                <a:cs typeface="Microsoft YaHei"/>
               </a:rPr>
-              <a:t>限制：LoRA 对 off-domain 有轻微模板化过拟合，不能裸用。</a:t>
+              <a:t>限制：LoRA 仍不能裸用，正式链路必须先过安全门控和 RAG。</a:t>
             </a:r>
           </a:p>
         </p:txBody>
@@ -13209,7 +13301,7 @@
           <p:cNvPr id="20" name="">
             <a:extLst xmlns:a="http://schemas.openxmlformats.org/drawingml/2006/main">
               <a:ext uri="{FF2B5EF4-FFF2-40B4-BE49-F238E27FC236}">
-                <a16:creationId xmlns:a16="http://schemas.microsoft.com/office/drawing/2014/main" id="{2B64DD00-D34F-46EB-B4E0-447CB6028C34}"/>
+                <a16:creationId xmlns:a16="http://schemas.microsoft.com/office/drawing/2014/main" id="{DEA11181-405E-4C44-A1E0-28C461062428}"/>
               </a:ext>
             </a:extLst>
           </p:cNvPr>
@@ -13249,9 +13341,9 @@
                 <a:solidFill>
                   <a:srgbClr val="64748B"/>
                 </a:solidFill>
-                <a:latin typeface="Aptos"/>
-                <a:ea typeface="Aptos"/>
-                <a:cs typeface="Aptos"/>
+                <a:latin typeface="Microsoft YaHei"/>
+                <a:ea typeface="Microsoft YaHei"/>
+                <a:cs typeface="Microsoft YaHei"/>
               </a:defRPr>
             </a:pPr>
             <a:r>
@@ -13259,9 +13351,9 @@
                 <a:solidFill>
                   <a:srgbClr val="64748B"/>
                 </a:solidFill>
-                <a:latin typeface="Aptos"/>
-                <a:ea typeface="Aptos"/>
-                <a:cs typeface="Aptos"/>
+                <a:latin typeface="Microsoft YaHei"/>
+                <a:ea typeface="Microsoft YaHei"/>
+                <a:cs typeface="Microsoft YaHei"/>
               </a:rPr>
               <a:t>ShipVoice | 信息安全基础 A2</a:t>
             </a:r>
@@ -13273,7 +13365,7 @@
           <p:cNvPr id="21" name="">
             <a:extLst xmlns:a="http://schemas.openxmlformats.org/drawingml/2006/main">
               <a:ext uri="{FF2B5EF4-FFF2-40B4-BE49-F238E27FC236}">
-                <a16:creationId xmlns:a16="http://schemas.microsoft.com/office/drawing/2014/main" id="{BC09BD20-A7B8-4EB4-AA40-B2413261AFC0}"/>
+                <a16:creationId xmlns:a16="http://schemas.microsoft.com/office/drawing/2014/main" id="{1F81D41A-EEC0-4B69-A598-E3D6F1E8258B}"/>
               </a:ext>
             </a:extLst>
           </p:cNvPr>
@@ -13313,9 +13405,9 @@
                 <a:solidFill>
                   <a:srgbClr val="64748B"/>
                 </a:solidFill>
-                <a:latin typeface="Aptos"/>
-                <a:ea typeface="Aptos"/>
-                <a:cs typeface="Aptos"/>
+                <a:latin typeface="Microsoft YaHei"/>
+                <a:ea typeface="Microsoft YaHei"/>
+                <a:cs typeface="Microsoft YaHei"/>
               </a:defRPr>
             </a:pPr>
             <a:r>
@@ -13323,9 +13415,9 @@
                 <a:solidFill>
                   <a:srgbClr val="64748B"/>
                 </a:solidFill>
-                <a:latin typeface="Aptos"/>
-                <a:ea typeface="Aptos"/>
-                <a:cs typeface="Aptos"/>
+                <a:latin typeface="Microsoft YaHei"/>
+                <a:ea typeface="Microsoft YaHei"/>
+                <a:cs typeface="Microsoft YaHei"/>
               </a:rPr>
               <a:t>08</a:t>
             </a:r>
@@ -13335,7 +13427,7 @@
     </p:spTree>
     <p:extLst>
       <p:ext uri="{BB962C8B-B14F-4D97-AF65-F5344CB8AC3E}">
-        <p14:creationId xmlns:p14="http://schemas.microsoft.com/office/powerpoint/2010/main" val="1729220851"/>
+        <p14:creationId xmlns:p14="http://schemas.microsoft.com/office/powerpoint/2010/main" val="102026926"/>
       </p:ext>
     </p:extLst>
   </p:cSld>
@@ -13359,7 +13451,7 @@
           <p:cNvPr id="1" name="">
             <a:extLst xmlns:a="http://schemas.openxmlformats.org/drawingml/2006/main">
               <a:ext uri="{FF2B5EF4-FFF2-40B4-BE49-F238E27FC236}">
-                <a16:creationId xmlns:a16="http://schemas.microsoft.com/office/drawing/2014/main" id="{913AD425-3C7D-4C9E-A82F-594F15129F08}"/>
+                <a16:creationId xmlns:a16="http://schemas.microsoft.com/office/drawing/2014/main" id="{22FF5BCE-635A-4E0F-8B11-217725A9EF35}"/>
               </a:ext>
             </a:extLst>
           </p:cNvPr>
@@ -13392,7 +13484,7 @@
           <p:cNvPr id="2" name="">
             <a:extLst xmlns:a="http://schemas.openxmlformats.org/drawingml/2006/main">
               <a:ext uri="{FF2B5EF4-FFF2-40B4-BE49-F238E27FC236}">
-                <a16:creationId xmlns:a16="http://schemas.microsoft.com/office/drawing/2014/main" id="{504F3250-8AEA-4201-A4B3-D2CD95167E86}"/>
+                <a16:creationId xmlns:a16="http://schemas.microsoft.com/office/drawing/2014/main" id="{F872FBD2-2B6B-40BE-ABC7-A0D41F866D53}"/>
               </a:ext>
             </a:extLst>
           </p:cNvPr>
@@ -13425,7 +13517,7 @@
           <p:cNvPr id="3" name="">
             <a:extLst xmlns:a="http://schemas.openxmlformats.org/drawingml/2006/main">
               <a:ext uri="{FF2B5EF4-FFF2-40B4-BE49-F238E27FC236}">
-                <a16:creationId xmlns:a16="http://schemas.microsoft.com/office/drawing/2014/main" id="{A7619A32-A695-4517-AD6A-53E627CDC184}"/>
+                <a16:creationId xmlns:a16="http://schemas.microsoft.com/office/drawing/2014/main" id="{3A677FBA-694F-4767-986B-F4317A7CF366}"/>
               </a:ext>
             </a:extLst>
           </p:cNvPr>
@@ -13465,9 +13557,9 @@
                 <a:solidFill>
                   <a:srgbClr val="2563EB"/>
                 </a:solidFill>
-                <a:latin typeface="Aptos"/>
-                <a:ea typeface="Aptos"/>
-                <a:cs typeface="Aptos"/>
+                <a:latin typeface="Microsoft YaHei"/>
+                <a:ea typeface="Microsoft YaHei"/>
+                <a:cs typeface="Microsoft YaHei"/>
               </a:defRPr>
             </a:pPr>
             <a:r>
@@ -13475,9 +13567,9 @@
                 <a:solidFill>
                   <a:srgbClr val="2563EB"/>
                 </a:solidFill>
-                <a:latin typeface="Aptos"/>
-                <a:ea typeface="Aptos"/>
-                <a:cs typeface="Aptos"/>
+                <a:latin typeface="Microsoft YaHei"/>
+                <a:ea typeface="Microsoft YaHei"/>
+                <a:cs typeface="Microsoft YaHei"/>
               </a:rPr>
               <a:t>REPRODUCIBILITY</a:t>
             </a:r>
@@ -13489,7 +13581,7 @@
           <p:cNvPr id="4" name="">
             <a:extLst xmlns:a="http://schemas.openxmlformats.org/drawingml/2006/main">
               <a:ext uri="{FF2B5EF4-FFF2-40B4-BE49-F238E27FC236}">
-                <a16:creationId xmlns:a16="http://schemas.microsoft.com/office/drawing/2014/main" id="{35DB30E7-7D36-4CD6-9D48-340710F5BE85}"/>
+                <a16:creationId xmlns:a16="http://schemas.microsoft.com/office/drawing/2014/main" id="{AEB673A6-CFCC-4E6A-A916-1C201167D7C6}"/>
               </a:ext>
             </a:extLst>
           </p:cNvPr>
@@ -13553,7 +13645,7 @@
           <p:cNvPr id="5" name="">
             <a:extLst xmlns:a="http://schemas.openxmlformats.org/drawingml/2006/main">
               <a:ext uri="{FF2B5EF4-FFF2-40B4-BE49-F238E27FC236}">
-                <a16:creationId xmlns:a16="http://schemas.microsoft.com/office/drawing/2014/main" id="{8F364EC6-5C79-495E-AD19-0E29F800296E}"/>
+                <a16:creationId xmlns:a16="http://schemas.microsoft.com/office/drawing/2014/main" id="{21B7F081-C1BB-4776-946B-AD249F28EEEE}"/>
               </a:ext>
             </a:extLst>
           </p:cNvPr>
@@ -13593,9 +13685,9 @@
                 <a:solidFill>
                   <a:srgbClr val="64748B"/>
                 </a:solidFill>
-                <a:latin typeface="Aptos"/>
-                <a:ea typeface="Aptos"/>
-                <a:cs typeface="Aptos"/>
+                <a:latin typeface="Microsoft YaHei"/>
+                <a:ea typeface="Microsoft YaHei"/>
+                <a:cs typeface="Microsoft YaHei"/>
               </a:defRPr>
             </a:pPr>
             <a:r>
@@ -13603,9 +13695,9 @@
                 <a:solidFill>
                   <a:srgbClr val="64748B"/>
                 </a:solidFill>
-                <a:latin typeface="Aptos"/>
-                <a:ea typeface="Aptos"/>
-                <a:cs typeface="Aptos"/>
+                <a:latin typeface="Microsoft YaHei"/>
+                <a:ea typeface="Microsoft YaHei"/>
+                <a:cs typeface="Microsoft YaHei"/>
               </a:rPr>
               <a:t>老师可以从 README 跑到验证脚本。</a:t>
             </a:r>
@@ -13617,7 +13709,7 @@
           <p:cNvPr id="6" name="">
             <a:extLst xmlns:a="http://schemas.openxmlformats.org/drawingml/2006/main">
               <a:ext uri="{FF2B5EF4-FFF2-40B4-BE49-F238E27FC236}">
-                <a16:creationId xmlns:a16="http://schemas.microsoft.com/office/drawing/2014/main" id="{EB75E255-3690-4B0E-826B-BC08F804E70D}"/>
+                <a16:creationId xmlns:a16="http://schemas.microsoft.com/office/drawing/2014/main" id="{D1B0F387-746E-445B-8A00-42D780D1BFE6}"/>
               </a:ext>
             </a:extLst>
           </p:cNvPr>
@@ -13650,7 +13742,7 @@
           <p:cNvPr id="7" name="">
             <a:extLst xmlns:a="http://schemas.openxmlformats.org/drawingml/2006/main">
               <a:ext uri="{FF2B5EF4-FFF2-40B4-BE49-F238E27FC236}">
-                <a16:creationId xmlns:a16="http://schemas.microsoft.com/office/drawing/2014/main" id="{F477BF03-B5F8-4094-969D-75392CC167C3}"/>
+                <a16:creationId xmlns:a16="http://schemas.microsoft.com/office/drawing/2014/main" id="{EDDB2987-BD6B-4221-B2D9-7270DF80E403}"/>
               </a:ext>
             </a:extLst>
           </p:cNvPr>
@@ -13690,9 +13782,9 @@
                 <a:solidFill>
                   <a:srgbClr val="2563EB"/>
                 </a:solidFill>
-                <a:latin typeface="Aptos"/>
-                <a:ea typeface="Aptos"/>
-                <a:cs typeface="Aptos"/>
+                <a:latin typeface="Microsoft YaHei"/>
+                <a:ea typeface="Microsoft YaHei"/>
+                <a:cs typeface="Microsoft YaHei"/>
               </a:defRPr>
             </a:pPr>
             <a:r>
@@ -13700,9 +13792,9 @@
                 <a:solidFill>
                   <a:srgbClr val="2563EB"/>
                 </a:solidFill>
-                <a:latin typeface="Aptos"/>
-                <a:ea typeface="Aptos"/>
-                <a:cs typeface="Aptos"/>
+                <a:latin typeface="Microsoft YaHei"/>
+                <a:ea typeface="Microsoft YaHei"/>
+                <a:cs typeface="Microsoft YaHei"/>
               </a:rPr>
               <a:t>本地验证</a:t>
             </a:r>
@@ -13714,7 +13806,7 @@
           <p:cNvPr id="8" name="">
             <a:extLst xmlns:a="http://schemas.openxmlformats.org/drawingml/2006/main">
               <a:ext uri="{FF2B5EF4-FFF2-40B4-BE49-F238E27FC236}">
-                <a16:creationId xmlns:a16="http://schemas.microsoft.com/office/drawing/2014/main" id="{7035C353-E92F-4801-9A6D-A6E228AC2D4A}"/>
+                <a16:creationId xmlns:a16="http://schemas.microsoft.com/office/drawing/2014/main" id="{192A006B-ADB1-475F-A632-F256DC62BC9D}"/>
               </a:ext>
             </a:extLst>
           </p:cNvPr>
@@ -13754,9 +13846,9 @@
                 <a:solidFill>
                   <a:srgbClr val="121826"/>
                 </a:solidFill>
-                <a:latin typeface="Aptos Mono"/>
-                <a:ea typeface="Aptos Mono"/>
-                <a:cs typeface="Aptos Mono"/>
+                <a:latin typeface="Consolas"/>
+                <a:ea typeface="Consolas"/>
+                <a:cs typeface="Consolas"/>
               </a:defRPr>
             </a:pPr>
             <a:r>
@@ -13764,9 +13856,9 @@
                 <a:solidFill>
                   <a:srgbClr val="121826"/>
                 </a:solidFill>
-                <a:latin typeface="Aptos Mono"/>
-                <a:ea typeface="Aptos Mono"/>
-                <a:cs typeface="Aptos Mono"/>
+                <a:latin typeface="Consolas"/>
+                <a:ea typeface="Consolas"/>
+                <a:cs typeface="Consolas"/>
               </a:rPr>
               <a:t>python scripts\\validate_project.py --quick</a:t>
             </a:r>
@@ -13778,7 +13870,7 @@
           <p:cNvPr id="9" name="">
             <a:extLst xmlns:a="http://schemas.openxmlformats.org/drawingml/2006/main">
               <a:ext uri="{FF2B5EF4-FFF2-40B4-BE49-F238E27FC236}">
-                <a16:creationId xmlns:a16="http://schemas.microsoft.com/office/drawing/2014/main" id="{F60ADC3E-F92A-4B94-9A68-AF822F150EC2}"/>
+                <a16:creationId xmlns:a16="http://schemas.microsoft.com/office/drawing/2014/main" id="{EE8D21B0-4F6A-49A8-B033-01DE9C756C56}"/>
               </a:ext>
             </a:extLst>
           </p:cNvPr>
@@ -13811,7 +13903,7 @@
           <p:cNvPr id="10" name="">
             <a:extLst xmlns:a="http://schemas.openxmlformats.org/drawingml/2006/main">
               <a:ext uri="{FF2B5EF4-FFF2-40B4-BE49-F238E27FC236}">
-                <a16:creationId xmlns:a16="http://schemas.microsoft.com/office/drawing/2014/main" id="{227501B4-8B68-4897-ACC3-EEAE43A5D789}"/>
+                <a16:creationId xmlns:a16="http://schemas.microsoft.com/office/drawing/2014/main" id="{752C066F-82DE-4605-ADFE-AAE9B26B7C85}"/>
               </a:ext>
             </a:extLst>
           </p:cNvPr>
@@ -13851,9 +13943,9 @@
                 <a:solidFill>
                   <a:srgbClr val="2563EB"/>
                 </a:solidFill>
-                <a:latin typeface="Aptos"/>
-                <a:ea typeface="Aptos"/>
-                <a:cs typeface="Aptos"/>
+                <a:latin typeface="Microsoft YaHei"/>
+                <a:ea typeface="Microsoft YaHei"/>
+                <a:cs typeface="Microsoft YaHei"/>
               </a:defRPr>
             </a:pPr>
             <a:r>
@@ -13861,9 +13953,9 @@
                 <a:solidFill>
                   <a:srgbClr val="2563EB"/>
                 </a:solidFill>
-                <a:latin typeface="Aptos"/>
-                <a:ea typeface="Aptos"/>
-                <a:cs typeface="Aptos"/>
+                <a:latin typeface="Microsoft YaHei"/>
+                <a:ea typeface="Microsoft YaHei"/>
+                <a:cs typeface="Microsoft YaHei"/>
               </a:rPr>
               <a:t>本地演示</a:t>
             </a:r>
@@ -13875,7 +13967,7 @@
           <p:cNvPr id="11" name="">
             <a:extLst xmlns:a="http://schemas.openxmlformats.org/drawingml/2006/main">
               <a:ext uri="{FF2B5EF4-FFF2-40B4-BE49-F238E27FC236}">
-                <a16:creationId xmlns:a16="http://schemas.microsoft.com/office/drawing/2014/main" id="{4896C63D-3188-4617-872C-A748DF1776DB}"/>
+                <a16:creationId xmlns:a16="http://schemas.microsoft.com/office/drawing/2014/main" id="{773B2E55-D2F5-4796-B1CE-733D382150FC}"/>
               </a:ext>
             </a:extLst>
           </p:cNvPr>
@@ -13915,9 +14007,9 @@
                 <a:solidFill>
                   <a:srgbClr val="121826"/>
                 </a:solidFill>
-                <a:latin typeface="Aptos Mono"/>
-                <a:ea typeface="Aptos Mono"/>
-                <a:cs typeface="Aptos Mono"/>
+                <a:latin typeface="Consolas"/>
+                <a:ea typeface="Consolas"/>
+                <a:cs typeface="Consolas"/>
               </a:defRPr>
             </a:pPr>
             <a:r>
@@ -13925,9 +14017,9 @@
                 <a:solidFill>
                   <a:srgbClr val="121826"/>
                 </a:solidFill>
-                <a:latin typeface="Aptos Mono"/>
-                <a:ea typeface="Aptos Mono"/>
-                <a:cs typeface="Aptos Mono"/>
+                <a:latin typeface="Consolas"/>
+                <a:ea typeface="Consolas"/>
+                <a:cs typeface="Consolas"/>
               </a:rPr>
               <a:t>python run_demo.py -&gt; http://127.0.0.1:8010</a:t>
             </a:r>
@@ -13939,7 +14031,7 @@
           <p:cNvPr id="12" name="">
             <a:extLst xmlns:a="http://schemas.openxmlformats.org/drawingml/2006/main">
               <a:ext uri="{FF2B5EF4-FFF2-40B4-BE49-F238E27FC236}">
-                <a16:creationId xmlns:a16="http://schemas.microsoft.com/office/drawing/2014/main" id="{DDAAB619-4B73-4214-B11E-3C29603E9F10}"/>
+                <a16:creationId xmlns:a16="http://schemas.microsoft.com/office/drawing/2014/main" id="{1B96422C-54BF-4C8F-A427-9A7678E755AC}"/>
               </a:ext>
             </a:extLst>
           </p:cNvPr>
@@ -13972,7 +14064,7 @@
           <p:cNvPr id="13" name="">
             <a:extLst xmlns:a="http://schemas.openxmlformats.org/drawingml/2006/main">
               <a:ext uri="{FF2B5EF4-FFF2-40B4-BE49-F238E27FC236}">
-                <a16:creationId xmlns:a16="http://schemas.microsoft.com/office/drawing/2014/main" id="{6C9475BC-20F1-469B-A11A-A3703D313815}"/>
+                <a16:creationId xmlns:a16="http://schemas.microsoft.com/office/drawing/2014/main" id="{B621CBF8-F7F3-48BB-ABBE-540DF009CBB8}"/>
               </a:ext>
             </a:extLst>
           </p:cNvPr>
@@ -14012,9 +14104,9 @@
                 <a:solidFill>
                   <a:srgbClr val="10B981"/>
                 </a:solidFill>
-                <a:latin typeface="Aptos"/>
-                <a:ea typeface="Aptos"/>
-                <a:cs typeface="Aptos"/>
+                <a:latin typeface="Microsoft YaHei"/>
+                <a:ea typeface="Microsoft YaHei"/>
+                <a:cs typeface="Microsoft YaHei"/>
               </a:defRPr>
             </a:pPr>
             <a:r>
@@ -14022,9 +14114,9 @@
                 <a:solidFill>
                   <a:srgbClr val="10B981"/>
                 </a:solidFill>
-                <a:latin typeface="Aptos"/>
-                <a:ea typeface="Aptos"/>
-                <a:cs typeface="Aptos"/>
+                <a:latin typeface="Microsoft YaHei"/>
+                <a:ea typeface="Microsoft YaHei"/>
+                <a:cs typeface="Microsoft YaHei"/>
               </a:rPr>
               <a:t>安全评测</a:t>
             </a:r>
@@ -14036,7 +14128,7 @@
           <p:cNvPr id="14" name="">
             <a:extLst xmlns:a="http://schemas.openxmlformats.org/drawingml/2006/main">
               <a:ext uri="{FF2B5EF4-FFF2-40B4-BE49-F238E27FC236}">
-                <a16:creationId xmlns:a16="http://schemas.microsoft.com/office/drawing/2014/main" id="{20534149-EC02-47D2-A0ED-BA5F08546E32}"/>
+                <a16:creationId xmlns:a16="http://schemas.microsoft.com/office/drawing/2014/main" id="{E9B09508-ABBA-455C-B14C-DA8E78149851}"/>
               </a:ext>
             </a:extLst>
           </p:cNvPr>
@@ -14076,9 +14168,9 @@
                 <a:solidFill>
                   <a:srgbClr val="121826"/>
                 </a:solidFill>
-                <a:latin typeface="Aptos Mono"/>
-                <a:ea typeface="Aptos Mono"/>
-                <a:cs typeface="Aptos Mono"/>
+                <a:latin typeface="Consolas"/>
+                <a:ea typeface="Consolas"/>
+                <a:cs typeface="Consolas"/>
               </a:defRPr>
             </a:pPr>
             <a:r>
@@ -14086,9 +14178,9 @@
                 <a:solidFill>
                   <a:srgbClr val="121826"/>
                 </a:solidFill>
-                <a:latin typeface="Aptos Mono"/>
-                <a:ea typeface="Aptos Mono"/>
-                <a:cs typeface="Aptos Mono"/>
+                <a:latin typeface="Consolas"/>
+                <a:ea typeface="Consolas"/>
+                <a:cs typeface="Consolas"/>
               </a:rPr>
               <a:t>python scripts\\evaluate_safety_gate.py --fail-on-critical</a:t>
             </a:r>
@@ -14100,7 +14192,7 @@
           <p:cNvPr id="15" name="">
             <a:extLst xmlns:a="http://schemas.openxmlformats.org/drawingml/2006/main">
               <a:ext uri="{FF2B5EF4-FFF2-40B4-BE49-F238E27FC236}">
-                <a16:creationId xmlns:a16="http://schemas.microsoft.com/office/drawing/2014/main" id="{B9AF6F85-E6B1-4255-B91F-8109C292C511}"/>
+                <a16:creationId xmlns:a16="http://schemas.microsoft.com/office/drawing/2014/main" id="{BB3D6ED9-E81A-45AF-AE65-AA17035B0427}"/>
               </a:ext>
             </a:extLst>
           </p:cNvPr>
@@ -14133,7 +14225,7 @@
           <p:cNvPr id="16" name="">
             <a:extLst xmlns:a="http://schemas.openxmlformats.org/drawingml/2006/main">
               <a:ext uri="{FF2B5EF4-FFF2-40B4-BE49-F238E27FC236}">
-                <a16:creationId xmlns:a16="http://schemas.microsoft.com/office/drawing/2014/main" id="{1CEC2FFF-D424-4874-AF88-2E172FAE6DA8}"/>
+                <a16:creationId xmlns:a16="http://schemas.microsoft.com/office/drawing/2014/main" id="{BFDA2809-8107-4ACF-96E8-36B1BEAB7175}"/>
               </a:ext>
             </a:extLst>
           </p:cNvPr>
@@ -14173,9 +14265,9 @@
                 <a:solidFill>
                   <a:srgbClr val="10B981"/>
                 </a:solidFill>
-                <a:latin typeface="Aptos"/>
-                <a:ea typeface="Aptos"/>
-                <a:cs typeface="Aptos"/>
+                <a:latin typeface="Microsoft YaHei"/>
+                <a:ea typeface="Microsoft YaHei"/>
+                <a:cs typeface="Microsoft YaHei"/>
               </a:defRPr>
             </a:pPr>
             <a:r>
@@ -14183,9 +14275,9 @@
                 <a:solidFill>
                   <a:srgbClr val="10B981"/>
                 </a:solidFill>
-                <a:latin typeface="Aptos"/>
-                <a:ea typeface="Aptos"/>
-                <a:cs typeface="Aptos"/>
+                <a:latin typeface="Microsoft YaHei"/>
+                <a:ea typeface="Microsoft YaHei"/>
+                <a:cs typeface="Microsoft YaHei"/>
               </a:rPr>
               <a:t>远端训练</a:t>
             </a:r>
@@ -14197,7 +14289,7 @@
           <p:cNvPr id="17" name="">
             <a:extLst xmlns:a="http://schemas.openxmlformats.org/drawingml/2006/main">
               <a:ext uri="{FF2B5EF4-FFF2-40B4-BE49-F238E27FC236}">
-                <a16:creationId xmlns:a16="http://schemas.microsoft.com/office/drawing/2014/main" id="{89A82544-1586-469C-8C47-381222969680}"/>
+                <a16:creationId xmlns:a16="http://schemas.microsoft.com/office/drawing/2014/main" id="{5D047223-E48E-4DBE-BDB2-D91B09E48730}"/>
               </a:ext>
             </a:extLst>
           </p:cNvPr>
@@ -14237,9 +14329,9 @@
                 <a:solidFill>
                   <a:srgbClr val="121826"/>
                 </a:solidFill>
-                <a:latin typeface="Aptos Mono"/>
-                <a:ea typeface="Aptos Mono"/>
-                <a:cs typeface="Aptos Mono"/>
+                <a:latin typeface="Consolas"/>
+                <a:ea typeface="Consolas"/>
+                <a:cs typeface="Consolas"/>
               </a:defRPr>
             </a:pPr>
             <a:r>
@@ -14247,9 +14339,9 @@
                 <a:solidFill>
                   <a:srgbClr val="121826"/>
                 </a:solidFill>
-                <a:latin typeface="Aptos Mono"/>
-                <a:ea typeface="Aptos Mono"/>
-                <a:cs typeface="Aptos Mono"/>
+                <a:latin typeface="Consolas"/>
+                <a:ea typeface="Consolas"/>
+                <a:cs typeface="Consolas"/>
               </a:rPr>
               <a:t>remote/train_qwen_lora.py</a:t>
             </a:r>
@@ -14261,7 +14353,7 @@
           <p:cNvPr id="18" name="">
             <a:extLst xmlns:a="http://schemas.openxmlformats.org/drawingml/2006/main">
               <a:ext uri="{FF2B5EF4-FFF2-40B4-BE49-F238E27FC236}">
-                <a16:creationId xmlns:a16="http://schemas.microsoft.com/office/drawing/2014/main" id="{82D69ADF-15F4-4D43-8E90-F91E21E2020D}"/>
+                <a16:creationId xmlns:a16="http://schemas.microsoft.com/office/drawing/2014/main" id="{226EEBAA-1FA0-4789-A4A9-1477AF5E1637}"/>
               </a:ext>
             </a:extLst>
           </p:cNvPr>
@@ -14294,7 +14386,7 @@
           <p:cNvPr id="19" name="">
             <a:extLst xmlns:a="http://schemas.openxmlformats.org/drawingml/2006/main">
               <a:ext uri="{FF2B5EF4-FFF2-40B4-BE49-F238E27FC236}">
-                <a16:creationId xmlns:a16="http://schemas.microsoft.com/office/drawing/2014/main" id="{0453F67A-0294-4D10-BCAE-7996E6BEA04F}"/>
+                <a16:creationId xmlns:a16="http://schemas.microsoft.com/office/drawing/2014/main" id="{32276A68-AE0C-4031-932C-C035D0FA3FEC}"/>
               </a:ext>
             </a:extLst>
           </p:cNvPr>
@@ -14334,9 +14426,9 @@
                 <a:solidFill>
                   <a:srgbClr val="10B981"/>
                 </a:solidFill>
-                <a:latin typeface="Aptos"/>
-                <a:ea typeface="Aptos"/>
-                <a:cs typeface="Aptos"/>
+                <a:latin typeface="Microsoft YaHei"/>
+                <a:ea typeface="Microsoft YaHei"/>
+                <a:cs typeface="Microsoft YaHei"/>
               </a:defRPr>
             </a:pPr>
             <a:r>
@@ -14344,9 +14436,9 @@
                 <a:solidFill>
                   <a:srgbClr val="10B981"/>
                 </a:solidFill>
-                <a:latin typeface="Aptos"/>
-                <a:ea typeface="Aptos"/>
-                <a:cs typeface="Aptos"/>
+                <a:latin typeface="Microsoft YaHei"/>
+                <a:ea typeface="Microsoft YaHei"/>
+                <a:cs typeface="Microsoft YaHei"/>
               </a:rPr>
               <a:t>远端评测</a:t>
             </a:r>
@@ -14358,7 +14450,7 @@
           <p:cNvPr id="20" name="">
             <a:extLst xmlns:a="http://schemas.openxmlformats.org/drawingml/2006/main">
               <a:ext uri="{FF2B5EF4-FFF2-40B4-BE49-F238E27FC236}">
-                <a16:creationId xmlns:a16="http://schemas.microsoft.com/office/drawing/2014/main" id="{B590D128-1B77-4421-9B91-6786FF3156C0}"/>
+                <a16:creationId xmlns:a16="http://schemas.microsoft.com/office/drawing/2014/main" id="{6E459B55-4461-4E63-8D96-24F87746D5A4}"/>
               </a:ext>
             </a:extLst>
           </p:cNvPr>
@@ -14398,9 +14490,9 @@
                 <a:solidFill>
                   <a:srgbClr val="121826"/>
                 </a:solidFill>
-                <a:latin typeface="Aptos Mono"/>
-                <a:ea typeface="Aptos Mono"/>
-                <a:cs typeface="Aptos Mono"/>
+                <a:latin typeface="Consolas"/>
+                <a:ea typeface="Consolas"/>
+                <a:cs typeface="Consolas"/>
               </a:defRPr>
             </a:pPr>
             <a:r>
@@ -14408,9 +14500,9 @@
                 <a:solidFill>
                   <a:srgbClr val="121826"/>
                 </a:solidFill>
-                <a:latin typeface="Aptos Mono"/>
-                <a:ea typeface="Aptos Mono"/>
-                <a:cs typeface="Aptos Mono"/>
+                <a:latin typeface="Consolas"/>
+                <a:ea typeface="Consolas"/>
+                <a:cs typeface="Consolas"/>
               </a:rPr>
               <a:t>remote/evaluate_qwen_lora.py</a:t>
             </a:r>
@@ -14422,7 +14514,7 @@
           <p:cNvPr id="21" name="">
             <a:extLst xmlns:a="http://schemas.openxmlformats.org/drawingml/2006/main">
               <a:ext uri="{FF2B5EF4-FFF2-40B4-BE49-F238E27FC236}">
-                <a16:creationId xmlns:a16="http://schemas.microsoft.com/office/drawing/2014/main" id="{D01381E5-484E-4993-8B9B-573F86A62DAB}"/>
+                <a16:creationId xmlns:a16="http://schemas.microsoft.com/office/drawing/2014/main" id="{0B4E94F2-DC56-4E87-8BE2-CC3317EE1ECE}"/>
               </a:ext>
             </a:extLst>
           </p:cNvPr>
@@ -14455,7 +14547,7 @@
           <p:cNvPr id="22" name="">
             <a:extLst xmlns:a="http://schemas.openxmlformats.org/drawingml/2006/main">
               <a:ext uri="{FF2B5EF4-FFF2-40B4-BE49-F238E27FC236}">
-                <a16:creationId xmlns:a16="http://schemas.microsoft.com/office/drawing/2014/main" id="{85137239-9651-4389-83AB-5EA99E5ACAD0}"/>
+                <a16:creationId xmlns:a16="http://schemas.microsoft.com/office/drawing/2014/main" id="{45811F2A-273F-4C76-94B8-B838C6ECFF86}"/>
               </a:ext>
             </a:extLst>
           </p:cNvPr>
@@ -14488,7 +14580,7 @@
           <p:cNvPr id="23" name="">
             <a:extLst xmlns:a="http://schemas.openxmlformats.org/drawingml/2006/main">
               <a:ext uri="{FF2B5EF4-FFF2-40B4-BE49-F238E27FC236}">
-                <a16:creationId xmlns:a16="http://schemas.microsoft.com/office/drawing/2014/main" id="{76F35EE9-073A-4275-B039-F59F5930FDA0}"/>
+                <a16:creationId xmlns:a16="http://schemas.microsoft.com/office/drawing/2014/main" id="{D361E4D0-7AB9-41D1-B25E-DA3ACF24B092}"/>
               </a:ext>
             </a:extLst>
           </p:cNvPr>
@@ -14528,9 +14620,9 @@
                 <a:solidFill>
                   <a:srgbClr val="121826"/>
                 </a:solidFill>
-                <a:latin typeface="Aptos"/>
-                <a:ea typeface="Aptos"/>
-                <a:cs typeface="Aptos"/>
+                <a:latin typeface="Microsoft YaHei"/>
+                <a:ea typeface="Microsoft YaHei"/>
+                <a:cs typeface="Microsoft YaHei"/>
               </a:defRPr>
             </a:pPr>
             <a:r>
@@ -14538,11 +14630,11 @@
                 <a:solidFill>
                   <a:srgbClr val="121826"/>
                 </a:solidFill>
-                <a:latin typeface="Aptos"/>
-                <a:ea typeface="Aptos"/>
-                <a:cs typeface="Aptos"/>
+                <a:latin typeface="Microsoft YaHei"/>
+                <a:ea typeface="Microsoft YaHei"/>
+                <a:cs typeface="Microsoft YaHei"/>
               </a:rPr>
-              <a:t>核心证据目录：results/remote_autodl_20260608_final，包括训练日志、base/LoRA JSONL、adapter 和结果摘要。</a:t>
+              <a:t>核心证据目录：results/remote_autodl_20260621_expanded，包括训练日志、base/LoRA JSONL、adapter、结果摘要和远端状态。</a:t>
             </a:r>
           </a:p>
         </p:txBody>
@@ -14552,7 +14644,7 @@
           <p:cNvPr id="24" name="">
             <a:extLst xmlns:a="http://schemas.openxmlformats.org/drawingml/2006/main">
               <a:ext uri="{FF2B5EF4-FFF2-40B4-BE49-F238E27FC236}">
-                <a16:creationId xmlns:a16="http://schemas.microsoft.com/office/drawing/2014/main" id="{20B12EC3-4058-4984-8DDF-2B90E520616E}"/>
+                <a16:creationId xmlns:a16="http://schemas.microsoft.com/office/drawing/2014/main" id="{94CF8804-B254-45E8-AD75-E4E09061036B}"/>
               </a:ext>
             </a:extLst>
           </p:cNvPr>
@@ -14592,9 +14684,9 @@
                 <a:solidFill>
                   <a:srgbClr val="64748B"/>
                 </a:solidFill>
-                <a:latin typeface="Aptos"/>
-                <a:ea typeface="Aptos"/>
-                <a:cs typeface="Aptos"/>
+                <a:latin typeface="Microsoft YaHei"/>
+                <a:ea typeface="Microsoft YaHei"/>
+                <a:cs typeface="Microsoft YaHei"/>
               </a:defRPr>
             </a:pPr>
             <a:r>
@@ -14602,9 +14694,9 @@
                 <a:solidFill>
                   <a:srgbClr val="64748B"/>
                 </a:solidFill>
-                <a:latin typeface="Aptos"/>
-                <a:ea typeface="Aptos"/>
-                <a:cs typeface="Aptos"/>
+                <a:latin typeface="Microsoft YaHei"/>
+                <a:ea typeface="Microsoft YaHei"/>
+                <a:cs typeface="Microsoft YaHei"/>
               </a:rPr>
               <a:t>ShipVoice | 信息安全基础 A2</a:t>
             </a:r>
@@ -14616,7 +14708,7 @@
           <p:cNvPr id="25" name="">
             <a:extLst xmlns:a="http://schemas.openxmlformats.org/drawingml/2006/main">
               <a:ext uri="{FF2B5EF4-FFF2-40B4-BE49-F238E27FC236}">
-                <a16:creationId xmlns:a16="http://schemas.microsoft.com/office/drawing/2014/main" id="{54401992-62E0-47D3-A246-C0BC3487E871}"/>
+                <a16:creationId xmlns:a16="http://schemas.microsoft.com/office/drawing/2014/main" id="{08B317D6-A547-4ACB-A7AE-CDB065454C88}"/>
               </a:ext>
             </a:extLst>
           </p:cNvPr>
@@ -14656,9 +14748,9 @@
                 <a:solidFill>
                   <a:srgbClr val="64748B"/>
                 </a:solidFill>
-                <a:latin typeface="Aptos"/>
-                <a:ea typeface="Aptos"/>
-                <a:cs typeface="Aptos"/>
+                <a:latin typeface="Microsoft YaHei"/>
+                <a:ea typeface="Microsoft YaHei"/>
+                <a:cs typeface="Microsoft YaHei"/>
               </a:defRPr>
             </a:pPr>
             <a:r>
@@ -14666,9 +14758,9 @@
                 <a:solidFill>
                   <a:srgbClr val="64748B"/>
                 </a:solidFill>
-                <a:latin typeface="Aptos"/>
-                <a:ea typeface="Aptos"/>
-                <a:cs typeface="Aptos"/>
+                <a:latin typeface="Microsoft YaHei"/>
+                <a:ea typeface="Microsoft YaHei"/>
+                <a:cs typeface="Microsoft YaHei"/>
               </a:rPr>
               <a:t>09</a:t>
             </a:r>
@@ -14678,7 +14770,7 @@
     </p:spTree>
     <p:extLst>
       <p:ext uri="{BB962C8B-B14F-4D97-AF65-F5344CB8AC3E}">
-        <p14:creationId xmlns:p14="http://schemas.microsoft.com/office/powerpoint/2010/main" val="332514219"/>
+        <p14:creationId xmlns:p14="http://schemas.microsoft.com/office/powerpoint/2010/main" val="1626397769"/>
       </p:ext>
     </p:extLst>
   </p:cSld>
@@ -14743,12 +14835,58 @@
         <a:solidFill>
           <a:schemeClr val="phClr"/>
         </a:solidFill>
-        <a:solidFill>
-          <a:schemeClr val="dk1"/>
-        </a:solidFill>
-        <a:solidFill>
-          <a:schemeClr val="accent1"/>
-        </a:solidFill>
+        <a:gradFill>
+          <a:gsLst>
+            <a:gs pos="0">
+              <a:schemeClr val="phClr">
+                <a:tint val="67000"/>
+                <a:lumMod val="110000"/>
+                <a:satMod val="105000"/>
+              </a:schemeClr>
+            </a:gs>
+            <a:gs pos="50000">
+              <a:schemeClr val="phClr">
+                <a:tint val="73000"/>
+                <a:lumMod val="105000"/>
+                <a:satMod val="103000"/>
+              </a:schemeClr>
+            </a:gs>
+            <a:gs pos="100000">
+              <a:schemeClr val="phClr">
+                <a:tint val="81000"/>
+                <a:lumMod val="105000"/>
+                <a:satMod val="109000"/>
+              </a:schemeClr>
+            </a:gs>
+          </a:gsLst>
+          <a:lin ang="5400000" scaled="0"/>
+        </a:gradFill>
+        <a:gradFill>
+          <a:gsLst>
+            <a:gs pos="0">
+              <a:schemeClr val="phClr">
+                <a:tint val="94000"/>
+                <a:lumMod val="102000"/>
+                <a:satMod val="103000"/>
+              </a:schemeClr>
+            </a:gs>
+            <a:gs pos="50000">
+              <a:schemeClr val="phClr">
+                <a:shade val="100000"/>
+                <a:lumMod val="100000"/>
+                <a:satMod val="110000"/>
+              </a:schemeClr>
+            </a:gs>
+            <a:gs pos="100000">
+              <a:schemeClr val="phClr">
+                <a:shade val="78000"/>
+                <a:lumMod val="99000"/>
+                <a:satMod val="120000"/>
+              </a:schemeClr>
+            </a:gs>
+          </a:gsLst>
+          <a:lin ang="5400000" scaled="0"/>
+        </a:gradFill>
       </a:fillStyleLst>
       <a:lnStyleLst>
         <a:ln w="12700">
